--- a/docs/Презентация.pptx
+++ b/docs/Презентация.pptx
@@ -131,7 +131,7 @@
   </p:defaultTextStyle>
   <p:extLst>
     <p:ext uri="{EFAFB233-063F-42B5-8137-9DF3F51BA10A}">
-      <p15:sldGuideLst xmlns:p15="http://schemas.microsoft.com/office/powerpoint/2012/main" xmlns=""/>
+      <p15:sldGuideLst xmlns="" xmlns:p15="http://schemas.microsoft.com/office/powerpoint/2012/main"/>
     </p:ext>
   </p:extLst>
 </p:presentation>
@@ -3518,7 +3518,7 @@
           <p:cNvPr id="5122" name="Заголовок 1">
             <a:extLst>
               <a:ext uri="{FF2B5EF4-FFF2-40B4-BE49-F238E27FC236}">
-                <a16:creationId xmlns:a16="http://schemas.microsoft.com/office/drawing/2014/main" xmlns="" id="{4B5591A6-5834-4185-B35A-E25027E602E1}"/>
+                <a16:creationId xmlns="" xmlns:a16="http://schemas.microsoft.com/office/drawing/2014/main" id="{4B5591A6-5834-4185-B35A-E25027E602E1}"/>
               </a:ext>
             </a:extLst>
           </p:cNvPr>
@@ -3560,7 +3560,7 @@
           <p:cNvPr id="5123" name="Подзаголовок 2">
             <a:extLst>
               <a:ext uri="{FF2B5EF4-FFF2-40B4-BE49-F238E27FC236}">
-                <a16:creationId xmlns:a16="http://schemas.microsoft.com/office/drawing/2014/main" xmlns="" id="{E3566C31-9F5B-4D4E-9E6C-6AC8B8C750D7}"/>
+                <a16:creationId xmlns="" xmlns:a16="http://schemas.microsoft.com/office/drawing/2014/main" id="{E3566C31-9F5B-4D4E-9E6C-6AC8B8C750D7}"/>
               </a:ext>
             </a:extLst>
           </p:cNvPr>
@@ -3635,7 +3635,7 @@
           <p:cNvPr id="5124" name="TextBox 3">
             <a:extLst>
               <a:ext uri="{FF2B5EF4-FFF2-40B4-BE49-F238E27FC236}">
-                <a16:creationId xmlns:a16="http://schemas.microsoft.com/office/drawing/2014/main" xmlns="" id="{75A24AD9-E605-4CC6-8C7C-D67DE4C4CD97}"/>
+                <a16:creationId xmlns="" xmlns:a16="http://schemas.microsoft.com/office/drawing/2014/main" id="{75A24AD9-E605-4CC6-8C7C-D67DE4C4CD97}"/>
               </a:ext>
             </a:extLst>
           </p:cNvPr>
@@ -3863,7 +3863,7 @@
           <p:cNvPr id="5125" name="TextBox 5">
             <a:extLst>
               <a:ext uri="{FF2B5EF4-FFF2-40B4-BE49-F238E27FC236}">
-                <a16:creationId xmlns:a16="http://schemas.microsoft.com/office/drawing/2014/main" xmlns="" id="{32D6B6ED-C1D5-4045-A57B-61B43F7C8C06}"/>
+                <a16:creationId xmlns="" xmlns:a16="http://schemas.microsoft.com/office/drawing/2014/main" id="{32D6B6ED-C1D5-4045-A57B-61B43F7C8C06}"/>
               </a:ext>
             </a:extLst>
           </p:cNvPr>
@@ -4066,7 +4066,7 @@
           <p:cNvPr id="2" name="Номер слайда 1">
             <a:extLst>
               <a:ext uri="{FF2B5EF4-FFF2-40B4-BE49-F238E27FC236}">
-                <a16:creationId xmlns:a16="http://schemas.microsoft.com/office/drawing/2014/main" xmlns="" id="{46930FCD-49CE-443B-97F5-6039E4520D00}"/>
+                <a16:creationId xmlns="" xmlns:a16="http://schemas.microsoft.com/office/drawing/2014/main" id="{46930FCD-49CE-443B-97F5-6039E4520D00}"/>
               </a:ext>
             </a:extLst>
           </p:cNvPr>
@@ -4317,8 +4317,8 @@
         </p:blipFill>
         <p:spPr bwMode="auto">
           <a:xfrm>
-            <a:off x="6496580" y="5350968"/>
-            <a:ext cx="2348971" cy="1321296"/>
+            <a:off x="4381501" y="3802857"/>
+            <a:ext cx="3978276" cy="2237780"/>
           </a:xfrm>
           <a:prstGeom prst="rect">
             <a:avLst/>
@@ -4358,8 +4358,8 @@
         </p:blipFill>
         <p:spPr bwMode="auto">
           <a:xfrm>
-            <a:off x="288925" y="5350968"/>
-            <a:ext cx="2452158" cy="1379339"/>
+            <a:off x="471483" y="3802857"/>
+            <a:ext cx="3633790" cy="2044007"/>
           </a:xfrm>
           <a:prstGeom prst="rect">
             <a:avLst/>
@@ -4394,143 +4394,93 @@
         </p:spPr>
         <p:txBody>
           <a:bodyPr>
-            <a:normAutofit fontScale="62500" lnSpcReduction="20000"/>
+            <a:normAutofit/>
           </a:bodyPr>
           <a:lstStyle/>
+          <a:p>
+            <a:pPr marL="0" indent="0" defTabSz="457200" hangingPunct="0">
+              <a:buNone/>
+            </a:pPr>
+            <a:r>
+              <a:rPr lang="ru-RU" sz="1800" dirty="0"/>
+              <a:t>Почему PHP и </a:t>
+            </a:r>
+            <a:r>
+              <a:rPr lang="ru-RU" sz="1800" dirty="0" err="1"/>
+              <a:t>Laravel</a:t>
+            </a:r>
+            <a:r>
+              <a:rPr lang="ru-RU" sz="1800" dirty="0"/>
+              <a:t> для </a:t>
+            </a:r>
+            <a:r>
+              <a:rPr lang="ru-RU" sz="1800" dirty="0" err="1"/>
+              <a:t>бэкенда</a:t>
+            </a:r>
+            <a:r>
+              <a:rPr lang="ru-RU" sz="1800" dirty="0"/>
+              <a:t>:</a:t>
+            </a:r>
+            <a:endParaRPr lang="ru-RU" sz="1800" dirty="0"/>
+          </a:p>
+          <a:p>
+            <a:pPr lvl="0" defTabSz="457200" hangingPunct="0"/>
+            <a:r>
+              <a:rPr lang="ru-RU" sz="1800" dirty="0"/>
+              <a:t>Скорость </a:t>
+            </a:r>
+            <a:r>
+              <a:rPr lang="ru-RU" sz="1800" dirty="0"/>
+              <a:t>разработки</a:t>
+            </a:r>
+            <a:endParaRPr lang="en-US" sz="1800" dirty="0"/>
+          </a:p>
+          <a:p>
+            <a:pPr lvl="0" defTabSz="457200" hangingPunct="0"/>
+            <a:r>
+              <a:rPr lang="ru-RU" sz="1800" dirty="0"/>
+              <a:t>Соответствие </a:t>
+            </a:r>
+            <a:r>
+              <a:rPr lang="ru-RU" sz="1800" dirty="0"/>
+              <a:t>требованиям безопасности </a:t>
+            </a:r>
+            <a:endParaRPr lang="en-US" sz="1800" dirty="0"/>
+          </a:p>
+          <a:p>
+            <a:pPr lvl="0" defTabSz="457200" hangingPunct="0"/>
+            <a:r>
+              <a:rPr lang="ru-RU" sz="1800" dirty="0"/>
+              <a:t>Удобство </a:t>
+            </a:r>
+            <a:r>
+              <a:rPr lang="ru-RU" sz="1800" dirty="0"/>
+              <a:t>работы с </a:t>
+            </a:r>
+            <a:r>
+              <a:rPr lang="ru-RU" sz="1800" dirty="0"/>
+              <a:t>БД</a:t>
+            </a:r>
+            <a:endParaRPr lang="ru-RU" sz="1800" dirty="0"/>
+          </a:p>
+          <a:p>
+            <a:pPr lvl="0" defTabSz="457200" hangingPunct="0"/>
+            <a:r>
+              <a:rPr lang="ru-RU" sz="1800" dirty="0"/>
+              <a:t>Большое сообщество и экосистема </a:t>
+            </a:r>
+            <a:r>
+              <a:rPr lang="ru-RU" dirty="0" smtClean="0"/>
+              <a:t>	</a:t>
+            </a:r>
+            <a:endParaRPr lang="en-US" dirty="0" smtClean="0"/>
+          </a:p>
           <a:p>
             <a:pPr marL="0" indent="0" hangingPunct="0">
               <a:buNone/>
             </a:pPr>
             <a:r>
               <a:rPr lang="ru-RU" dirty="0"/>
-              <a:t>Почему PHP и </a:t>
-            </a:r>
-            <a:r>
-              <a:rPr lang="ru-RU" dirty="0" err="1"/>
-              <a:t>Laravel</a:t>
-            </a:r>
-            <a:r>
-              <a:rPr lang="ru-RU" dirty="0"/>
-              <a:t> для </a:t>
-            </a:r>
-            <a:r>
-              <a:rPr lang="ru-RU" dirty="0" err="1" smtClean="0"/>
-              <a:t>бэкенда</a:t>
-            </a:r>
-            <a:r>
-              <a:rPr lang="ru-RU" dirty="0" smtClean="0"/>
-              <a:t>:</a:t>
-            </a:r>
-            <a:endParaRPr lang="ru-RU" dirty="0"/>
-          </a:p>
-          <a:p>
-            <a:pPr lvl="0" hangingPunct="0"/>
-            <a:r>
-              <a:rPr lang="ru-RU" dirty="0"/>
-              <a:t>Скорость разработки - </a:t>
-            </a:r>
-            <a:r>
-              <a:rPr lang="ru-RU" dirty="0" err="1"/>
-              <a:t>Laravel</a:t>
-            </a:r>
-            <a:r>
-              <a:rPr lang="ru-RU" dirty="0"/>
-              <a:t> предоставляет готовые компоненты: ORM (</a:t>
-            </a:r>
-            <a:r>
-              <a:rPr lang="ru-RU" dirty="0" err="1"/>
-              <a:t>Eloquent</a:t>
-            </a:r>
-            <a:r>
-              <a:rPr lang="ru-RU" dirty="0"/>
-              <a:t>), аутентификацию, миграции, маршрутизацию, защиту от CSRF и XSS.</a:t>
-            </a:r>
-          </a:p>
-          <a:p>
-            <a:pPr lvl="0" hangingPunct="0"/>
-            <a:r>
-              <a:rPr lang="ru-RU" dirty="0"/>
-              <a:t>Соответствие требованиям безопасности - </a:t>
-            </a:r>
-            <a:r>
-              <a:rPr lang="ru-RU" dirty="0" err="1"/>
-              <a:t>хэширование</a:t>
-            </a:r>
-            <a:r>
-              <a:rPr lang="ru-RU" dirty="0"/>
-              <a:t> паролей (</a:t>
-            </a:r>
-            <a:r>
-              <a:rPr lang="ru-RU" dirty="0" err="1"/>
-              <a:t>bcrypt</a:t>
-            </a:r>
-            <a:r>
-              <a:rPr lang="ru-RU" dirty="0"/>
-              <a:t>), ролевая модель (</a:t>
-            </a:r>
-            <a:r>
-              <a:rPr lang="ru-RU" dirty="0" err="1"/>
-              <a:t>user_types</a:t>
-            </a:r>
-            <a:r>
-              <a:rPr lang="ru-RU" dirty="0"/>
-              <a:t>), защита от SQL-инъекций через </a:t>
-            </a:r>
-            <a:r>
-              <a:rPr lang="ru-RU" dirty="0" err="1"/>
-              <a:t>Eloquent</a:t>
-            </a:r>
-            <a:r>
-              <a:rPr lang="ru-RU" dirty="0"/>
-              <a:t>.</a:t>
-            </a:r>
-          </a:p>
-          <a:p>
-            <a:pPr lvl="0" hangingPunct="0"/>
-            <a:r>
-              <a:rPr lang="ru-RU" dirty="0"/>
-              <a:t>Удобство работы с БД - миграции позволяют </a:t>
-            </a:r>
-            <a:r>
-              <a:rPr lang="ru-RU" dirty="0" err="1"/>
-              <a:t>версионировать</a:t>
-            </a:r>
-            <a:r>
-              <a:rPr lang="ru-RU" dirty="0"/>
-              <a:t> структуру базы данных, </a:t>
-            </a:r>
-            <a:r>
-              <a:rPr lang="ru-RU" dirty="0" err="1"/>
-              <a:t>сидеры</a:t>
-            </a:r>
-            <a:r>
-              <a:rPr lang="ru-RU" dirty="0"/>
-              <a:t> - заполнять тестовыми данными.</a:t>
-            </a:r>
-          </a:p>
-          <a:p>
-            <a:pPr lvl="0" hangingPunct="0"/>
-            <a:r>
-              <a:rPr lang="ru-RU" dirty="0"/>
-              <a:t>Большое сообщество и экосистема - множество готовых пакетов, обширная документация.</a:t>
-            </a:r>
-          </a:p>
-          <a:p>
-            <a:pPr marL="0" indent="0" hangingPunct="0">
-              <a:buNone/>
-            </a:pPr>
-            <a:r>
-              <a:rPr lang="ru-RU" dirty="0"/>
-              <a:t>	</a:t>
-            </a:r>
-            <a:endParaRPr lang="en-US" dirty="0" smtClean="0"/>
-          </a:p>
-          <a:p>
-            <a:pPr marL="0" indent="0" hangingPunct="0">
-              <a:buNone/>
-            </a:pPr>
-            <a:r>
-              <a:rPr lang="ru-RU" dirty="0"/>
               <a:t>	</a:t>
             </a:r>
           </a:p>
@@ -4544,8 +4494,8 @@
         </p:nvSpPr>
         <p:spPr>
           <a:xfrm>
-            <a:off x="190498" y="1135620"/>
-            <a:ext cx="3914775" cy="4247317"/>
+            <a:off x="330990" y="1335644"/>
+            <a:ext cx="3914775" cy="2031325"/>
           </a:xfrm>
           <a:prstGeom prst="rect">
             <a:avLst/>
@@ -4598,16 +4548,13 @@
             </a:pPr>
             <a:r>
               <a:rPr lang="ru-RU" dirty="0" smtClean="0"/>
-              <a:t>Компонентный подход - </a:t>
-            </a:r>
-            <a:r>
-              <a:rPr lang="ru-RU" dirty="0" err="1" smtClean="0"/>
-              <a:t>переиспользование</a:t>
+              <a:t>Компонентный </a:t>
             </a:r>
             <a:r>
               <a:rPr lang="ru-RU" dirty="0" smtClean="0"/>
-              <a:t> UI-блоков (карточки товаров, формы).</a:t>
-            </a:r>
+              <a:t>подход</a:t>
+            </a:r>
+            <a:endParaRPr lang="ru-RU" dirty="0"/>
           </a:p>
           <a:p>
             <a:pPr marL="285750" lvl="0" indent="-285750" hangingPunct="0">
@@ -4616,15 +4563,7 @@
             </a:pPr>
             <a:r>
               <a:rPr lang="ru-RU" dirty="0" smtClean="0"/>
-              <a:t>Адаптивность - </a:t>
-            </a:r>
-            <a:r>
-              <a:rPr lang="ru-RU" dirty="0" err="1" smtClean="0"/>
-              <a:t>React</a:t>
-            </a:r>
-            <a:r>
-              <a:rPr lang="ru-RU" dirty="0" smtClean="0"/>
-              <a:t> хорошо работает с адаптивным дизайном.</a:t>
+              <a:t>Адаптивность</a:t>
             </a:r>
           </a:p>
           <a:p>
@@ -4634,32 +4573,13 @@
             </a:pPr>
             <a:r>
               <a:rPr lang="ru-RU" dirty="0" smtClean="0"/>
-              <a:t>Экосистема - </a:t>
-            </a:r>
-            <a:r>
-              <a:rPr lang="ru-RU" dirty="0" err="1" smtClean="0"/>
-              <a:t>React</a:t>
+              <a:t>Экосистема</a:t>
             </a:r>
             <a:r>
               <a:rPr lang="ru-RU" dirty="0" smtClean="0"/>
-              <a:t> </a:t>
-            </a:r>
-            <a:r>
-              <a:rPr lang="ru-RU" dirty="0" err="1" smtClean="0"/>
-              <a:t>Router</a:t>
-            </a:r>
-            <a:r>
-              <a:rPr lang="ru-RU" dirty="0" smtClean="0"/>
-              <a:t> (маршрутизация), </a:t>
-            </a:r>
-            <a:r>
-              <a:rPr lang="ru-RU" dirty="0" err="1" smtClean="0"/>
-              <a:t>Axios</a:t>
-            </a:r>
-            <a:r>
-              <a:rPr lang="ru-RU" dirty="0" smtClean="0"/>
-              <a:t> (HTTP-запросы)</a:t>
-            </a:r>
+              <a:t> </a:t>
+            </a:r>
+            <a:endParaRPr lang="ru-RU" dirty="0" smtClean="0"/>
           </a:p>
           <a:p>
             <a:pPr marL="285750" lvl="0" indent="-285750" hangingPunct="0">
@@ -4668,7 +4588,11 @@
             </a:pPr>
             <a:r>
               <a:rPr lang="ru-RU" dirty="0" smtClean="0"/>
-              <a:t>Читаемость кода</a:t>
+              <a:t>Читаемость </a:t>
+            </a:r>
+            <a:r>
+              <a:rPr lang="ru-RU" dirty="0" smtClean="0"/>
+              <a:t>кода</a:t>
             </a:r>
           </a:p>
           <a:p>
@@ -4682,23 +4606,7 @@
             </a:r>
             <a:r>
               <a:rPr lang="ru-RU" dirty="0" smtClean="0"/>
-              <a:t>сообщество - Готовые </a:t>
-            </a:r>
-            <a:r>
-              <a:rPr lang="ru-RU" dirty="0"/>
-              <a:t>решения для типовых </a:t>
-            </a:r>
-            <a:r>
-              <a:rPr lang="ru-RU" dirty="0" smtClean="0"/>
-              <a:t>задач, библиотеки </a:t>
-            </a:r>
-            <a:r>
-              <a:rPr lang="ru-RU" dirty="0"/>
-              <a:t>почти для любых </a:t>
-            </a:r>
-            <a:r>
-              <a:rPr lang="ru-RU" dirty="0" smtClean="0"/>
-              <a:t>потребностей</a:t>
+              <a:t>сообщество</a:t>
             </a:r>
             <a:endParaRPr lang="ru-RU" dirty="0"/>
           </a:p>
@@ -4739,7 +4647,7 @@
           <p:cNvPr id="2" name="Номер слайда 1">
             <a:extLst>
               <a:ext uri="{FF2B5EF4-FFF2-40B4-BE49-F238E27FC236}">
-                <a16:creationId xmlns:a16="http://schemas.microsoft.com/office/drawing/2014/main" xmlns="" id="{8C826DA7-D1DD-4311-A823-D438A4D9C3AA}"/>
+                <a16:creationId xmlns="" xmlns:a16="http://schemas.microsoft.com/office/drawing/2014/main" id="{8C826DA7-D1DD-4311-A823-D438A4D9C3AA}"/>
               </a:ext>
             </a:extLst>
           </p:cNvPr>
@@ -4779,7 +4687,7 @@
           <p:cNvPr id="4" name="Прямоугольник 3">
             <a:extLst>
               <a:ext uri="{FF2B5EF4-FFF2-40B4-BE49-F238E27FC236}">
-                <a16:creationId xmlns:a16="http://schemas.microsoft.com/office/drawing/2014/main" xmlns="" id="{E2B8A57F-0C4E-48A2-8E8F-1C89F19B4C11}"/>
+                <a16:creationId xmlns="" xmlns:a16="http://schemas.microsoft.com/office/drawing/2014/main" id="{E2B8A57F-0C4E-48A2-8E8F-1C89F19B4C11}"/>
               </a:ext>
             </a:extLst>
           </p:cNvPr>
@@ -4833,7 +4741,7 @@
           <p:cNvPr id="7" name="Прямоугольник 6">
             <a:extLst>
               <a:ext uri="{FF2B5EF4-FFF2-40B4-BE49-F238E27FC236}">
-                <a16:creationId xmlns:a16="http://schemas.microsoft.com/office/drawing/2014/main" xmlns="" id="{8B4CD0C1-7F79-4EE9-92E1-4406C1DE0C4D}"/>
+                <a16:creationId xmlns="" xmlns:a16="http://schemas.microsoft.com/office/drawing/2014/main" id="{8B4CD0C1-7F79-4EE9-92E1-4406C1DE0C4D}"/>
               </a:ext>
             </a:extLst>
           </p:cNvPr>
@@ -5383,7 +5291,7 @@
           <p:cNvPr id="2" name="Номер слайда 1">
             <a:extLst>
               <a:ext uri="{FF2B5EF4-FFF2-40B4-BE49-F238E27FC236}">
-                <a16:creationId xmlns:a16="http://schemas.microsoft.com/office/drawing/2014/main" xmlns="" id="{9BE8A756-4F8A-4B4E-9CA4-0B2B58754F23}"/>
+                <a16:creationId xmlns="" xmlns:a16="http://schemas.microsoft.com/office/drawing/2014/main" id="{9BE8A756-4F8A-4B4E-9CA4-0B2B58754F23}"/>
               </a:ext>
             </a:extLst>
           </p:cNvPr>
@@ -5423,7 +5331,7 @@
           <p:cNvPr id="3" name="Прямоугольник 2">
             <a:extLst>
               <a:ext uri="{FF2B5EF4-FFF2-40B4-BE49-F238E27FC236}">
-                <a16:creationId xmlns:a16="http://schemas.microsoft.com/office/drawing/2014/main" xmlns="" id="{F1F27FB0-1F6C-44A1-A435-43CA134E566B}"/>
+                <a16:creationId xmlns="" xmlns:a16="http://schemas.microsoft.com/office/drawing/2014/main" id="{F1F27FB0-1F6C-44A1-A435-43CA134E566B}"/>
               </a:ext>
             </a:extLst>
           </p:cNvPr>
@@ -5471,7 +5379,7 @@
           <p:cNvPr id="7" name="TextBox 6">
             <a:extLst>
               <a:ext uri="{FF2B5EF4-FFF2-40B4-BE49-F238E27FC236}">
-                <a16:creationId xmlns:a16="http://schemas.microsoft.com/office/drawing/2014/main" xmlns="" id="{4A43B050-07A0-4514-AC09-5D92151B5A5B}"/>
+                <a16:creationId xmlns="" xmlns:a16="http://schemas.microsoft.com/office/drawing/2014/main" id="{4A43B050-07A0-4514-AC09-5D92151B5A5B}"/>
               </a:ext>
             </a:extLst>
           </p:cNvPr>
@@ -5509,7 +5417,7 @@
           <p:cNvPr id="10" name="TextBox 9">
             <a:extLst>
               <a:ext uri="{FF2B5EF4-FFF2-40B4-BE49-F238E27FC236}">
-                <a16:creationId xmlns:a16="http://schemas.microsoft.com/office/drawing/2014/main" xmlns="" id="{55B50A2E-4A39-49F0-B727-CDF21C8341D9}"/>
+                <a16:creationId xmlns="" xmlns:a16="http://schemas.microsoft.com/office/drawing/2014/main" id="{55B50A2E-4A39-49F0-B727-CDF21C8341D9}"/>
               </a:ext>
             </a:extLst>
           </p:cNvPr>
@@ -5671,7 +5579,7 @@
           <p:cNvPr id="2" name="Номер слайда 1">
             <a:extLst>
               <a:ext uri="{FF2B5EF4-FFF2-40B4-BE49-F238E27FC236}">
-                <a16:creationId xmlns:a16="http://schemas.microsoft.com/office/drawing/2014/main" xmlns="" id="{C820370D-A83B-4B37-B843-B456D57F2960}"/>
+                <a16:creationId xmlns="" xmlns:a16="http://schemas.microsoft.com/office/drawing/2014/main" id="{C820370D-A83B-4B37-B843-B456D57F2960}"/>
               </a:ext>
             </a:extLst>
           </p:cNvPr>
@@ -5711,7 +5619,7 @@
           <p:cNvPr id="3" name="Прямоугольник 2">
             <a:extLst>
               <a:ext uri="{FF2B5EF4-FFF2-40B4-BE49-F238E27FC236}">
-                <a16:creationId xmlns:a16="http://schemas.microsoft.com/office/drawing/2014/main" xmlns="" id="{C71F0BEC-C0A2-49FD-A749-FC7B77565389}"/>
+                <a16:creationId xmlns="" xmlns:a16="http://schemas.microsoft.com/office/drawing/2014/main" id="{C71F0BEC-C0A2-49FD-A749-FC7B77565389}"/>
               </a:ext>
             </a:extLst>
           </p:cNvPr>
@@ -5752,7 +5660,7 @@
           <p:cNvPr id="21" name="TextBox 20">
             <a:extLst>
               <a:ext uri="{FF2B5EF4-FFF2-40B4-BE49-F238E27FC236}">
-                <a16:creationId xmlns:a16="http://schemas.microsoft.com/office/drawing/2014/main" xmlns="" id="{42642DA8-38FB-40C2-A8E5-E2D7DE3F20BE}"/>
+                <a16:creationId xmlns="" xmlns:a16="http://schemas.microsoft.com/office/drawing/2014/main" id="{42642DA8-38FB-40C2-A8E5-E2D7DE3F20BE}"/>
               </a:ext>
             </a:extLst>
           </p:cNvPr>
@@ -5794,7 +5702,7 @@
           <p:cNvPr id="22" name="TextBox 21">
             <a:extLst>
               <a:ext uri="{FF2B5EF4-FFF2-40B4-BE49-F238E27FC236}">
-                <a16:creationId xmlns:a16="http://schemas.microsoft.com/office/drawing/2014/main" xmlns="" id="{42642DA8-38FB-40C2-A8E5-E2D7DE3F20BE}"/>
+                <a16:creationId xmlns="" xmlns:a16="http://schemas.microsoft.com/office/drawing/2014/main" id="{42642DA8-38FB-40C2-A8E5-E2D7DE3F20BE}"/>
               </a:ext>
             </a:extLst>
           </p:cNvPr>
@@ -5959,7 +5867,7 @@
           <p:cNvPr id="23" name="TextBox 22">
             <a:extLst>
               <a:ext uri="{FF2B5EF4-FFF2-40B4-BE49-F238E27FC236}">
-                <a16:creationId xmlns:a16="http://schemas.microsoft.com/office/drawing/2014/main" xmlns="" id="{42642DA8-38FB-40C2-A8E5-E2D7DE3F20BE}"/>
+                <a16:creationId xmlns="" xmlns:a16="http://schemas.microsoft.com/office/drawing/2014/main" id="{42642DA8-38FB-40C2-A8E5-E2D7DE3F20BE}"/>
               </a:ext>
             </a:extLst>
           </p:cNvPr>
@@ -6234,7 +6142,7 @@
           <p:cNvPr id="9" name="TextBox 8">
             <a:extLst>
               <a:ext uri="{FF2B5EF4-FFF2-40B4-BE49-F238E27FC236}">
-                <a16:creationId xmlns:a16="http://schemas.microsoft.com/office/drawing/2014/main" xmlns="" id="{42642DA8-38FB-40C2-A8E5-E2D7DE3F20BE}"/>
+                <a16:creationId xmlns="" xmlns:a16="http://schemas.microsoft.com/office/drawing/2014/main" id="{42642DA8-38FB-40C2-A8E5-E2D7DE3F20BE}"/>
               </a:ext>
             </a:extLst>
           </p:cNvPr>
@@ -6276,7 +6184,7 @@
           <p:cNvPr id="10" name="TextBox 9">
             <a:extLst>
               <a:ext uri="{FF2B5EF4-FFF2-40B4-BE49-F238E27FC236}">
-                <a16:creationId xmlns:a16="http://schemas.microsoft.com/office/drawing/2014/main" xmlns="" id="{42642DA8-38FB-40C2-A8E5-E2D7DE3F20BE}"/>
+                <a16:creationId xmlns="" xmlns:a16="http://schemas.microsoft.com/office/drawing/2014/main" id="{42642DA8-38FB-40C2-A8E5-E2D7DE3F20BE}"/>
               </a:ext>
             </a:extLst>
           </p:cNvPr>
@@ -6553,7 +6461,7 @@
           <p:cNvPr id="10" name="TextBox 9">
             <a:extLst>
               <a:ext uri="{FF2B5EF4-FFF2-40B4-BE49-F238E27FC236}">
-                <a16:creationId xmlns:a16="http://schemas.microsoft.com/office/drawing/2014/main" xmlns="" id="{42642DA8-38FB-40C2-A8E5-E2D7DE3F20BE}"/>
+                <a16:creationId xmlns="" xmlns:a16="http://schemas.microsoft.com/office/drawing/2014/main" id="{42642DA8-38FB-40C2-A8E5-E2D7DE3F20BE}"/>
               </a:ext>
             </a:extLst>
           </p:cNvPr>
@@ -6596,7 +6504,7 @@
           <p:cNvPr id="20" name="TextBox 19">
             <a:extLst>
               <a:ext uri="{FF2B5EF4-FFF2-40B4-BE49-F238E27FC236}">
-                <a16:creationId xmlns:a16="http://schemas.microsoft.com/office/drawing/2014/main" xmlns="" id="{42642DA8-38FB-40C2-A8E5-E2D7DE3F20BE}"/>
+                <a16:creationId xmlns="" xmlns:a16="http://schemas.microsoft.com/office/drawing/2014/main" id="{42642DA8-38FB-40C2-A8E5-E2D7DE3F20BE}"/>
               </a:ext>
             </a:extLst>
           </p:cNvPr>
@@ -6872,8 +6780,8 @@
         </p:blipFill>
         <p:spPr bwMode="auto">
           <a:xfrm>
-            <a:off x="514350" y="1095375"/>
-            <a:ext cx="7853405" cy="4248150"/>
+            <a:off x="514350" y="1095374"/>
+            <a:ext cx="8540138" cy="4619625"/>
           </a:xfrm>
           <a:prstGeom prst="rect">
             <a:avLst/>
@@ -7158,7 +7066,7 @@
           <p:cNvPr id="16" name="TextBox 15">
             <a:extLst>
               <a:ext uri="{FF2B5EF4-FFF2-40B4-BE49-F238E27FC236}">
-                <a16:creationId xmlns:a16="http://schemas.microsoft.com/office/drawing/2014/main" xmlns="" id="{42642DA8-38FB-40C2-A8E5-E2D7DE3F20BE}"/>
+                <a16:creationId xmlns="" xmlns:a16="http://schemas.microsoft.com/office/drawing/2014/main" id="{42642DA8-38FB-40C2-A8E5-E2D7DE3F20BE}"/>
               </a:ext>
             </a:extLst>
           </p:cNvPr>
@@ -7201,7 +7109,7 @@
           <p:cNvPr id="17" name="TextBox 16">
             <a:extLst>
               <a:ext uri="{FF2B5EF4-FFF2-40B4-BE49-F238E27FC236}">
-                <a16:creationId xmlns:a16="http://schemas.microsoft.com/office/drawing/2014/main" xmlns="" id="{42642DA8-38FB-40C2-A8E5-E2D7DE3F20BE}"/>
+                <a16:creationId xmlns="" xmlns:a16="http://schemas.microsoft.com/office/drawing/2014/main" id="{42642DA8-38FB-40C2-A8E5-E2D7DE3F20BE}"/>
               </a:ext>
             </a:extLst>
           </p:cNvPr>
@@ -7281,7 +7189,7 @@
           <p:cNvPr id="2" name="Номер слайда 1">
             <a:extLst>
               <a:ext uri="{FF2B5EF4-FFF2-40B4-BE49-F238E27FC236}">
-                <a16:creationId xmlns:a16="http://schemas.microsoft.com/office/drawing/2014/main" xmlns="" id="{A1EF2F5E-9F5C-4751-B700-A7A94305E781}"/>
+                <a16:creationId xmlns="" xmlns:a16="http://schemas.microsoft.com/office/drawing/2014/main" id="{A1EF2F5E-9F5C-4751-B700-A7A94305E781}"/>
               </a:ext>
             </a:extLst>
           </p:cNvPr>
@@ -7321,7 +7229,7 @@
           <p:cNvPr id="3" name="TextBox 2">
             <a:extLst>
               <a:ext uri="{FF2B5EF4-FFF2-40B4-BE49-F238E27FC236}">
-                <a16:creationId xmlns:a16="http://schemas.microsoft.com/office/drawing/2014/main" xmlns="" id="{FF3C424F-D02F-49A3-880C-29DDB431E18F}"/>
+                <a16:creationId xmlns="" xmlns:a16="http://schemas.microsoft.com/office/drawing/2014/main" id="{FF3C424F-D02F-49A3-880C-29DDB431E18F}"/>
               </a:ext>
             </a:extLst>
           </p:cNvPr>
@@ -7359,7 +7267,7 @@
           <p:cNvPr id="4" name="TextBox 3">
             <a:extLst>
               <a:ext uri="{FF2B5EF4-FFF2-40B4-BE49-F238E27FC236}">
-                <a16:creationId xmlns:a16="http://schemas.microsoft.com/office/drawing/2014/main" xmlns="" id="{F807927E-5750-46FC-8103-4066AC5803B4}"/>
+                <a16:creationId xmlns="" xmlns:a16="http://schemas.microsoft.com/office/drawing/2014/main" id="{F807927E-5750-46FC-8103-4066AC5803B4}"/>
               </a:ext>
             </a:extLst>
           </p:cNvPr>
@@ -7692,7 +7600,7 @@
           <p:cNvPr id="2" name="Номер слайда 1">
             <a:extLst>
               <a:ext uri="{FF2B5EF4-FFF2-40B4-BE49-F238E27FC236}">
-                <a16:creationId xmlns:a16="http://schemas.microsoft.com/office/drawing/2014/main" xmlns="" id="{231FECC7-9EA9-4FA5-867B-828BE509E5E0}"/>
+                <a16:creationId xmlns="" xmlns:a16="http://schemas.microsoft.com/office/drawing/2014/main" id="{231FECC7-9EA9-4FA5-867B-828BE509E5E0}"/>
               </a:ext>
             </a:extLst>
           </p:cNvPr>
@@ -7732,7 +7640,7 @@
           <p:cNvPr id="3" name="Прямоугольник 2">
             <a:extLst>
               <a:ext uri="{FF2B5EF4-FFF2-40B4-BE49-F238E27FC236}">
-                <a16:creationId xmlns:a16="http://schemas.microsoft.com/office/drawing/2014/main" xmlns="" id="{4E2E4152-190C-46A3-ABB6-0E55001CF847}"/>
+                <a16:creationId xmlns="" xmlns:a16="http://schemas.microsoft.com/office/drawing/2014/main" id="{4E2E4152-190C-46A3-ABB6-0E55001CF847}"/>
               </a:ext>
             </a:extLst>
           </p:cNvPr>
@@ -7773,7 +7681,7 @@
           <p:cNvPr id="4" name="Прямоугольник 3">
             <a:extLst>
               <a:ext uri="{FF2B5EF4-FFF2-40B4-BE49-F238E27FC236}">
-                <a16:creationId xmlns:a16="http://schemas.microsoft.com/office/drawing/2014/main" xmlns="" id="{7886BB8F-D2C2-43E1-9705-89FAC97E980B}"/>
+                <a16:creationId xmlns="" xmlns:a16="http://schemas.microsoft.com/office/drawing/2014/main" id="{7886BB8F-D2C2-43E1-9705-89FAC97E980B}"/>
               </a:ext>
             </a:extLst>
           </p:cNvPr>
@@ -7998,7 +7906,7 @@
           <p:cNvPr id="2" name="Номер слайда 1">
             <a:extLst>
               <a:ext uri="{FF2B5EF4-FFF2-40B4-BE49-F238E27FC236}">
-                <a16:creationId xmlns:a16="http://schemas.microsoft.com/office/drawing/2014/main" xmlns="" id="{C044D945-E4CF-4E6C-B0CF-90EA9882AF3D}"/>
+                <a16:creationId xmlns="" xmlns:a16="http://schemas.microsoft.com/office/drawing/2014/main" id="{C044D945-E4CF-4E6C-B0CF-90EA9882AF3D}"/>
               </a:ext>
             </a:extLst>
           </p:cNvPr>
@@ -8038,7 +7946,7 @@
           <p:cNvPr id="3" name="TextBox 2">
             <a:extLst>
               <a:ext uri="{FF2B5EF4-FFF2-40B4-BE49-F238E27FC236}">
-                <a16:creationId xmlns:a16="http://schemas.microsoft.com/office/drawing/2014/main" xmlns="" id="{A6FEAA34-0D0D-451C-99CF-75A0B69D07A2}"/>
+                <a16:creationId xmlns="" xmlns:a16="http://schemas.microsoft.com/office/drawing/2014/main" id="{A6FEAA34-0D0D-451C-99CF-75A0B69D07A2}"/>
               </a:ext>
             </a:extLst>
           </p:cNvPr>
@@ -8076,7 +7984,7 @@
           <p:cNvPr id="4" name="TextBox 3">
             <a:extLst>
               <a:ext uri="{FF2B5EF4-FFF2-40B4-BE49-F238E27FC236}">
-                <a16:creationId xmlns:a16="http://schemas.microsoft.com/office/drawing/2014/main" xmlns="" id="{96F0B344-73BB-4291-92EE-7CF2477B2FBC}"/>
+                <a16:creationId xmlns="" xmlns:a16="http://schemas.microsoft.com/office/drawing/2014/main" id="{96F0B344-73BB-4291-92EE-7CF2477B2FBC}"/>
               </a:ext>
             </a:extLst>
           </p:cNvPr>
@@ -8126,7 +8034,7 @@
           <p:cNvPr id="5" name="TextBox 4">
             <a:extLst>
               <a:ext uri="{FF2B5EF4-FFF2-40B4-BE49-F238E27FC236}">
-                <a16:creationId xmlns:a16="http://schemas.microsoft.com/office/drawing/2014/main" xmlns="" id="{F6936691-7316-4CA8-AD28-E100BE8B9D56}"/>
+                <a16:creationId xmlns="" xmlns:a16="http://schemas.microsoft.com/office/drawing/2014/main" id="{F6936691-7316-4CA8-AD28-E100BE8B9D56}"/>
               </a:ext>
             </a:extLst>
           </p:cNvPr>
@@ -8346,7 +8254,7 @@
           <p:cNvPr id="2" name="Номер слайда 1">
             <a:extLst>
               <a:ext uri="{FF2B5EF4-FFF2-40B4-BE49-F238E27FC236}">
-                <a16:creationId xmlns:a16="http://schemas.microsoft.com/office/drawing/2014/main" xmlns="" id="{05C26CDF-9DC4-4472-9008-1D318E6740D1}"/>
+                <a16:creationId xmlns="" xmlns:a16="http://schemas.microsoft.com/office/drawing/2014/main" id="{05C26CDF-9DC4-4472-9008-1D318E6740D1}"/>
               </a:ext>
             </a:extLst>
           </p:cNvPr>
@@ -8386,7 +8294,7 @@
           <p:cNvPr id="3" name="TextBox 2">
             <a:extLst>
               <a:ext uri="{FF2B5EF4-FFF2-40B4-BE49-F238E27FC236}">
-                <a16:creationId xmlns:a16="http://schemas.microsoft.com/office/drawing/2014/main" xmlns="" id="{9E60CBAA-39F2-434C-93DD-7C5C94EC62DA}"/>
+                <a16:creationId xmlns="" xmlns:a16="http://schemas.microsoft.com/office/drawing/2014/main" id="{9E60CBAA-39F2-434C-93DD-7C5C94EC62DA}"/>
               </a:ext>
             </a:extLst>
           </p:cNvPr>
@@ -8424,7 +8332,7 @@
           <p:cNvPr id="4" name="Прямоугольник 3">
             <a:extLst>
               <a:ext uri="{FF2B5EF4-FFF2-40B4-BE49-F238E27FC236}">
-                <a16:creationId xmlns:a16="http://schemas.microsoft.com/office/drawing/2014/main" xmlns="" id="{A483A019-2816-4B8B-A2A2-51E748452221}"/>
+                <a16:creationId xmlns="" xmlns:a16="http://schemas.microsoft.com/office/drawing/2014/main" id="{A483A019-2816-4B8B-A2A2-51E748452221}"/>
               </a:ext>
             </a:extLst>
           </p:cNvPr>
@@ -8465,7 +8373,7 @@
           <p:cNvPr id="5" name="Прямоугольник 4">
             <a:extLst>
               <a:ext uri="{FF2B5EF4-FFF2-40B4-BE49-F238E27FC236}">
-                <a16:creationId xmlns:a16="http://schemas.microsoft.com/office/drawing/2014/main" xmlns="" id="{22BD40BA-3B51-4998-886C-91261B8F7F99}"/>
+                <a16:creationId xmlns="" xmlns:a16="http://schemas.microsoft.com/office/drawing/2014/main" id="{22BD40BA-3B51-4998-886C-91261B8F7F99}"/>
               </a:ext>
             </a:extLst>
           </p:cNvPr>
@@ -8474,8 +8382,8 @@
         </p:nvSpPr>
         <p:spPr>
           <a:xfrm>
-            <a:off x="319136" y="1137421"/>
-            <a:ext cx="4033318" cy="5588068"/>
+            <a:off x="214361" y="1256258"/>
+            <a:ext cx="3119389" cy="5262979"/>
           </a:xfrm>
           <a:prstGeom prst="rect">
             <a:avLst/>
@@ -8505,6 +8413,89 @@
             </a:r>
           </a:p>
           <a:p>
+            <a:pPr marL="285750" indent="-285750" algn="just">
+              <a:lnSpc>
+                <a:spcPct val="150000"/>
+              </a:lnSpc>
+              <a:buFont typeface="Arial" pitchFamily="34" charset="0"/>
+              <a:buChar char="•"/>
+            </a:pPr>
+            <a:r>
+              <a:rPr lang="ru-RU" sz="1600" dirty="0" smtClean="0">
+                <a:solidFill>
+                  <a:srgbClr val="000000"/>
+                </a:solidFill>
+                <a:latin typeface="Times New Roman" panose="02020603050405020304" pitchFamily="18" charset="0"/>
+                <a:ea typeface="Times New Roman" panose="02020603050405020304" pitchFamily="18" charset="0"/>
+                <a:cs typeface="Times New Roman" panose="02020603050405020304" pitchFamily="18" charset="0"/>
+              </a:rPr>
+              <a:t>Калькулятор </a:t>
+            </a:r>
+            <a:r>
+              <a:rPr lang="ru-RU" sz="1600" dirty="0">
+                <a:solidFill>
+                  <a:srgbClr val="000000"/>
+                </a:solidFill>
+                <a:latin typeface="Times New Roman" panose="02020603050405020304" pitchFamily="18" charset="0"/>
+                <a:ea typeface="Times New Roman" panose="02020603050405020304" pitchFamily="18" charset="0"/>
+                <a:cs typeface="Times New Roman" panose="02020603050405020304" pitchFamily="18" charset="0"/>
+              </a:rPr>
+              <a:t>ОСАГО вынесен на главную </a:t>
+            </a:r>
+            <a:r>
+              <a:rPr lang="ru-RU" sz="1600" dirty="0" smtClean="0">
+                <a:solidFill>
+                  <a:srgbClr val="000000"/>
+                </a:solidFill>
+                <a:latin typeface="Times New Roman" panose="02020603050405020304" pitchFamily="18" charset="0"/>
+                <a:ea typeface="Times New Roman" panose="02020603050405020304" pitchFamily="18" charset="0"/>
+                <a:cs typeface="Times New Roman" panose="02020603050405020304" pitchFamily="18" charset="0"/>
+              </a:rPr>
+              <a:t>страницу</a:t>
+            </a:r>
+            <a:r>
+              <a:rPr lang="ru-RU" sz="1600" dirty="0">
+                <a:solidFill>
+                  <a:srgbClr val="000000"/>
+                </a:solidFill>
+                <a:latin typeface="Times New Roman" panose="02020603050405020304" pitchFamily="18" charset="0"/>
+                <a:ea typeface="Times New Roman" panose="02020603050405020304" pitchFamily="18" charset="0"/>
+                <a:cs typeface="Times New Roman" panose="02020603050405020304" pitchFamily="18" charset="0"/>
+              </a:rPr>
+              <a:t>,</a:t>
+            </a:r>
+            <a:r>
+              <a:rPr lang="ru-RU" sz="1600" dirty="0" smtClean="0">
+                <a:solidFill>
+                  <a:srgbClr val="000000"/>
+                </a:solidFill>
+                <a:latin typeface="Times New Roman" panose="02020603050405020304" pitchFamily="18" charset="0"/>
+                <a:ea typeface="Times New Roman" panose="02020603050405020304" pitchFamily="18" charset="0"/>
+                <a:cs typeface="Times New Roman" panose="02020603050405020304" pitchFamily="18" charset="0"/>
+              </a:rPr>
+              <a:t> </a:t>
+            </a:r>
+            <a:r>
+              <a:rPr lang="ru-RU" sz="1600" dirty="0" smtClean="0">
+                <a:solidFill>
+                  <a:srgbClr val="000000"/>
+                </a:solidFill>
+                <a:latin typeface="Times New Roman" panose="02020603050405020304" pitchFamily="18" charset="0"/>
+                <a:ea typeface="Times New Roman" panose="02020603050405020304" pitchFamily="18" charset="0"/>
+                <a:cs typeface="Times New Roman" panose="02020603050405020304" pitchFamily="18" charset="0"/>
+              </a:rPr>
+              <a:t>имеет простой интерфейс и заполняется в 3 шага.</a:t>
+            </a:r>
+            <a:endParaRPr lang="ru-RU" sz="1600" dirty="0" smtClean="0">
+              <a:solidFill>
+                <a:srgbClr val="000000"/>
+              </a:solidFill>
+              <a:latin typeface="Times New Roman" panose="02020603050405020304" pitchFamily="18" charset="0"/>
+              <a:ea typeface="Times New Roman" panose="02020603050405020304" pitchFamily="18" charset="0"/>
+              <a:cs typeface="Times New Roman" panose="02020603050405020304" pitchFamily="18" charset="0"/>
+            </a:endParaRPr>
+          </a:p>
+          <a:p>
             <a:pPr indent="342900" algn="just">
               <a:lnSpc>
                 <a:spcPct val="150000"/>
@@ -8519,7 +8510,7 @@
                 <a:ea typeface="Times New Roman" panose="02020603050405020304" pitchFamily="18" charset="0"/>
                 <a:cs typeface="Times New Roman" panose="02020603050405020304" pitchFamily="18" charset="0"/>
               </a:rPr>
-              <a:t>⁻	Калькулятор </a:t>
+              <a:t>Слабые </a:t>
             </a:r>
             <a:r>
               <a:rPr lang="ru-RU" sz="1600" dirty="0">
@@ -8530,14 +8521,16 @@
                 <a:ea typeface="Times New Roman" panose="02020603050405020304" pitchFamily="18" charset="0"/>
                 <a:cs typeface="Times New Roman" panose="02020603050405020304" pitchFamily="18" charset="0"/>
               </a:rPr>
-              <a:t>ОСАГО вынесен на главную страницу.</a:t>
-            </a:r>
-          </a:p>
-          <a:p>
-            <a:pPr indent="342900" algn="just">
+              <a:t>стороны:</a:t>
+            </a:r>
+          </a:p>
+          <a:p>
+            <a:pPr marL="285750" indent="-285750" algn="just">
               <a:lnSpc>
                 <a:spcPct val="150000"/>
               </a:lnSpc>
+              <a:buFont typeface="Arial" pitchFamily="34" charset="0"/>
+              <a:buChar char="•"/>
             </a:pPr>
             <a:r>
               <a:rPr lang="ru-RU" sz="1600" dirty="0" smtClean="0">
@@ -8548,7 +8541,7 @@
                 <a:ea typeface="Times New Roman" panose="02020603050405020304" pitchFamily="18" charset="0"/>
                 <a:cs typeface="Times New Roman" panose="02020603050405020304" pitchFamily="18" charset="0"/>
               </a:rPr>
-              <a:t>⁻	Полностью </a:t>
+              <a:t>Калькулятор сводится </a:t>
             </a:r>
             <a:r>
               <a:rPr lang="ru-RU" sz="1600" dirty="0">
@@ -8559,14 +8552,16 @@
                 <a:ea typeface="Times New Roman" panose="02020603050405020304" pitchFamily="18" charset="0"/>
                 <a:cs typeface="Times New Roman" panose="02020603050405020304" pitchFamily="18" charset="0"/>
               </a:rPr>
-              <a:t>онлайн-оформление электронного полиса.</a:t>
-            </a:r>
-          </a:p>
-          <a:p>
-            <a:pPr indent="342900" algn="just">
+              <a:t>к форме обратной связи с менеджером, а не к полноценному онлайн-расчёту.</a:t>
+            </a:r>
+          </a:p>
+          <a:p>
+            <a:pPr marL="285750" indent="-285750" algn="just">
               <a:lnSpc>
                 <a:spcPct val="150000"/>
               </a:lnSpc>
+              <a:buFont typeface="Arial" pitchFamily="34" charset="0"/>
+              <a:buChar char="•"/>
             </a:pPr>
             <a:r>
               <a:rPr lang="ru-RU" sz="1600" dirty="0" smtClean="0">
@@ -8577,7 +8572,7 @@
                 <a:ea typeface="Times New Roman" panose="02020603050405020304" pitchFamily="18" charset="0"/>
                 <a:cs typeface="Times New Roman" panose="02020603050405020304" pitchFamily="18" charset="0"/>
               </a:rPr>
-              <a:t>⁻	Развитая </a:t>
+              <a:t>Интерфейс </a:t>
             </a:r>
             <a:r>
               <a:rPr lang="ru-RU" sz="1600" dirty="0">
@@ -8588,17 +8583,10 @@
                 <a:ea typeface="Times New Roman" panose="02020603050405020304" pitchFamily="18" charset="0"/>
                 <a:cs typeface="Times New Roman" panose="02020603050405020304" pitchFamily="18" charset="0"/>
               </a:rPr>
-              <a:t>сеть офлайн-офисов по всей стране.</a:t>
-            </a:r>
-          </a:p>
-          <a:p>
-            <a:pPr indent="342900" algn="just">
-              <a:lnSpc>
-                <a:spcPct val="150000"/>
-              </a:lnSpc>
-            </a:pPr>
-            <a:r>
-              <a:rPr lang="ru-RU" sz="1600" dirty="0">
+              <a:t>перегружен рекламой и дополнительными услугами</a:t>
+            </a:r>
+            <a:r>
+              <a:rPr lang="ru-RU" sz="1600" dirty="0" smtClean="0">
                 <a:solidFill>
                   <a:srgbClr val="000000"/>
                 </a:solidFill>
@@ -8606,95 +8594,16 @@
                 <a:ea typeface="Times New Roman" panose="02020603050405020304" pitchFamily="18" charset="0"/>
                 <a:cs typeface="Times New Roman" panose="02020603050405020304" pitchFamily="18" charset="0"/>
               </a:rPr>
-              <a:t>Слабые стороны:</a:t>
-            </a:r>
-          </a:p>
-          <a:p>
-            <a:pPr indent="342900" algn="just">
-              <a:lnSpc>
-                <a:spcPct val="150000"/>
-              </a:lnSpc>
-            </a:pPr>
-            <a:r>
-              <a:rPr lang="ru-RU" sz="1600" dirty="0" smtClean="0">
-                <a:solidFill>
-                  <a:srgbClr val="000000"/>
-                </a:solidFill>
-                <a:latin typeface="Times New Roman" panose="02020603050405020304" pitchFamily="18" charset="0"/>
-                <a:ea typeface="Times New Roman" panose="02020603050405020304" pitchFamily="18" charset="0"/>
-                <a:cs typeface="Times New Roman" panose="02020603050405020304" pitchFamily="18" charset="0"/>
-              </a:rPr>
-              <a:t>⁻	Калькулятор </a:t>
-            </a:r>
-            <a:r>
-              <a:rPr lang="ru-RU" sz="1600" dirty="0">
-                <a:solidFill>
-                  <a:srgbClr val="000000"/>
-                </a:solidFill>
-                <a:latin typeface="Times New Roman" panose="02020603050405020304" pitchFamily="18" charset="0"/>
-                <a:ea typeface="Times New Roman" panose="02020603050405020304" pitchFamily="18" charset="0"/>
-                <a:cs typeface="Times New Roman" panose="02020603050405020304" pitchFamily="18" charset="0"/>
-              </a:rPr>
-              <a:t>КАСКО сводится к форме обратной связи с менеджером, а не к полноценному онлайн-расчёту.</a:t>
-            </a:r>
-          </a:p>
-          <a:p>
-            <a:pPr indent="342900" algn="just">
-              <a:lnSpc>
-                <a:spcPct val="150000"/>
-              </a:lnSpc>
-            </a:pPr>
-            <a:r>
-              <a:rPr lang="ru-RU" sz="1600" dirty="0" smtClean="0">
-                <a:solidFill>
-                  <a:srgbClr val="000000"/>
-                </a:solidFill>
-                <a:latin typeface="Times New Roman" panose="02020603050405020304" pitchFamily="18" charset="0"/>
-                <a:ea typeface="Times New Roman" panose="02020603050405020304" pitchFamily="18" charset="0"/>
-                <a:cs typeface="Times New Roman" panose="02020603050405020304" pitchFamily="18" charset="0"/>
-              </a:rPr>
-              <a:t>⁻	Интерфейс </a:t>
-            </a:r>
-            <a:r>
-              <a:rPr lang="ru-RU" sz="1600" dirty="0">
-                <a:solidFill>
-                  <a:srgbClr val="000000"/>
-                </a:solidFill>
-                <a:latin typeface="Times New Roman" panose="02020603050405020304" pitchFamily="18" charset="0"/>
-                <a:ea typeface="Times New Roman" panose="02020603050405020304" pitchFamily="18" charset="0"/>
-                <a:cs typeface="Times New Roman" panose="02020603050405020304" pitchFamily="18" charset="0"/>
-              </a:rPr>
-              <a:t>перегружен рекламой и дополнительными услугами.</a:t>
-            </a:r>
-          </a:p>
-          <a:p>
-            <a:pPr indent="342900" algn="just">
-              <a:lnSpc>
-                <a:spcPct val="150000"/>
-              </a:lnSpc>
-            </a:pPr>
-            <a:r>
-              <a:rPr lang="ru-RU" sz="1600" dirty="0" smtClean="0">
-                <a:solidFill>
-                  <a:srgbClr val="000000"/>
-                </a:solidFill>
-                <a:latin typeface="Times New Roman" panose="02020603050405020304" pitchFamily="18" charset="0"/>
-                <a:ea typeface="Times New Roman" panose="02020603050405020304" pitchFamily="18" charset="0"/>
-                <a:cs typeface="Times New Roman" panose="02020603050405020304" pitchFamily="18" charset="0"/>
-              </a:rPr>
-              <a:t>⁻	Время </a:t>
-            </a:r>
-            <a:r>
-              <a:rPr lang="ru-RU" sz="1600" dirty="0">
-                <a:solidFill>
-                  <a:srgbClr val="000000"/>
-                </a:solidFill>
-                <a:latin typeface="Times New Roman" panose="02020603050405020304" pitchFamily="18" charset="0"/>
-                <a:ea typeface="Times New Roman" panose="02020603050405020304" pitchFamily="18" charset="0"/>
-                <a:cs typeface="Times New Roman" panose="02020603050405020304" pitchFamily="18" charset="0"/>
-              </a:rPr>
-              <a:t>загрузки страниц выше среднего (2,8 сек).</a:t>
-            </a:r>
+              <a:t>.</a:t>
+            </a:r>
+            <a:endParaRPr lang="ru-RU" sz="1600" dirty="0">
+              <a:solidFill>
+                <a:srgbClr val="000000"/>
+              </a:solidFill>
+              <a:latin typeface="Times New Roman" panose="02020603050405020304" pitchFamily="18" charset="0"/>
+              <a:ea typeface="Times New Roman" panose="02020603050405020304" pitchFamily="18" charset="0"/>
+              <a:cs typeface="Times New Roman" panose="02020603050405020304" pitchFamily="18" charset="0"/>
+            </a:endParaRPr>
           </a:p>
         </p:txBody>
       </p:sp>
@@ -8721,8 +8630,8 @@
         </p:blipFill>
         <p:spPr bwMode="auto">
           <a:xfrm>
-            <a:off x="4799012" y="1666875"/>
-            <a:ext cx="4421188" cy="3314700"/>
+            <a:off x="3495675" y="952755"/>
+            <a:ext cx="5486398" cy="4437056"/>
           </a:xfrm>
           <a:prstGeom prst="rect">
             <a:avLst/>
@@ -8804,7 +8713,7 @@
           <p:cNvPr id="2" name="Номер слайда 1">
             <a:extLst>
               <a:ext uri="{FF2B5EF4-FFF2-40B4-BE49-F238E27FC236}">
-                <a16:creationId xmlns:a16="http://schemas.microsoft.com/office/drawing/2014/main" xmlns="" id="{63CEBED6-73E3-40C5-A087-F9E9B32A8B79}"/>
+                <a16:creationId xmlns="" xmlns:a16="http://schemas.microsoft.com/office/drawing/2014/main" id="{63CEBED6-73E3-40C5-A087-F9E9B32A8B79}"/>
               </a:ext>
             </a:extLst>
           </p:cNvPr>
@@ -8844,7 +8753,7 @@
           <p:cNvPr id="3" name="Прямоугольник 2">
             <a:extLst>
               <a:ext uri="{FF2B5EF4-FFF2-40B4-BE49-F238E27FC236}">
-                <a16:creationId xmlns:a16="http://schemas.microsoft.com/office/drawing/2014/main" xmlns="" id="{2A980ABB-ECEF-4C08-A341-DF985B03486B}"/>
+                <a16:creationId xmlns="" xmlns:a16="http://schemas.microsoft.com/office/drawing/2014/main" id="{2A980ABB-ECEF-4C08-A341-DF985B03486B}"/>
               </a:ext>
             </a:extLst>
           </p:cNvPr>
@@ -8885,7 +8794,7 @@
           <p:cNvPr id="4" name="Прямоугольник 3">
             <a:extLst>
               <a:ext uri="{FF2B5EF4-FFF2-40B4-BE49-F238E27FC236}">
-                <a16:creationId xmlns:a16="http://schemas.microsoft.com/office/drawing/2014/main" xmlns="" id="{C427C168-69BF-4E89-B79C-E893EFDC3B08}"/>
+                <a16:creationId xmlns="" xmlns:a16="http://schemas.microsoft.com/office/drawing/2014/main" id="{C427C168-69BF-4E89-B79C-E893EFDC3B08}"/>
               </a:ext>
             </a:extLst>
           </p:cNvPr>
@@ -8894,8 +8803,8 @@
         </p:nvSpPr>
         <p:spPr>
           <a:xfrm>
-            <a:off x="79524" y="777925"/>
-            <a:ext cx="4534126" cy="4430572"/>
+            <a:off x="174775" y="978039"/>
+            <a:ext cx="2758926" cy="4731552"/>
           </a:xfrm>
           <a:prstGeom prst="rect">
             <a:avLst/>
@@ -8928,6 +8837,126 @@
             </a:r>
           </a:p>
           <a:p>
+            <a:pPr marL="285750" indent="-285750" algn="just">
+              <a:lnSpc>
+                <a:spcPct val="108000"/>
+              </a:lnSpc>
+              <a:spcAft>
+                <a:spcPts val="600"/>
+              </a:spcAft>
+              <a:buFont typeface="Arial" pitchFamily="34" charset="0"/>
+              <a:buChar char="•"/>
+            </a:pPr>
+            <a:r>
+              <a:rPr lang="ru-RU" sz="1600" dirty="0" smtClean="0">
+                <a:solidFill>
+                  <a:srgbClr val="000000"/>
+                </a:solidFill>
+                <a:latin typeface="Times New Roman" panose="02020603050405020304" pitchFamily="18" charset="0"/>
+                <a:ea typeface="Times New Roman" panose="02020603050405020304" pitchFamily="18" charset="0"/>
+                <a:cs typeface="Times New Roman" panose="02020603050405020304" pitchFamily="18" charset="0"/>
+              </a:rPr>
+              <a:t>Детальный </a:t>
+            </a:r>
+            <a:r>
+              <a:rPr lang="ru-RU" sz="1600" dirty="0">
+                <a:solidFill>
+                  <a:srgbClr val="000000"/>
+                </a:solidFill>
+                <a:latin typeface="Times New Roman" panose="02020603050405020304" pitchFamily="18" charset="0"/>
+                <a:ea typeface="Times New Roman" panose="02020603050405020304" pitchFamily="18" charset="0"/>
+                <a:cs typeface="Times New Roman" panose="02020603050405020304" pitchFamily="18" charset="0"/>
+              </a:rPr>
+              <a:t>онлайн-калькулятор КАСКО с возможностью выбора параметров.</a:t>
+            </a:r>
+          </a:p>
+          <a:p>
+            <a:pPr marL="285750" indent="-285750" algn="just">
+              <a:lnSpc>
+                <a:spcPct val="108000"/>
+              </a:lnSpc>
+              <a:spcAft>
+                <a:spcPts val="600"/>
+              </a:spcAft>
+              <a:buFont typeface="Arial" pitchFamily="34" charset="0"/>
+              <a:buChar char="•"/>
+            </a:pPr>
+            <a:r>
+              <a:rPr lang="ru-RU" sz="1600" dirty="0" smtClean="0">
+                <a:solidFill>
+                  <a:srgbClr val="000000"/>
+                </a:solidFill>
+                <a:latin typeface="Times New Roman" panose="02020603050405020304" pitchFamily="18" charset="0"/>
+                <a:ea typeface="Times New Roman" panose="02020603050405020304" pitchFamily="18" charset="0"/>
+                <a:cs typeface="Times New Roman" panose="02020603050405020304" pitchFamily="18" charset="0"/>
+              </a:rPr>
+              <a:t>Поддержка </a:t>
+            </a:r>
+            <a:r>
+              <a:rPr lang="ru-RU" sz="1600" dirty="0" err="1">
+                <a:solidFill>
+                  <a:srgbClr val="000000"/>
+                </a:solidFill>
+                <a:latin typeface="Times New Roman" panose="02020603050405020304" pitchFamily="18" charset="0"/>
+                <a:ea typeface="Times New Roman" panose="02020603050405020304" pitchFamily="18" charset="0"/>
+                <a:cs typeface="Times New Roman" panose="02020603050405020304" pitchFamily="18" charset="0"/>
+              </a:rPr>
+              <a:t>Apple</a:t>
+            </a:r>
+            <a:r>
+              <a:rPr lang="ru-RU" sz="1600" dirty="0">
+                <a:solidFill>
+                  <a:srgbClr val="000000"/>
+                </a:solidFill>
+                <a:latin typeface="Times New Roman" panose="02020603050405020304" pitchFamily="18" charset="0"/>
+                <a:ea typeface="Times New Roman" panose="02020603050405020304" pitchFamily="18" charset="0"/>
+                <a:cs typeface="Times New Roman" panose="02020603050405020304" pitchFamily="18" charset="0"/>
+              </a:rPr>
+              <a:t> </a:t>
+            </a:r>
+            <a:r>
+              <a:rPr lang="ru-RU" sz="1600" dirty="0" err="1">
+                <a:solidFill>
+                  <a:srgbClr val="000000"/>
+                </a:solidFill>
+                <a:latin typeface="Times New Roman" panose="02020603050405020304" pitchFamily="18" charset="0"/>
+                <a:ea typeface="Times New Roman" panose="02020603050405020304" pitchFamily="18" charset="0"/>
+                <a:cs typeface="Times New Roman" panose="02020603050405020304" pitchFamily="18" charset="0"/>
+              </a:rPr>
+              <a:t>Pay</a:t>
+            </a:r>
+            <a:r>
+              <a:rPr lang="ru-RU" sz="1600" dirty="0">
+                <a:solidFill>
+                  <a:srgbClr val="000000"/>
+                </a:solidFill>
+                <a:latin typeface="Times New Roman" panose="02020603050405020304" pitchFamily="18" charset="0"/>
+                <a:ea typeface="Times New Roman" panose="02020603050405020304" pitchFamily="18" charset="0"/>
+                <a:cs typeface="Times New Roman" panose="02020603050405020304" pitchFamily="18" charset="0"/>
+              </a:rPr>
+              <a:t> и других современных способов оплаты</a:t>
+            </a:r>
+            <a:r>
+              <a:rPr lang="ru-RU" sz="1600" dirty="0" smtClean="0">
+                <a:solidFill>
+                  <a:srgbClr val="000000"/>
+                </a:solidFill>
+                <a:latin typeface="Times New Roman" panose="02020603050405020304" pitchFamily="18" charset="0"/>
+                <a:ea typeface="Times New Roman" panose="02020603050405020304" pitchFamily="18" charset="0"/>
+                <a:cs typeface="Times New Roman" panose="02020603050405020304" pitchFamily="18" charset="0"/>
+              </a:rPr>
+              <a:t>..</a:t>
+            </a:r>
+            <a:endParaRPr lang="ru-RU" sz="1600" dirty="0">
+              <a:solidFill>
+                <a:srgbClr val="000000"/>
+              </a:solidFill>
+              <a:latin typeface="Times New Roman" panose="02020603050405020304" pitchFamily="18" charset="0"/>
+              <a:ea typeface="Times New Roman" panose="02020603050405020304" pitchFamily="18" charset="0"/>
+              <a:cs typeface="Times New Roman" panose="02020603050405020304" pitchFamily="18" charset="0"/>
+            </a:endParaRPr>
+          </a:p>
+          <a:p>
             <a:pPr indent="337661" algn="just">
               <a:lnSpc>
                 <a:spcPct val="108000"/>
@@ -8945,19 +8974,43 @@
                 <a:ea typeface="Times New Roman" panose="02020603050405020304" pitchFamily="18" charset="0"/>
                 <a:cs typeface="Times New Roman" panose="02020603050405020304" pitchFamily="18" charset="0"/>
               </a:rPr>
-              <a:t>⁻	Детальный онлайн-калькулятор КАСКО с возможностью выбора параметров.</a:t>
-            </a:r>
-          </a:p>
-          <a:p>
-            <a:pPr indent="337661" algn="just">
+              <a:t>	Слабые стороны:</a:t>
+            </a:r>
+          </a:p>
+          <a:p>
+            <a:pPr marL="285750" indent="-285750" algn="just">
               <a:lnSpc>
                 <a:spcPct val="108000"/>
               </a:lnSpc>
               <a:spcAft>
                 <a:spcPts val="600"/>
               </a:spcAft>
+              <a:buFont typeface="Arial" pitchFamily="34" charset="0"/>
+              <a:buChar char="•"/>
             </a:pPr>
             <a:r>
+              <a:rPr lang="ru-RU" sz="1600" dirty="0" smtClean="0">
+                <a:solidFill>
+                  <a:srgbClr val="000000"/>
+                </a:solidFill>
+                <a:latin typeface="Times New Roman" panose="02020603050405020304" pitchFamily="18" charset="0"/>
+                <a:ea typeface="Times New Roman" panose="02020603050405020304" pitchFamily="18" charset="0"/>
+                <a:cs typeface="Times New Roman" panose="02020603050405020304" pitchFamily="18" charset="0"/>
+              </a:rPr>
+              <a:t>Интерфейс </a:t>
+            </a:r>
+            <a:r>
+              <a:rPr lang="ru-RU" sz="1600" dirty="0" smtClean="0">
+                <a:solidFill>
+                  <a:srgbClr val="000000"/>
+                </a:solidFill>
+                <a:latin typeface="Times New Roman" panose="02020603050405020304" pitchFamily="18" charset="0"/>
+                <a:ea typeface="Times New Roman" panose="02020603050405020304" pitchFamily="18" charset="0"/>
+                <a:cs typeface="Times New Roman" panose="02020603050405020304" pitchFamily="18" charset="0"/>
+              </a:rPr>
+              <a:t>перегружен </a:t>
+            </a:r>
+            <a:r>
               <a:rPr lang="ru-RU" sz="1600" dirty="0">
                 <a:solidFill>
                   <a:srgbClr val="000000"/>
@@ -8966,63 +9019,32 @@
                 <a:ea typeface="Times New Roman" panose="02020603050405020304" pitchFamily="18" charset="0"/>
                 <a:cs typeface="Times New Roman" panose="02020603050405020304" pitchFamily="18" charset="0"/>
               </a:rPr>
-              <a:t>⁻	Поддержка </a:t>
-            </a:r>
-            <a:r>
-              <a:rPr lang="ru-RU" sz="1600" dirty="0" err="1">
-                <a:solidFill>
-                  <a:srgbClr val="000000"/>
-                </a:solidFill>
-                <a:latin typeface="Times New Roman" panose="02020603050405020304" pitchFamily="18" charset="0"/>
-                <a:ea typeface="Times New Roman" panose="02020603050405020304" pitchFamily="18" charset="0"/>
-                <a:cs typeface="Times New Roman" panose="02020603050405020304" pitchFamily="18" charset="0"/>
-              </a:rPr>
-              <a:t>Apple</a:t>
-            </a:r>
-            <a:r>
-              <a:rPr lang="ru-RU" sz="1600" dirty="0">
-                <a:solidFill>
-                  <a:srgbClr val="000000"/>
-                </a:solidFill>
-                <a:latin typeface="Times New Roman" panose="02020603050405020304" pitchFamily="18" charset="0"/>
-                <a:ea typeface="Times New Roman" panose="02020603050405020304" pitchFamily="18" charset="0"/>
-                <a:cs typeface="Times New Roman" panose="02020603050405020304" pitchFamily="18" charset="0"/>
-              </a:rPr>
-              <a:t> </a:t>
-            </a:r>
-            <a:r>
-              <a:rPr lang="ru-RU" sz="1600" dirty="0" err="1">
-                <a:solidFill>
-                  <a:srgbClr val="000000"/>
-                </a:solidFill>
-                <a:latin typeface="Times New Roman" panose="02020603050405020304" pitchFamily="18" charset="0"/>
-                <a:ea typeface="Times New Roman" panose="02020603050405020304" pitchFamily="18" charset="0"/>
-                <a:cs typeface="Times New Roman" panose="02020603050405020304" pitchFamily="18" charset="0"/>
-              </a:rPr>
-              <a:t>Pay</a:t>
-            </a:r>
-            <a:r>
-              <a:rPr lang="ru-RU" sz="1600" dirty="0">
-                <a:solidFill>
-                  <a:srgbClr val="000000"/>
-                </a:solidFill>
-                <a:latin typeface="Times New Roman" panose="02020603050405020304" pitchFamily="18" charset="0"/>
-                <a:ea typeface="Times New Roman" panose="02020603050405020304" pitchFamily="18" charset="0"/>
-                <a:cs typeface="Times New Roman" panose="02020603050405020304" pitchFamily="18" charset="0"/>
-              </a:rPr>
-              <a:t> и других современных способов оплаты.</a:t>
-            </a:r>
-          </a:p>
-          <a:p>
-            <a:pPr indent="337661" algn="just">
+              <a:t>информацией.</a:t>
+            </a:r>
+          </a:p>
+          <a:p>
+            <a:pPr marL="285750" indent="-285750" algn="just">
               <a:lnSpc>
                 <a:spcPct val="108000"/>
               </a:lnSpc>
               <a:spcAft>
                 <a:spcPts val="600"/>
               </a:spcAft>
+              <a:buFont typeface="Arial" pitchFamily="34" charset="0"/>
+              <a:buChar char="•"/>
             </a:pPr>
             <a:r>
+              <a:rPr lang="ru-RU" sz="1600" dirty="0" smtClean="0">
+                <a:solidFill>
+                  <a:srgbClr val="000000"/>
+                </a:solidFill>
+                <a:latin typeface="Times New Roman" panose="02020603050405020304" pitchFamily="18" charset="0"/>
+                <a:ea typeface="Times New Roman" panose="02020603050405020304" pitchFamily="18" charset="0"/>
+                <a:cs typeface="Times New Roman" panose="02020603050405020304" pitchFamily="18" charset="0"/>
+              </a:rPr>
+              <a:t>Личный </a:t>
+            </a:r>
+            <a:r>
               <a:rPr lang="ru-RU" sz="1600" dirty="0">
                 <a:solidFill>
                   <a:srgbClr val="000000"/>
@@ -9031,142 +9053,7 @@
                 <a:ea typeface="Times New Roman" panose="02020603050405020304" pitchFamily="18" charset="0"/>
                 <a:cs typeface="Times New Roman" panose="02020603050405020304" pitchFamily="18" charset="0"/>
               </a:rPr>
-              <a:t>⁻	Надёжный бренд с высокой узнаваемостью</a:t>
-            </a:r>
-            <a:r>
-              <a:rPr lang="ru-RU" sz="1600" dirty="0" smtClean="0">
-                <a:solidFill>
-                  <a:srgbClr val="000000"/>
-                </a:solidFill>
-                <a:latin typeface="Times New Roman" panose="02020603050405020304" pitchFamily="18" charset="0"/>
-                <a:ea typeface="Times New Roman" panose="02020603050405020304" pitchFamily="18" charset="0"/>
-                <a:cs typeface="Times New Roman" panose="02020603050405020304" pitchFamily="18" charset="0"/>
-              </a:rPr>
-              <a:t>.</a:t>
-            </a:r>
-          </a:p>
-          <a:p>
-            <a:pPr indent="337661" algn="just">
-              <a:lnSpc>
-                <a:spcPct val="108000"/>
-              </a:lnSpc>
-              <a:spcAft>
-                <a:spcPts val="600"/>
-              </a:spcAft>
-            </a:pPr>
-            <a:endParaRPr lang="ru-RU" sz="1600" dirty="0">
-              <a:solidFill>
-                <a:srgbClr val="000000"/>
-              </a:solidFill>
-              <a:latin typeface="Times New Roman" panose="02020603050405020304" pitchFamily="18" charset="0"/>
-              <a:ea typeface="Times New Roman" panose="02020603050405020304" pitchFamily="18" charset="0"/>
-              <a:cs typeface="Times New Roman" panose="02020603050405020304" pitchFamily="18" charset="0"/>
-            </a:endParaRPr>
-          </a:p>
-          <a:p>
-            <a:pPr indent="337661" algn="just">
-              <a:lnSpc>
-                <a:spcPct val="108000"/>
-              </a:lnSpc>
-              <a:spcAft>
-                <a:spcPts val="600"/>
-              </a:spcAft>
-            </a:pPr>
-            <a:r>
-              <a:rPr lang="ru-RU" sz="1600" dirty="0">
-                <a:solidFill>
-                  <a:srgbClr val="000000"/>
-                </a:solidFill>
-                <a:latin typeface="Times New Roman" panose="02020603050405020304" pitchFamily="18" charset="0"/>
-                <a:ea typeface="Times New Roman" panose="02020603050405020304" pitchFamily="18" charset="0"/>
-                <a:cs typeface="Times New Roman" panose="02020603050405020304" pitchFamily="18" charset="0"/>
-              </a:rPr>
-              <a:t>	Слабые стороны:</a:t>
-            </a:r>
-          </a:p>
-          <a:p>
-            <a:pPr indent="337661" algn="just">
-              <a:lnSpc>
-                <a:spcPct val="108000"/>
-              </a:lnSpc>
-              <a:spcAft>
-                <a:spcPts val="600"/>
-              </a:spcAft>
-            </a:pPr>
-            <a:r>
-              <a:rPr lang="ru-RU" sz="1600" dirty="0">
-                <a:solidFill>
-                  <a:srgbClr val="000000"/>
-                </a:solidFill>
-                <a:latin typeface="Times New Roman" panose="02020603050405020304" pitchFamily="18" charset="0"/>
-                <a:ea typeface="Times New Roman" panose="02020603050405020304" pitchFamily="18" charset="0"/>
-                <a:cs typeface="Times New Roman" panose="02020603050405020304" pitchFamily="18" charset="0"/>
-              </a:rPr>
-              <a:t>⁻	Калькулятор ОСАГО находится на отдельной странице, требует 4 шага для оформления.</a:t>
-            </a:r>
-          </a:p>
-          <a:p>
-            <a:pPr indent="337661" algn="just">
-              <a:lnSpc>
-                <a:spcPct val="108000"/>
-              </a:lnSpc>
-              <a:spcAft>
-                <a:spcPts val="600"/>
-              </a:spcAft>
-            </a:pPr>
-            <a:r>
-              <a:rPr lang="ru-RU" sz="1600" dirty="0">
-                <a:solidFill>
-                  <a:srgbClr val="000000"/>
-                </a:solidFill>
-                <a:latin typeface="Times New Roman" panose="02020603050405020304" pitchFamily="18" charset="0"/>
-                <a:ea typeface="Times New Roman" panose="02020603050405020304" pitchFamily="18" charset="0"/>
-                <a:cs typeface="Times New Roman" panose="02020603050405020304" pitchFamily="18" charset="0"/>
-              </a:rPr>
-              <a:t>⁻	Интерфейс </a:t>
-            </a:r>
-            <a:r>
-              <a:rPr lang="ru-RU" sz="1600" dirty="0" smtClean="0">
-                <a:solidFill>
-                  <a:srgbClr val="000000"/>
-                </a:solidFill>
-                <a:latin typeface="Times New Roman" panose="02020603050405020304" pitchFamily="18" charset="0"/>
-                <a:ea typeface="Times New Roman" panose="02020603050405020304" pitchFamily="18" charset="0"/>
-                <a:cs typeface="Times New Roman" panose="02020603050405020304" pitchFamily="18" charset="0"/>
-              </a:rPr>
-              <a:t>перегружен </a:t>
-            </a:r>
-            <a:r>
-              <a:rPr lang="ru-RU" sz="1600" dirty="0">
-                <a:solidFill>
-                  <a:srgbClr val="000000"/>
-                </a:solidFill>
-                <a:latin typeface="Times New Roman" panose="02020603050405020304" pitchFamily="18" charset="0"/>
-                <a:ea typeface="Times New Roman" panose="02020603050405020304" pitchFamily="18" charset="0"/>
-                <a:cs typeface="Times New Roman" panose="02020603050405020304" pitchFamily="18" charset="0"/>
-              </a:rPr>
-              <a:t>информацией.</a:t>
-            </a:r>
-          </a:p>
-          <a:p>
-            <a:pPr indent="337661" algn="just">
-              <a:lnSpc>
-                <a:spcPct val="108000"/>
-              </a:lnSpc>
-              <a:spcAft>
-                <a:spcPts val="600"/>
-              </a:spcAft>
-            </a:pPr>
-            <a:r>
-              <a:rPr lang="ru-RU" sz="1600" dirty="0">
-                <a:solidFill>
-                  <a:srgbClr val="000000"/>
-                </a:solidFill>
-                <a:latin typeface="Times New Roman" panose="02020603050405020304" pitchFamily="18" charset="0"/>
-                <a:ea typeface="Times New Roman" panose="02020603050405020304" pitchFamily="18" charset="0"/>
-                <a:cs typeface="Times New Roman" panose="02020603050405020304" pitchFamily="18" charset="0"/>
-              </a:rPr>
-              <a:t>⁻	Личный кабинет имеет ограниченный функционал по сравнению с конкурентами.</a:t>
+              <a:t>кабинет имеет ограниченный функционал по сравнению с конкурентами.</a:t>
             </a:r>
           </a:p>
         </p:txBody>
@@ -9194,8 +9081,8 @@
         </p:blipFill>
         <p:spPr bwMode="auto">
           <a:xfrm>
-            <a:off x="4613650" y="2123270"/>
-            <a:ext cx="4511624" cy="2339070"/>
+            <a:off x="2933701" y="1077306"/>
+            <a:ext cx="6134100" cy="4267111"/>
           </a:xfrm>
           <a:prstGeom prst="rect">
             <a:avLst/>
@@ -9277,7 +9164,7 @@
           <p:cNvPr id="2" name="Номер слайда 1">
             <a:extLst>
               <a:ext uri="{FF2B5EF4-FFF2-40B4-BE49-F238E27FC236}">
-                <a16:creationId xmlns:a16="http://schemas.microsoft.com/office/drawing/2014/main" xmlns="" id="{46930FCD-49CE-443B-97F5-6039E4520D00}"/>
+                <a16:creationId xmlns="" xmlns:a16="http://schemas.microsoft.com/office/drawing/2014/main" id="{46930FCD-49CE-443B-97F5-6039E4520D00}"/>
               </a:ext>
             </a:extLst>
           </p:cNvPr>
@@ -9317,7 +9204,7 @@
           <p:cNvPr id="4" name="Прямоугольник 3">
             <a:extLst>
               <a:ext uri="{FF2B5EF4-FFF2-40B4-BE49-F238E27FC236}">
-                <a16:creationId xmlns:a16="http://schemas.microsoft.com/office/drawing/2014/main" xmlns="" id="{27480CD9-7B24-402C-9C1B-D0834A459CC5}"/>
+                <a16:creationId xmlns="" xmlns:a16="http://schemas.microsoft.com/office/drawing/2014/main" id="{27480CD9-7B24-402C-9C1B-D0834A459CC5}"/>
               </a:ext>
             </a:extLst>
           </p:cNvPr>
@@ -9326,8 +9213,8 @@
         </p:nvSpPr>
         <p:spPr>
           <a:xfrm>
-            <a:off x="156851" y="1069673"/>
-            <a:ext cx="4308057" cy="5757345"/>
+            <a:off x="156853" y="647702"/>
+            <a:ext cx="2691122" cy="6017032"/>
           </a:xfrm>
           <a:prstGeom prst="rect">
             <a:avLst/>
@@ -9360,6 +9247,85 @@
             </a:r>
           </a:p>
           <a:p>
+            <a:pPr marL="285750" indent="-285750" algn="just">
+              <a:lnSpc>
+                <a:spcPct val="150000"/>
+              </a:lnSpc>
+              <a:spcAft>
+                <a:spcPts val="600"/>
+              </a:spcAft>
+              <a:buFont typeface="Arial" pitchFamily="34" charset="0"/>
+              <a:buChar char="•"/>
+            </a:pPr>
+            <a:r>
+              <a:rPr lang="ru-RU" sz="1600" dirty="0" smtClean="0">
+                <a:solidFill>
+                  <a:srgbClr val="000000"/>
+                </a:solidFill>
+                <a:latin typeface="Times New Roman" panose="02020603050405020304" pitchFamily="18" charset="0"/>
+                <a:ea typeface="Times New Roman" panose="02020603050405020304" pitchFamily="18" charset="0"/>
+                <a:cs typeface="Times New Roman" panose="02020603050405020304" pitchFamily="18" charset="0"/>
+              </a:rPr>
+              <a:t>Калькулятор интегрирован с </a:t>
+            </a:r>
+            <a:r>
+              <a:rPr lang="ru-RU" sz="1600" dirty="0">
+                <a:solidFill>
+                  <a:srgbClr val="000000"/>
+                </a:solidFill>
+                <a:latin typeface="Times New Roman" panose="02020603050405020304" pitchFamily="18" charset="0"/>
+                <a:ea typeface="Times New Roman" panose="02020603050405020304" pitchFamily="18" charset="0"/>
+                <a:cs typeface="Times New Roman" panose="02020603050405020304" pitchFamily="18" charset="0"/>
+              </a:rPr>
+              <a:t>банковским приложением ВТБ.</a:t>
+            </a:r>
+          </a:p>
+          <a:p>
+            <a:pPr marL="285750" indent="-285750" algn="just">
+              <a:lnSpc>
+                <a:spcPct val="150000"/>
+              </a:lnSpc>
+              <a:spcAft>
+                <a:spcPts val="600"/>
+              </a:spcAft>
+              <a:buFont typeface="Arial" pitchFamily="34" charset="0"/>
+              <a:buChar char="•"/>
+            </a:pPr>
+            <a:r>
+              <a:rPr lang="ru-RU" sz="1600" dirty="0" smtClean="0">
+                <a:solidFill>
+                  <a:srgbClr val="000000"/>
+                </a:solidFill>
+                <a:latin typeface="Times New Roman" panose="02020603050405020304" pitchFamily="18" charset="0"/>
+                <a:ea typeface="Times New Roman" panose="02020603050405020304" pitchFamily="18" charset="0"/>
+                <a:cs typeface="Times New Roman" panose="02020603050405020304" pitchFamily="18" charset="0"/>
+              </a:rPr>
+              <a:t>Электронный </a:t>
+            </a:r>
+            <a:r>
+              <a:rPr lang="ru-RU" sz="1600" dirty="0">
+                <a:solidFill>
+                  <a:srgbClr val="000000"/>
+                </a:solidFill>
+                <a:latin typeface="Times New Roman" panose="02020603050405020304" pitchFamily="18" charset="0"/>
+                <a:ea typeface="Times New Roman" panose="02020603050405020304" pitchFamily="18" charset="0"/>
+                <a:cs typeface="Times New Roman" panose="02020603050405020304" pitchFamily="18" charset="0"/>
+              </a:rPr>
+              <a:t>полис </a:t>
+            </a:r>
+            <a:r>
+              <a:rPr lang="ru-RU" sz="1600" dirty="0" smtClean="0">
+                <a:solidFill>
+                  <a:srgbClr val="000000"/>
+                </a:solidFill>
+                <a:latin typeface="Times New Roman" panose="02020603050405020304" pitchFamily="18" charset="0"/>
+                <a:ea typeface="Times New Roman" panose="02020603050405020304" pitchFamily="18" charset="0"/>
+                <a:cs typeface="Times New Roman" panose="02020603050405020304" pitchFamily="18" charset="0"/>
+              </a:rPr>
+              <a:t>с онлайн-оплатой	</a:t>
+            </a:r>
+          </a:p>
+          <a:p>
             <a:pPr indent="337661" algn="just">
               <a:lnSpc>
                 <a:spcPct val="150000"/>
@@ -9369,7 +9335,7 @@
               </a:spcAft>
             </a:pPr>
             <a:r>
-              <a:rPr lang="ru-RU" sz="1600" dirty="0">
+              <a:rPr lang="ru-RU" sz="1600" dirty="0" smtClean="0">
                 <a:solidFill>
                   <a:srgbClr val="000000"/>
                 </a:solidFill>
@@ -9377,19 +9343,32 @@
                 <a:ea typeface="Times New Roman" panose="02020603050405020304" pitchFamily="18" charset="0"/>
                 <a:cs typeface="Times New Roman" panose="02020603050405020304" pitchFamily="18" charset="0"/>
               </a:rPr>
-              <a:t>⁻	Калькулятор ОСАГО интегрирован с банковским приложением ВТБ.</a:t>
-            </a:r>
-          </a:p>
-          <a:p>
-            <a:pPr indent="337661" algn="just">
+              <a:t>Слабые стороны:</a:t>
+            </a:r>
+          </a:p>
+          <a:p>
+            <a:pPr marL="285750" indent="-285750" algn="just">
               <a:lnSpc>
                 <a:spcPct val="150000"/>
               </a:lnSpc>
               <a:spcAft>
                 <a:spcPts val="600"/>
               </a:spcAft>
+              <a:buFont typeface="Arial" pitchFamily="34" charset="0"/>
+              <a:buChar char="•"/>
             </a:pPr>
             <a:r>
+              <a:rPr lang="ru-RU" sz="1600" dirty="0" smtClean="0">
+                <a:solidFill>
+                  <a:srgbClr val="000000"/>
+                </a:solidFill>
+                <a:latin typeface="Times New Roman" panose="02020603050405020304" pitchFamily="18" charset="0"/>
+                <a:ea typeface="Times New Roman" panose="02020603050405020304" pitchFamily="18" charset="0"/>
+                <a:cs typeface="Times New Roman" panose="02020603050405020304" pitchFamily="18" charset="0"/>
+              </a:rPr>
+              <a:t>Калькулятор </a:t>
+            </a:r>
+            <a:r>
               <a:rPr lang="ru-RU" sz="1600" dirty="0">
                 <a:solidFill>
                   <a:srgbClr val="000000"/>
@@ -9398,19 +9377,32 @@
                 <a:ea typeface="Times New Roman" panose="02020603050405020304" pitchFamily="18" charset="0"/>
                 <a:cs typeface="Times New Roman" panose="02020603050405020304" pitchFamily="18" charset="0"/>
               </a:rPr>
-              <a:t>⁻	Электронный полис и онлайн-оплата картами ВТБ и других банков.</a:t>
-            </a:r>
-          </a:p>
-          <a:p>
-            <a:pPr indent="337661" algn="just">
+              <a:t>КАСКО только через менеджера, полноценного онлайн-расчёта нет.</a:t>
+            </a:r>
+          </a:p>
+          <a:p>
+            <a:pPr marL="285750" indent="-285750" algn="just">
               <a:lnSpc>
                 <a:spcPct val="150000"/>
               </a:lnSpc>
               <a:spcAft>
                 <a:spcPts val="600"/>
               </a:spcAft>
+              <a:buFont typeface="Arial" pitchFamily="34" charset="0"/>
+              <a:buChar char="•"/>
             </a:pPr>
             <a:r>
+              <a:rPr lang="ru-RU" sz="1600" dirty="0" smtClean="0">
+                <a:solidFill>
+                  <a:srgbClr val="000000"/>
+                </a:solidFill>
+                <a:latin typeface="Times New Roman" panose="02020603050405020304" pitchFamily="18" charset="0"/>
+                <a:ea typeface="Times New Roman" panose="02020603050405020304" pitchFamily="18" charset="0"/>
+                <a:cs typeface="Times New Roman" panose="02020603050405020304" pitchFamily="18" charset="0"/>
+              </a:rPr>
+              <a:t>Личный </a:t>
+            </a:r>
+            <a:r>
               <a:rPr lang="ru-RU" sz="1600" dirty="0">
                 <a:solidFill>
                   <a:srgbClr val="000000"/>
@@ -9419,18 +9411,19 @@
                 <a:ea typeface="Times New Roman" panose="02020603050405020304" pitchFamily="18" charset="0"/>
                 <a:cs typeface="Times New Roman" panose="02020603050405020304" pitchFamily="18" charset="0"/>
               </a:rPr>
-              <a:t>⁻	Надёжность за счёт банковского бренда.</a:t>
-            </a:r>
-          </a:p>
-          <a:p>
-            <a:pPr indent="337661" algn="just">
-              <a:lnSpc>
-                <a:spcPct val="150000"/>
-              </a:lnSpc>
-              <a:spcAft>
-                <a:spcPts val="600"/>
-              </a:spcAft>
-            </a:pPr>
+              <a:t>кабинет </a:t>
+            </a:r>
+            <a:r>
+              <a:rPr lang="ru-RU" sz="1600" dirty="0" smtClean="0">
+                <a:solidFill>
+                  <a:srgbClr val="000000"/>
+                </a:solidFill>
+                <a:latin typeface="Times New Roman" panose="02020603050405020304" pitchFamily="18" charset="0"/>
+                <a:ea typeface="Times New Roman" panose="02020603050405020304" pitchFamily="18" charset="0"/>
+                <a:cs typeface="Times New Roman" panose="02020603050405020304" pitchFamily="18" charset="0"/>
+              </a:rPr>
+              <a:t>неудобен </a:t>
+            </a:r>
             <a:r>
               <a:rPr lang="ru-RU" sz="1600" dirty="0">
                 <a:solidFill>
@@ -9440,70 +9433,7 @@
                 <a:ea typeface="Times New Roman" panose="02020603050405020304" pitchFamily="18" charset="0"/>
                 <a:cs typeface="Times New Roman" panose="02020603050405020304" pitchFamily="18" charset="0"/>
               </a:rPr>
-              <a:t>	Слабые стороны:</a:t>
-            </a:r>
-          </a:p>
-          <a:p>
-            <a:pPr indent="337661" algn="just">
-              <a:lnSpc>
-                <a:spcPct val="150000"/>
-              </a:lnSpc>
-              <a:spcAft>
-                <a:spcPts val="600"/>
-              </a:spcAft>
-            </a:pPr>
-            <a:r>
-              <a:rPr lang="ru-RU" sz="1600" dirty="0">
-                <a:solidFill>
-                  <a:srgbClr val="000000"/>
-                </a:solidFill>
-                <a:latin typeface="Times New Roman" panose="02020603050405020304" pitchFamily="18" charset="0"/>
-                <a:ea typeface="Times New Roman" panose="02020603050405020304" pitchFamily="18" charset="0"/>
-                <a:cs typeface="Times New Roman" panose="02020603050405020304" pitchFamily="18" charset="0"/>
-              </a:rPr>
-              <a:t>⁻	Калькулятор КАСКО только через менеджера, полноценного онлайн-расчёта нет.</a:t>
-            </a:r>
-          </a:p>
-          <a:p>
-            <a:pPr indent="337661" algn="just">
-              <a:lnSpc>
-                <a:spcPct val="150000"/>
-              </a:lnSpc>
-              <a:spcAft>
-                <a:spcPts val="600"/>
-              </a:spcAft>
-            </a:pPr>
-            <a:r>
-              <a:rPr lang="ru-RU" sz="1600" dirty="0">
-                <a:solidFill>
-                  <a:srgbClr val="000000"/>
-                </a:solidFill>
-                <a:latin typeface="Times New Roman" panose="02020603050405020304" pitchFamily="18" charset="0"/>
-                <a:ea typeface="Times New Roman" panose="02020603050405020304" pitchFamily="18" charset="0"/>
-                <a:cs typeface="Times New Roman" panose="02020603050405020304" pitchFamily="18" charset="0"/>
-              </a:rPr>
-              <a:t>⁻	Самый медленный сайт среди аналогов (3,5 сек загрузки).</a:t>
-            </a:r>
-          </a:p>
-          <a:p>
-            <a:pPr indent="337661" algn="just">
-              <a:lnSpc>
-                <a:spcPct val="150000"/>
-              </a:lnSpc>
-              <a:spcAft>
-                <a:spcPts val="600"/>
-              </a:spcAft>
-            </a:pPr>
-            <a:r>
-              <a:rPr lang="ru-RU" sz="1600" dirty="0">
-                <a:solidFill>
-                  <a:srgbClr val="000000"/>
-                </a:solidFill>
-                <a:latin typeface="Times New Roman" panose="02020603050405020304" pitchFamily="18" charset="0"/>
-                <a:ea typeface="Times New Roman" panose="02020603050405020304" pitchFamily="18" charset="0"/>
-                <a:cs typeface="Times New Roman" panose="02020603050405020304" pitchFamily="18" charset="0"/>
-              </a:rPr>
-              <a:t>⁻	Личный кабинет сильно завязан на банковскую экосистему, неудобен для клиентов других банков.</a:t>
+              <a:t>для клиентов других банков.</a:t>
             </a:r>
           </a:p>
         </p:txBody>
@@ -9570,8 +9500,8 @@
         </p:blipFill>
         <p:spPr bwMode="auto">
           <a:xfrm>
-            <a:off x="4464908" y="1943100"/>
-            <a:ext cx="4654029" cy="2844800"/>
+            <a:off x="3019425" y="733426"/>
+            <a:ext cx="6032838" cy="3816350"/>
           </a:xfrm>
           <a:prstGeom prst="rect">
             <a:avLst/>
@@ -9653,7 +9583,7 @@
           <p:cNvPr id="2" name="Номер слайда 1">
             <a:extLst>
               <a:ext uri="{FF2B5EF4-FFF2-40B4-BE49-F238E27FC236}">
-                <a16:creationId xmlns:a16="http://schemas.microsoft.com/office/drawing/2014/main" xmlns="" id="{46930FCD-49CE-443B-97F5-6039E4520D00}"/>
+                <a16:creationId xmlns="" xmlns:a16="http://schemas.microsoft.com/office/drawing/2014/main" id="{46930FCD-49CE-443B-97F5-6039E4520D00}"/>
               </a:ext>
             </a:extLst>
           </p:cNvPr>
@@ -9802,7 +9732,7 @@
           <p:cNvPr id="2" name="Номер слайда 1">
             <a:extLst>
               <a:ext uri="{FF2B5EF4-FFF2-40B4-BE49-F238E27FC236}">
-                <a16:creationId xmlns:a16="http://schemas.microsoft.com/office/drawing/2014/main" xmlns="" id="{46930FCD-49CE-443B-97F5-6039E4520D00}"/>
+                <a16:creationId xmlns="" xmlns:a16="http://schemas.microsoft.com/office/drawing/2014/main" id="{46930FCD-49CE-443B-97F5-6039E4520D00}"/>
               </a:ext>
             </a:extLst>
           </p:cNvPr>
@@ -9958,7 +9888,7 @@
           <p:cNvPr id="2" name="Номер слайда 1">
             <a:extLst>
               <a:ext uri="{FF2B5EF4-FFF2-40B4-BE49-F238E27FC236}">
-                <a16:creationId xmlns:a16="http://schemas.microsoft.com/office/drawing/2014/main" xmlns="" id="{46930FCD-49CE-443B-97F5-6039E4520D00}"/>
+                <a16:creationId xmlns="" xmlns:a16="http://schemas.microsoft.com/office/drawing/2014/main" id="{46930FCD-49CE-443B-97F5-6039E4520D00}"/>
               </a:ext>
             </a:extLst>
           </p:cNvPr>
@@ -10362,7 +10292,7 @@
   <a:extraClrSchemeLst/>
   <a:extLst>
     <a:ext uri="{05A4C25C-085E-4340-85A3-A5531E510DB2}">
-      <thm15:themeFamily xmlns:thm15="http://schemas.microsoft.com/office/thememl/2012/main" xmlns="" name="Office Theme" id="{62F939B6-93AF-4DB8-9C6B-D6C7DFDC589F}" vid="{4A3C46E8-61CC-4603-A589-7422A47A8E4A}"/>
+      <thm15:themeFamily xmlns="" xmlns:thm15="http://schemas.microsoft.com/office/thememl/2012/main" name="Office Theme" id="{62F939B6-93AF-4DB8-9C6B-D6C7DFDC589F}" vid="{4A3C46E8-61CC-4603-A589-7422A47A8E4A}"/>
     </a:ext>
   </a:extLst>
 </a:theme>
@@ -10657,7 +10587,7 @@
   <a:extraClrSchemeLst/>
   <a:extLst>
     <a:ext uri="{05A4C25C-085E-4340-85A3-A5531E510DB2}">
-      <thm15:themeFamily xmlns:thm15="http://schemas.microsoft.com/office/thememl/2012/main" xmlns="" name="Office Theme" id="{62F939B6-93AF-4DB8-9C6B-D6C7DFDC589F}" vid="{4A3C46E8-61CC-4603-A589-7422A47A8E4A}"/>
+      <thm15:themeFamily xmlns="" xmlns:thm15="http://schemas.microsoft.com/office/thememl/2012/main" name="Office Theme" id="{62F939B6-93AF-4DB8-9C6B-D6C7DFDC589F}" vid="{4A3C46E8-61CC-4603-A589-7422A47A8E4A}"/>
     </a:ext>
   </a:extLst>
 </a:theme>
@@ -10918,7 +10848,7 @@
   <a:extraClrSchemeLst/>
   <a:extLst>
     <a:ext uri="{05A4C25C-085E-4340-85A3-A5531E510DB2}">
-      <thm15:themeFamily xmlns:thm15="http://schemas.microsoft.com/office/thememl/2012/main" xmlns="" name="Office Theme" id="{62F939B6-93AF-4DB8-9C6B-D6C7DFDC589F}" vid="{4A3C46E8-61CC-4603-A589-7422A47A8E4A}"/>
+      <thm15:themeFamily xmlns="" xmlns:thm15="http://schemas.microsoft.com/office/thememl/2012/main" name="Office Theme" id="{62F939B6-93AF-4DB8-9C6B-D6C7DFDC589F}" vid="{4A3C46E8-61CC-4603-A589-7422A47A8E4A}"/>
     </a:ext>
   </a:extLst>
 </a:theme>

--- a/docs/Презентация.pptx
+++ b/docs/Презентация.pptx
@@ -131,7 +131,7 @@
   </p:defaultTextStyle>
   <p:extLst>
     <p:ext uri="{EFAFB233-063F-42B5-8137-9DF3F51BA10A}">
-      <p15:sldGuideLst xmlns="" xmlns:p15="http://schemas.microsoft.com/office/powerpoint/2012/main"/>
+      <p15:sldGuideLst xmlns:p15="http://schemas.microsoft.com/office/powerpoint/2012/main" xmlns=""/>
     </p:ext>
   </p:extLst>
 </p:presentation>
@@ -3518,7 +3518,7 @@
           <p:cNvPr id="5122" name="Заголовок 1">
             <a:extLst>
               <a:ext uri="{FF2B5EF4-FFF2-40B4-BE49-F238E27FC236}">
-                <a16:creationId xmlns="" xmlns:a16="http://schemas.microsoft.com/office/drawing/2014/main" id="{4B5591A6-5834-4185-B35A-E25027E602E1}"/>
+                <a16:creationId xmlns:a16="http://schemas.microsoft.com/office/drawing/2014/main" xmlns="" id="{4B5591A6-5834-4185-B35A-E25027E602E1}"/>
               </a:ext>
             </a:extLst>
           </p:cNvPr>
@@ -3560,7 +3560,7 @@
           <p:cNvPr id="5123" name="Подзаголовок 2">
             <a:extLst>
               <a:ext uri="{FF2B5EF4-FFF2-40B4-BE49-F238E27FC236}">
-                <a16:creationId xmlns="" xmlns:a16="http://schemas.microsoft.com/office/drawing/2014/main" id="{E3566C31-9F5B-4D4E-9E6C-6AC8B8C750D7}"/>
+                <a16:creationId xmlns:a16="http://schemas.microsoft.com/office/drawing/2014/main" xmlns="" id="{E3566C31-9F5B-4D4E-9E6C-6AC8B8C750D7}"/>
               </a:ext>
             </a:extLst>
           </p:cNvPr>
@@ -3635,7 +3635,7 @@
           <p:cNvPr id="5124" name="TextBox 3">
             <a:extLst>
               <a:ext uri="{FF2B5EF4-FFF2-40B4-BE49-F238E27FC236}">
-                <a16:creationId xmlns="" xmlns:a16="http://schemas.microsoft.com/office/drawing/2014/main" id="{75A24AD9-E605-4CC6-8C7C-D67DE4C4CD97}"/>
+                <a16:creationId xmlns:a16="http://schemas.microsoft.com/office/drawing/2014/main" xmlns="" id="{75A24AD9-E605-4CC6-8C7C-D67DE4C4CD97}"/>
               </a:ext>
             </a:extLst>
           </p:cNvPr>
@@ -3863,7 +3863,7 @@
           <p:cNvPr id="5125" name="TextBox 5">
             <a:extLst>
               <a:ext uri="{FF2B5EF4-FFF2-40B4-BE49-F238E27FC236}">
-                <a16:creationId xmlns="" xmlns:a16="http://schemas.microsoft.com/office/drawing/2014/main" id="{32D6B6ED-C1D5-4045-A57B-61B43F7C8C06}"/>
+                <a16:creationId xmlns:a16="http://schemas.microsoft.com/office/drawing/2014/main" xmlns="" id="{32D6B6ED-C1D5-4045-A57B-61B43F7C8C06}"/>
               </a:ext>
             </a:extLst>
           </p:cNvPr>
@@ -4066,7 +4066,7 @@
           <p:cNvPr id="2" name="Номер слайда 1">
             <a:extLst>
               <a:ext uri="{FF2B5EF4-FFF2-40B4-BE49-F238E27FC236}">
-                <a16:creationId xmlns="" xmlns:a16="http://schemas.microsoft.com/office/drawing/2014/main" id="{46930FCD-49CE-443B-97F5-6039E4520D00}"/>
+                <a16:creationId xmlns:a16="http://schemas.microsoft.com/office/drawing/2014/main" xmlns="" id="{46930FCD-49CE-443B-97F5-6039E4520D00}"/>
               </a:ext>
             </a:extLst>
           </p:cNvPr>
@@ -4421,17 +4421,20 @@
               <a:rPr lang="ru-RU" sz="1800" dirty="0"/>
               <a:t>:</a:t>
             </a:r>
-            <a:endParaRPr lang="ru-RU" sz="1800" dirty="0"/>
           </a:p>
           <a:p>
             <a:pPr lvl="0" defTabSz="457200" hangingPunct="0"/>
             <a:r>
               <a:rPr lang="ru-RU" sz="1800" dirty="0"/>
-              <a:t>Скорость </a:t>
-            </a:r>
+              <a:t>Скорость разработки</a:t>
+            </a:r>
+            <a:endParaRPr lang="en-US" sz="1800" dirty="0"/>
+          </a:p>
+          <a:p>
+            <a:pPr lvl="0" defTabSz="457200" hangingPunct="0"/>
             <a:r>
               <a:rPr lang="ru-RU" sz="1800" dirty="0"/>
-              <a:t>разработки</a:t>
+              <a:t>Соответствие требованиям безопасности </a:t>
             </a:r>
             <a:endParaRPr lang="en-US" sz="1800" dirty="0"/>
           </a:p>
@@ -4439,29 +4442,8 @@
             <a:pPr lvl="0" defTabSz="457200" hangingPunct="0"/>
             <a:r>
               <a:rPr lang="ru-RU" sz="1800" dirty="0"/>
-              <a:t>Соответствие </a:t>
-            </a:r>
-            <a:r>
-              <a:rPr lang="ru-RU" sz="1800" dirty="0"/>
-              <a:t>требованиям безопасности </a:t>
-            </a:r>
-            <a:endParaRPr lang="en-US" sz="1800" dirty="0"/>
-          </a:p>
-          <a:p>
-            <a:pPr lvl="0" defTabSz="457200" hangingPunct="0"/>
-            <a:r>
-              <a:rPr lang="ru-RU" sz="1800" dirty="0"/>
-              <a:t>Удобство </a:t>
-            </a:r>
-            <a:r>
-              <a:rPr lang="ru-RU" sz="1800" dirty="0"/>
-              <a:t>работы с </a:t>
-            </a:r>
-            <a:r>
-              <a:rPr lang="ru-RU" sz="1800" dirty="0"/>
-              <a:t>БД</a:t>
-            </a:r>
-            <a:endParaRPr lang="ru-RU" sz="1800" dirty="0"/>
+              <a:t>Удобство работы с БД</a:t>
+            </a:r>
           </a:p>
           <a:p>
             <a:pPr lvl="0" defTabSz="457200" hangingPunct="0"/>
@@ -4548,11 +4530,7 @@
             </a:pPr>
             <a:r>
               <a:rPr lang="ru-RU" dirty="0" smtClean="0"/>
-              <a:t>Компонентный </a:t>
-            </a:r>
-            <a:r>
-              <a:rPr lang="ru-RU" dirty="0" smtClean="0"/>
-              <a:t>подход</a:t>
+              <a:t>Компонентный подход</a:t>
             </a:r>
             <a:endParaRPr lang="ru-RU" dirty="0"/>
           </a:p>
@@ -4573,13 +4551,8 @@
             </a:pPr>
             <a:r>
               <a:rPr lang="ru-RU" dirty="0" smtClean="0"/>
-              <a:t>Экосистема</a:t>
-            </a:r>
-            <a:r>
-              <a:rPr lang="ru-RU" dirty="0" smtClean="0"/>
-              <a:t> </a:t>
-            </a:r>
-            <a:endParaRPr lang="ru-RU" dirty="0" smtClean="0"/>
+              <a:t>Экосистема </a:t>
+            </a:r>
           </a:p>
           <a:p>
             <a:pPr marL="285750" lvl="0" indent="-285750" hangingPunct="0">
@@ -4588,11 +4561,7 @@
             </a:pPr>
             <a:r>
               <a:rPr lang="ru-RU" dirty="0" smtClean="0"/>
-              <a:t>Читаемость </a:t>
-            </a:r>
-            <a:r>
-              <a:rPr lang="ru-RU" dirty="0" smtClean="0"/>
-              <a:t>кода</a:t>
+              <a:t>Читаемость кода</a:t>
             </a:r>
           </a:p>
           <a:p>
@@ -4647,7 +4616,7 @@
           <p:cNvPr id="2" name="Номер слайда 1">
             <a:extLst>
               <a:ext uri="{FF2B5EF4-FFF2-40B4-BE49-F238E27FC236}">
-                <a16:creationId xmlns="" xmlns:a16="http://schemas.microsoft.com/office/drawing/2014/main" id="{8C826DA7-D1DD-4311-A823-D438A4D9C3AA}"/>
+                <a16:creationId xmlns:a16="http://schemas.microsoft.com/office/drawing/2014/main" xmlns="" id="{8C826DA7-D1DD-4311-A823-D438A4D9C3AA}"/>
               </a:ext>
             </a:extLst>
           </p:cNvPr>
@@ -4687,7 +4656,7 @@
           <p:cNvPr id="4" name="Прямоугольник 3">
             <a:extLst>
               <a:ext uri="{FF2B5EF4-FFF2-40B4-BE49-F238E27FC236}">
-                <a16:creationId xmlns="" xmlns:a16="http://schemas.microsoft.com/office/drawing/2014/main" id="{E2B8A57F-0C4E-48A2-8E8F-1C89F19B4C11}"/>
+                <a16:creationId xmlns:a16="http://schemas.microsoft.com/office/drawing/2014/main" xmlns="" id="{E2B8A57F-0C4E-48A2-8E8F-1C89F19B4C11}"/>
               </a:ext>
             </a:extLst>
           </p:cNvPr>
@@ -4741,7 +4710,7 @@
           <p:cNvPr id="7" name="Прямоугольник 6">
             <a:extLst>
               <a:ext uri="{FF2B5EF4-FFF2-40B4-BE49-F238E27FC236}">
-                <a16:creationId xmlns="" xmlns:a16="http://schemas.microsoft.com/office/drawing/2014/main" id="{8B4CD0C1-7F79-4EE9-92E1-4406C1DE0C4D}"/>
+                <a16:creationId xmlns:a16="http://schemas.microsoft.com/office/drawing/2014/main" xmlns="" id="{8B4CD0C1-7F79-4EE9-92E1-4406C1DE0C4D}"/>
               </a:ext>
             </a:extLst>
           </p:cNvPr>
@@ -5291,7 +5260,7 @@
           <p:cNvPr id="2" name="Номер слайда 1">
             <a:extLst>
               <a:ext uri="{FF2B5EF4-FFF2-40B4-BE49-F238E27FC236}">
-                <a16:creationId xmlns="" xmlns:a16="http://schemas.microsoft.com/office/drawing/2014/main" id="{9BE8A756-4F8A-4B4E-9CA4-0B2B58754F23}"/>
+                <a16:creationId xmlns:a16="http://schemas.microsoft.com/office/drawing/2014/main" xmlns="" id="{9BE8A756-4F8A-4B4E-9CA4-0B2B58754F23}"/>
               </a:ext>
             </a:extLst>
           </p:cNvPr>
@@ -5331,7 +5300,7 @@
           <p:cNvPr id="3" name="Прямоугольник 2">
             <a:extLst>
               <a:ext uri="{FF2B5EF4-FFF2-40B4-BE49-F238E27FC236}">
-                <a16:creationId xmlns="" xmlns:a16="http://schemas.microsoft.com/office/drawing/2014/main" id="{F1F27FB0-1F6C-44A1-A435-43CA134E566B}"/>
+                <a16:creationId xmlns:a16="http://schemas.microsoft.com/office/drawing/2014/main" xmlns="" id="{F1F27FB0-1F6C-44A1-A435-43CA134E566B}"/>
               </a:ext>
             </a:extLst>
           </p:cNvPr>
@@ -5379,7 +5348,7 @@
           <p:cNvPr id="7" name="TextBox 6">
             <a:extLst>
               <a:ext uri="{FF2B5EF4-FFF2-40B4-BE49-F238E27FC236}">
-                <a16:creationId xmlns="" xmlns:a16="http://schemas.microsoft.com/office/drawing/2014/main" id="{4A43B050-07A0-4514-AC09-5D92151B5A5B}"/>
+                <a16:creationId xmlns:a16="http://schemas.microsoft.com/office/drawing/2014/main" xmlns="" id="{4A43B050-07A0-4514-AC09-5D92151B5A5B}"/>
               </a:ext>
             </a:extLst>
           </p:cNvPr>
@@ -5417,7 +5386,7 @@
           <p:cNvPr id="10" name="TextBox 9">
             <a:extLst>
               <a:ext uri="{FF2B5EF4-FFF2-40B4-BE49-F238E27FC236}">
-                <a16:creationId xmlns="" xmlns:a16="http://schemas.microsoft.com/office/drawing/2014/main" id="{55B50A2E-4A39-49F0-B727-CDF21C8341D9}"/>
+                <a16:creationId xmlns:a16="http://schemas.microsoft.com/office/drawing/2014/main" xmlns="" id="{55B50A2E-4A39-49F0-B727-CDF21C8341D9}"/>
               </a:ext>
             </a:extLst>
           </p:cNvPr>
@@ -5579,7 +5548,7 @@
           <p:cNvPr id="2" name="Номер слайда 1">
             <a:extLst>
               <a:ext uri="{FF2B5EF4-FFF2-40B4-BE49-F238E27FC236}">
-                <a16:creationId xmlns="" xmlns:a16="http://schemas.microsoft.com/office/drawing/2014/main" id="{C820370D-A83B-4B37-B843-B456D57F2960}"/>
+                <a16:creationId xmlns:a16="http://schemas.microsoft.com/office/drawing/2014/main" xmlns="" id="{C820370D-A83B-4B37-B843-B456D57F2960}"/>
               </a:ext>
             </a:extLst>
           </p:cNvPr>
@@ -5619,7 +5588,7 @@
           <p:cNvPr id="3" name="Прямоугольник 2">
             <a:extLst>
               <a:ext uri="{FF2B5EF4-FFF2-40B4-BE49-F238E27FC236}">
-                <a16:creationId xmlns="" xmlns:a16="http://schemas.microsoft.com/office/drawing/2014/main" id="{C71F0BEC-C0A2-49FD-A749-FC7B77565389}"/>
+                <a16:creationId xmlns:a16="http://schemas.microsoft.com/office/drawing/2014/main" xmlns="" id="{C71F0BEC-C0A2-49FD-A749-FC7B77565389}"/>
               </a:ext>
             </a:extLst>
           </p:cNvPr>
@@ -5660,7 +5629,7 @@
           <p:cNvPr id="21" name="TextBox 20">
             <a:extLst>
               <a:ext uri="{FF2B5EF4-FFF2-40B4-BE49-F238E27FC236}">
-                <a16:creationId xmlns="" xmlns:a16="http://schemas.microsoft.com/office/drawing/2014/main" id="{42642DA8-38FB-40C2-A8E5-E2D7DE3F20BE}"/>
+                <a16:creationId xmlns:a16="http://schemas.microsoft.com/office/drawing/2014/main" xmlns="" id="{42642DA8-38FB-40C2-A8E5-E2D7DE3F20BE}"/>
               </a:ext>
             </a:extLst>
           </p:cNvPr>
@@ -5702,7 +5671,7 @@
           <p:cNvPr id="22" name="TextBox 21">
             <a:extLst>
               <a:ext uri="{FF2B5EF4-FFF2-40B4-BE49-F238E27FC236}">
-                <a16:creationId xmlns="" xmlns:a16="http://schemas.microsoft.com/office/drawing/2014/main" id="{42642DA8-38FB-40C2-A8E5-E2D7DE3F20BE}"/>
+                <a16:creationId xmlns:a16="http://schemas.microsoft.com/office/drawing/2014/main" xmlns="" id="{42642DA8-38FB-40C2-A8E5-E2D7DE3F20BE}"/>
               </a:ext>
             </a:extLst>
           </p:cNvPr>
@@ -5867,7 +5836,7 @@
           <p:cNvPr id="23" name="TextBox 22">
             <a:extLst>
               <a:ext uri="{FF2B5EF4-FFF2-40B4-BE49-F238E27FC236}">
-                <a16:creationId xmlns="" xmlns:a16="http://schemas.microsoft.com/office/drawing/2014/main" id="{42642DA8-38FB-40C2-A8E5-E2D7DE3F20BE}"/>
+                <a16:creationId xmlns:a16="http://schemas.microsoft.com/office/drawing/2014/main" xmlns="" id="{42642DA8-38FB-40C2-A8E5-E2D7DE3F20BE}"/>
               </a:ext>
             </a:extLst>
           </p:cNvPr>
@@ -6142,7 +6111,7 @@
           <p:cNvPr id="9" name="TextBox 8">
             <a:extLst>
               <a:ext uri="{FF2B5EF4-FFF2-40B4-BE49-F238E27FC236}">
-                <a16:creationId xmlns="" xmlns:a16="http://schemas.microsoft.com/office/drawing/2014/main" id="{42642DA8-38FB-40C2-A8E5-E2D7DE3F20BE}"/>
+                <a16:creationId xmlns:a16="http://schemas.microsoft.com/office/drawing/2014/main" xmlns="" id="{42642DA8-38FB-40C2-A8E5-E2D7DE3F20BE}"/>
               </a:ext>
             </a:extLst>
           </p:cNvPr>
@@ -6184,7 +6153,7 @@
           <p:cNvPr id="10" name="TextBox 9">
             <a:extLst>
               <a:ext uri="{FF2B5EF4-FFF2-40B4-BE49-F238E27FC236}">
-                <a16:creationId xmlns="" xmlns:a16="http://schemas.microsoft.com/office/drawing/2014/main" id="{42642DA8-38FB-40C2-A8E5-E2D7DE3F20BE}"/>
+                <a16:creationId xmlns:a16="http://schemas.microsoft.com/office/drawing/2014/main" xmlns="" id="{42642DA8-38FB-40C2-A8E5-E2D7DE3F20BE}"/>
               </a:ext>
             </a:extLst>
           </p:cNvPr>
@@ -6461,7 +6430,7 @@
           <p:cNvPr id="10" name="TextBox 9">
             <a:extLst>
               <a:ext uri="{FF2B5EF4-FFF2-40B4-BE49-F238E27FC236}">
-                <a16:creationId xmlns="" xmlns:a16="http://schemas.microsoft.com/office/drawing/2014/main" id="{42642DA8-38FB-40C2-A8E5-E2D7DE3F20BE}"/>
+                <a16:creationId xmlns:a16="http://schemas.microsoft.com/office/drawing/2014/main" xmlns="" id="{42642DA8-38FB-40C2-A8E5-E2D7DE3F20BE}"/>
               </a:ext>
             </a:extLst>
           </p:cNvPr>
@@ -6504,7 +6473,7 @@
           <p:cNvPr id="20" name="TextBox 19">
             <a:extLst>
               <a:ext uri="{FF2B5EF4-FFF2-40B4-BE49-F238E27FC236}">
-                <a16:creationId xmlns="" xmlns:a16="http://schemas.microsoft.com/office/drawing/2014/main" id="{42642DA8-38FB-40C2-A8E5-E2D7DE3F20BE}"/>
+                <a16:creationId xmlns:a16="http://schemas.microsoft.com/office/drawing/2014/main" xmlns="" id="{42642DA8-38FB-40C2-A8E5-E2D7DE3F20BE}"/>
               </a:ext>
             </a:extLst>
           </p:cNvPr>
@@ -7066,7 +7035,7 @@
           <p:cNvPr id="16" name="TextBox 15">
             <a:extLst>
               <a:ext uri="{FF2B5EF4-FFF2-40B4-BE49-F238E27FC236}">
-                <a16:creationId xmlns="" xmlns:a16="http://schemas.microsoft.com/office/drawing/2014/main" id="{42642DA8-38FB-40C2-A8E5-E2D7DE3F20BE}"/>
+                <a16:creationId xmlns:a16="http://schemas.microsoft.com/office/drawing/2014/main" xmlns="" id="{42642DA8-38FB-40C2-A8E5-E2D7DE3F20BE}"/>
               </a:ext>
             </a:extLst>
           </p:cNvPr>
@@ -7109,7 +7078,7 @@
           <p:cNvPr id="17" name="TextBox 16">
             <a:extLst>
               <a:ext uri="{FF2B5EF4-FFF2-40B4-BE49-F238E27FC236}">
-                <a16:creationId xmlns="" xmlns:a16="http://schemas.microsoft.com/office/drawing/2014/main" id="{42642DA8-38FB-40C2-A8E5-E2D7DE3F20BE}"/>
+                <a16:creationId xmlns:a16="http://schemas.microsoft.com/office/drawing/2014/main" xmlns="" id="{42642DA8-38FB-40C2-A8E5-E2D7DE3F20BE}"/>
               </a:ext>
             </a:extLst>
           </p:cNvPr>
@@ -7189,7 +7158,7 @@
           <p:cNvPr id="2" name="Номер слайда 1">
             <a:extLst>
               <a:ext uri="{FF2B5EF4-FFF2-40B4-BE49-F238E27FC236}">
-                <a16:creationId xmlns="" xmlns:a16="http://schemas.microsoft.com/office/drawing/2014/main" id="{A1EF2F5E-9F5C-4751-B700-A7A94305E781}"/>
+                <a16:creationId xmlns:a16="http://schemas.microsoft.com/office/drawing/2014/main" xmlns="" id="{A1EF2F5E-9F5C-4751-B700-A7A94305E781}"/>
               </a:ext>
             </a:extLst>
           </p:cNvPr>
@@ -7229,7 +7198,7 @@
           <p:cNvPr id="3" name="TextBox 2">
             <a:extLst>
               <a:ext uri="{FF2B5EF4-FFF2-40B4-BE49-F238E27FC236}">
-                <a16:creationId xmlns="" xmlns:a16="http://schemas.microsoft.com/office/drawing/2014/main" id="{FF3C424F-D02F-49A3-880C-29DDB431E18F}"/>
+                <a16:creationId xmlns:a16="http://schemas.microsoft.com/office/drawing/2014/main" xmlns="" id="{FF3C424F-D02F-49A3-880C-29DDB431E18F}"/>
               </a:ext>
             </a:extLst>
           </p:cNvPr>
@@ -7267,7 +7236,7 @@
           <p:cNvPr id="4" name="TextBox 3">
             <a:extLst>
               <a:ext uri="{FF2B5EF4-FFF2-40B4-BE49-F238E27FC236}">
-                <a16:creationId xmlns="" xmlns:a16="http://schemas.microsoft.com/office/drawing/2014/main" id="{F807927E-5750-46FC-8103-4066AC5803B4}"/>
+                <a16:creationId xmlns:a16="http://schemas.microsoft.com/office/drawing/2014/main" xmlns="" id="{F807927E-5750-46FC-8103-4066AC5803B4}"/>
               </a:ext>
             </a:extLst>
           </p:cNvPr>
@@ -7600,7 +7569,7 @@
           <p:cNvPr id="2" name="Номер слайда 1">
             <a:extLst>
               <a:ext uri="{FF2B5EF4-FFF2-40B4-BE49-F238E27FC236}">
-                <a16:creationId xmlns="" xmlns:a16="http://schemas.microsoft.com/office/drawing/2014/main" id="{231FECC7-9EA9-4FA5-867B-828BE509E5E0}"/>
+                <a16:creationId xmlns:a16="http://schemas.microsoft.com/office/drawing/2014/main" xmlns="" id="{231FECC7-9EA9-4FA5-867B-828BE509E5E0}"/>
               </a:ext>
             </a:extLst>
           </p:cNvPr>
@@ -7640,7 +7609,7 @@
           <p:cNvPr id="3" name="Прямоугольник 2">
             <a:extLst>
               <a:ext uri="{FF2B5EF4-FFF2-40B4-BE49-F238E27FC236}">
-                <a16:creationId xmlns="" xmlns:a16="http://schemas.microsoft.com/office/drawing/2014/main" id="{4E2E4152-190C-46A3-ABB6-0E55001CF847}"/>
+                <a16:creationId xmlns:a16="http://schemas.microsoft.com/office/drawing/2014/main" xmlns="" id="{4E2E4152-190C-46A3-ABB6-0E55001CF847}"/>
               </a:ext>
             </a:extLst>
           </p:cNvPr>
@@ -7681,7 +7650,7 @@
           <p:cNvPr id="4" name="Прямоугольник 3">
             <a:extLst>
               <a:ext uri="{FF2B5EF4-FFF2-40B4-BE49-F238E27FC236}">
-                <a16:creationId xmlns="" xmlns:a16="http://schemas.microsoft.com/office/drawing/2014/main" id="{7886BB8F-D2C2-43E1-9705-89FAC97E980B}"/>
+                <a16:creationId xmlns:a16="http://schemas.microsoft.com/office/drawing/2014/main" xmlns="" id="{7886BB8F-D2C2-43E1-9705-89FAC97E980B}"/>
               </a:ext>
             </a:extLst>
           </p:cNvPr>
@@ -7906,7 +7875,7 @@
           <p:cNvPr id="2" name="Номер слайда 1">
             <a:extLst>
               <a:ext uri="{FF2B5EF4-FFF2-40B4-BE49-F238E27FC236}">
-                <a16:creationId xmlns="" xmlns:a16="http://schemas.microsoft.com/office/drawing/2014/main" id="{C044D945-E4CF-4E6C-B0CF-90EA9882AF3D}"/>
+                <a16:creationId xmlns:a16="http://schemas.microsoft.com/office/drawing/2014/main" xmlns="" id="{C044D945-E4CF-4E6C-B0CF-90EA9882AF3D}"/>
               </a:ext>
             </a:extLst>
           </p:cNvPr>
@@ -7946,7 +7915,7 @@
           <p:cNvPr id="3" name="TextBox 2">
             <a:extLst>
               <a:ext uri="{FF2B5EF4-FFF2-40B4-BE49-F238E27FC236}">
-                <a16:creationId xmlns="" xmlns:a16="http://schemas.microsoft.com/office/drawing/2014/main" id="{A6FEAA34-0D0D-451C-99CF-75A0B69D07A2}"/>
+                <a16:creationId xmlns:a16="http://schemas.microsoft.com/office/drawing/2014/main" xmlns="" id="{A6FEAA34-0D0D-451C-99CF-75A0B69D07A2}"/>
               </a:ext>
             </a:extLst>
           </p:cNvPr>
@@ -7984,7 +7953,7 @@
           <p:cNvPr id="4" name="TextBox 3">
             <a:extLst>
               <a:ext uri="{FF2B5EF4-FFF2-40B4-BE49-F238E27FC236}">
-                <a16:creationId xmlns="" xmlns:a16="http://schemas.microsoft.com/office/drawing/2014/main" id="{96F0B344-73BB-4291-92EE-7CF2477B2FBC}"/>
+                <a16:creationId xmlns:a16="http://schemas.microsoft.com/office/drawing/2014/main" xmlns="" id="{96F0B344-73BB-4291-92EE-7CF2477B2FBC}"/>
               </a:ext>
             </a:extLst>
           </p:cNvPr>
@@ -8034,7 +8003,7 @@
           <p:cNvPr id="5" name="TextBox 4">
             <a:extLst>
               <a:ext uri="{FF2B5EF4-FFF2-40B4-BE49-F238E27FC236}">
-                <a16:creationId xmlns="" xmlns:a16="http://schemas.microsoft.com/office/drawing/2014/main" id="{F6936691-7316-4CA8-AD28-E100BE8B9D56}"/>
+                <a16:creationId xmlns:a16="http://schemas.microsoft.com/office/drawing/2014/main" xmlns="" id="{F6936691-7316-4CA8-AD28-E100BE8B9D56}"/>
               </a:ext>
             </a:extLst>
           </p:cNvPr>
@@ -8254,7 +8223,7 @@
           <p:cNvPr id="2" name="Номер слайда 1">
             <a:extLst>
               <a:ext uri="{FF2B5EF4-FFF2-40B4-BE49-F238E27FC236}">
-                <a16:creationId xmlns="" xmlns:a16="http://schemas.microsoft.com/office/drawing/2014/main" id="{05C26CDF-9DC4-4472-9008-1D318E6740D1}"/>
+                <a16:creationId xmlns:a16="http://schemas.microsoft.com/office/drawing/2014/main" xmlns="" id="{05C26CDF-9DC4-4472-9008-1D318E6740D1}"/>
               </a:ext>
             </a:extLst>
           </p:cNvPr>
@@ -8294,7 +8263,7 @@
           <p:cNvPr id="3" name="TextBox 2">
             <a:extLst>
               <a:ext uri="{FF2B5EF4-FFF2-40B4-BE49-F238E27FC236}">
-                <a16:creationId xmlns="" xmlns:a16="http://schemas.microsoft.com/office/drawing/2014/main" id="{9E60CBAA-39F2-434C-93DD-7C5C94EC62DA}"/>
+                <a16:creationId xmlns:a16="http://schemas.microsoft.com/office/drawing/2014/main" xmlns="" id="{9E60CBAA-39F2-434C-93DD-7C5C94EC62DA}"/>
               </a:ext>
             </a:extLst>
           </p:cNvPr>
@@ -8332,7 +8301,7 @@
           <p:cNvPr id="4" name="Прямоугольник 3">
             <a:extLst>
               <a:ext uri="{FF2B5EF4-FFF2-40B4-BE49-F238E27FC236}">
-                <a16:creationId xmlns="" xmlns:a16="http://schemas.microsoft.com/office/drawing/2014/main" id="{A483A019-2816-4B8B-A2A2-51E748452221}"/>
+                <a16:creationId xmlns:a16="http://schemas.microsoft.com/office/drawing/2014/main" xmlns="" id="{A483A019-2816-4B8B-A2A2-51E748452221}"/>
               </a:ext>
             </a:extLst>
           </p:cNvPr>
@@ -8373,7 +8342,7 @@
           <p:cNvPr id="5" name="Прямоугольник 4">
             <a:extLst>
               <a:ext uri="{FF2B5EF4-FFF2-40B4-BE49-F238E27FC236}">
-                <a16:creationId xmlns="" xmlns:a16="http://schemas.microsoft.com/office/drawing/2014/main" id="{22BD40BA-3B51-4998-886C-91261B8F7F99}"/>
+                <a16:creationId xmlns:a16="http://schemas.microsoft.com/office/drawing/2014/main" xmlns="" id="{22BD40BA-3B51-4998-886C-91261B8F7F99}"/>
               </a:ext>
             </a:extLst>
           </p:cNvPr>
@@ -8383,7 +8352,7 @@
         <p:spPr>
           <a:xfrm>
             <a:off x="214361" y="1256258"/>
-            <a:ext cx="3119389" cy="5262979"/>
+            <a:ext cx="3119389" cy="3785652"/>
           </a:xfrm>
           <a:prstGeom prst="rect">
             <a:avLst/>
@@ -8432,6 +8401,46 @@
               <a:t>Калькулятор </a:t>
             </a:r>
             <a:r>
+              <a:rPr lang="ru-RU" sz="1600" dirty="0" smtClean="0">
+                <a:solidFill>
+                  <a:srgbClr val="000000"/>
+                </a:solidFill>
+                <a:latin typeface="Times New Roman" panose="02020603050405020304" pitchFamily="18" charset="0"/>
+                <a:ea typeface="Times New Roman" panose="02020603050405020304" pitchFamily="18" charset="0"/>
+                <a:cs typeface="Times New Roman" panose="02020603050405020304" pitchFamily="18" charset="0"/>
+              </a:rPr>
+              <a:t>имеет </a:t>
+            </a:r>
+            <a:r>
+              <a:rPr lang="ru-RU" sz="1600" dirty="0" smtClean="0">
+                <a:solidFill>
+                  <a:srgbClr val="000000"/>
+                </a:solidFill>
+                <a:latin typeface="Times New Roman" panose="02020603050405020304" pitchFamily="18" charset="0"/>
+                <a:ea typeface="Times New Roman" panose="02020603050405020304" pitchFamily="18" charset="0"/>
+                <a:cs typeface="Times New Roman" panose="02020603050405020304" pitchFamily="18" charset="0"/>
+              </a:rPr>
+              <a:t>простой интерфейс и заполняется в 3 шага.</a:t>
+            </a:r>
+          </a:p>
+          <a:p>
+            <a:pPr indent="342900" algn="just">
+              <a:lnSpc>
+                <a:spcPct val="150000"/>
+              </a:lnSpc>
+            </a:pPr>
+            <a:r>
+              <a:rPr lang="ru-RU" sz="1600" dirty="0" smtClean="0">
+                <a:solidFill>
+                  <a:srgbClr val="000000"/>
+                </a:solidFill>
+                <a:latin typeface="Times New Roman" panose="02020603050405020304" pitchFamily="18" charset="0"/>
+                <a:ea typeface="Times New Roman" panose="02020603050405020304" pitchFamily="18" charset="0"/>
+                <a:cs typeface="Times New Roman" panose="02020603050405020304" pitchFamily="18" charset="0"/>
+              </a:rPr>
+              <a:t>Слабые </a:t>
+            </a:r>
+            <a:r>
               <a:rPr lang="ru-RU" sz="1600" dirty="0">
                 <a:solidFill>
                   <a:srgbClr val="000000"/>
@@ -8440,8 +8449,17 @@
                 <a:ea typeface="Times New Roman" panose="02020603050405020304" pitchFamily="18" charset="0"/>
                 <a:cs typeface="Times New Roman" panose="02020603050405020304" pitchFamily="18" charset="0"/>
               </a:rPr>
-              <a:t>ОСАГО вынесен на главную </a:t>
-            </a:r>
+              <a:t>стороны:</a:t>
+            </a:r>
+          </a:p>
+          <a:p>
+            <a:pPr marL="285750" indent="-285750" algn="just">
+              <a:lnSpc>
+                <a:spcPct val="150000"/>
+              </a:lnSpc>
+              <a:buFont typeface="Arial" pitchFamily="34" charset="0"/>
+              <a:buChar char="•"/>
+            </a:pPr>
             <a:r>
               <a:rPr lang="ru-RU" sz="1600" dirty="0" smtClean="0">
                 <a:solidFill>
@@ -8451,10 +8469,10 @@
                 <a:ea typeface="Times New Roman" panose="02020603050405020304" pitchFamily="18" charset="0"/>
                 <a:cs typeface="Times New Roman" panose="02020603050405020304" pitchFamily="18" charset="0"/>
               </a:rPr>
-              <a:t>страницу</a:t>
-            </a:r>
-            <a:r>
-              <a:rPr lang="ru-RU" sz="1600" dirty="0">
+              <a:t>Не</a:t>
+            </a:r>
+            <a:r>
+              <a:rPr lang="ru-RU" sz="1600" dirty="0" smtClean="0">
                 <a:solidFill>
                   <a:srgbClr val="000000"/>
                 </a:solidFill>
@@ -8462,31 +8480,9 @@
                 <a:ea typeface="Times New Roman" panose="02020603050405020304" pitchFamily="18" charset="0"/>
                 <a:cs typeface="Times New Roman" panose="02020603050405020304" pitchFamily="18" charset="0"/>
               </a:rPr>
-              <a:t>,</a:t>
-            </a:r>
-            <a:r>
-              <a:rPr lang="ru-RU" sz="1600" dirty="0" smtClean="0">
-                <a:solidFill>
-                  <a:srgbClr val="000000"/>
-                </a:solidFill>
-                <a:latin typeface="Times New Roman" panose="02020603050405020304" pitchFamily="18" charset="0"/>
-                <a:ea typeface="Times New Roman" panose="02020603050405020304" pitchFamily="18" charset="0"/>
-                <a:cs typeface="Times New Roman" panose="02020603050405020304" pitchFamily="18" charset="0"/>
-              </a:rPr>
-              <a:t> </a:t>
-            </a:r>
-            <a:r>
-              <a:rPr lang="ru-RU" sz="1600" dirty="0" smtClean="0">
-                <a:solidFill>
-                  <a:srgbClr val="000000"/>
-                </a:solidFill>
-                <a:latin typeface="Times New Roman" panose="02020603050405020304" pitchFamily="18" charset="0"/>
-                <a:ea typeface="Times New Roman" panose="02020603050405020304" pitchFamily="18" charset="0"/>
-                <a:cs typeface="Times New Roman" panose="02020603050405020304" pitchFamily="18" charset="0"/>
-              </a:rPr>
-              <a:t>имеет простой интерфейс и заполняется в 3 шага.</a:t>
-            </a:r>
-            <a:endParaRPr lang="ru-RU" sz="1600" dirty="0" smtClean="0">
+              <a:t>полноценный онлайн-расчёт.</a:t>
+            </a:r>
+            <a:endParaRPr lang="ru-RU" sz="1600" dirty="0">
               <a:solidFill>
                 <a:srgbClr val="000000"/>
               </a:solidFill>
@@ -8494,66 +8490,6 @@
               <a:ea typeface="Times New Roman" panose="02020603050405020304" pitchFamily="18" charset="0"/>
               <a:cs typeface="Times New Roman" panose="02020603050405020304" pitchFamily="18" charset="0"/>
             </a:endParaRPr>
-          </a:p>
-          <a:p>
-            <a:pPr indent="342900" algn="just">
-              <a:lnSpc>
-                <a:spcPct val="150000"/>
-              </a:lnSpc>
-            </a:pPr>
-            <a:r>
-              <a:rPr lang="ru-RU" sz="1600" dirty="0" smtClean="0">
-                <a:solidFill>
-                  <a:srgbClr val="000000"/>
-                </a:solidFill>
-                <a:latin typeface="Times New Roman" panose="02020603050405020304" pitchFamily="18" charset="0"/>
-                <a:ea typeface="Times New Roman" panose="02020603050405020304" pitchFamily="18" charset="0"/>
-                <a:cs typeface="Times New Roman" panose="02020603050405020304" pitchFamily="18" charset="0"/>
-              </a:rPr>
-              <a:t>Слабые </a:t>
-            </a:r>
-            <a:r>
-              <a:rPr lang="ru-RU" sz="1600" dirty="0">
-                <a:solidFill>
-                  <a:srgbClr val="000000"/>
-                </a:solidFill>
-                <a:latin typeface="Times New Roman" panose="02020603050405020304" pitchFamily="18" charset="0"/>
-                <a:ea typeface="Times New Roman" panose="02020603050405020304" pitchFamily="18" charset="0"/>
-                <a:cs typeface="Times New Roman" panose="02020603050405020304" pitchFamily="18" charset="0"/>
-              </a:rPr>
-              <a:t>стороны:</a:t>
-            </a:r>
-          </a:p>
-          <a:p>
-            <a:pPr marL="285750" indent="-285750" algn="just">
-              <a:lnSpc>
-                <a:spcPct val="150000"/>
-              </a:lnSpc>
-              <a:buFont typeface="Arial" pitchFamily="34" charset="0"/>
-              <a:buChar char="•"/>
-            </a:pPr>
-            <a:r>
-              <a:rPr lang="ru-RU" sz="1600" dirty="0" smtClean="0">
-                <a:solidFill>
-                  <a:srgbClr val="000000"/>
-                </a:solidFill>
-                <a:latin typeface="Times New Roman" panose="02020603050405020304" pitchFamily="18" charset="0"/>
-                <a:ea typeface="Times New Roman" panose="02020603050405020304" pitchFamily="18" charset="0"/>
-                <a:cs typeface="Times New Roman" panose="02020603050405020304" pitchFamily="18" charset="0"/>
-              </a:rPr>
-              <a:t>Калькулятор сводится </a:t>
-            </a:r>
-            <a:r>
-              <a:rPr lang="ru-RU" sz="1600" dirty="0">
-                <a:solidFill>
-                  <a:srgbClr val="000000"/>
-                </a:solidFill>
-                <a:latin typeface="Times New Roman" panose="02020603050405020304" pitchFamily="18" charset="0"/>
-                <a:ea typeface="Times New Roman" panose="02020603050405020304" pitchFamily="18" charset="0"/>
-                <a:cs typeface="Times New Roman" panose="02020603050405020304" pitchFamily="18" charset="0"/>
-              </a:rPr>
-              <a:t>к форме обратной связи с менеджером, а не к полноценному онлайн-расчёту.</a:t>
-            </a:r>
           </a:p>
           <a:p>
             <a:pPr marL="285750" indent="-285750" algn="just">
@@ -8713,7 +8649,7 @@
           <p:cNvPr id="2" name="Номер слайда 1">
             <a:extLst>
               <a:ext uri="{FF2B5EF4-FFF2-40B4-BE49-F238E27FC236}">
-                <a16:creationId xmlns="" xmlns:a16="http://schemas.microsoft.com/office/drawing/2014/main" id="{63CEBED6-73E3-40C5-A087-F9E9B32A8B79}"/>
+                <a16:creationId xmlns:a16="http://schemas.microsoft.com/office/drawing/2014/main" xmlns="" id="{63CEBED6-73E3-40C5-A087-F9E9B32A8B79}"/>
               </a:ext>
             </a:extLst>
           </p:cNvPr>
@@ -8753,7 +8689,7 @@
           <p:cNvPr id="3" name="Прямоугольник 2">
             <a:extLst>
               <a:ext uri="{FF2B5EF4-FFF2-40B4-BE49-F238E27FC236}">
-                <a16:creationId xmlns="" xmlns:a16="http://schemas.microsoft.com/office/drawing/2014/main" id="{2A980ABB-ECEF-4C08-A341-DF985B03486B}"/>
+                <a16:creationId xmlns:a16="http://schemas.microsoft.com/office/drawing/2014/main" xmlns="" id="{2A980ABB-ECEF-4C08-A341-DF985B03486B}"/>
               </a:ext>
             </a:extLst>
           </p:cNvPr>
@@ -8794,7 +8730,7 @@
           <p:cNvPr id="4" name="Прямоугольник 3">
             <a:extLst>
               <a:ext uri="{FF2B5EF4-FFF2-40B4-BE49-F238E27FC236}">
-                <a16:creationId xmlns="" xmlns:a16="http://schemas.microsoft.com/office/drawing/2014/main" id="{C427C168-69BF-4E89-B79C-E893EFDC3B08}"/>
+                <a16:creationId xmlns:a16="http://schemas.microsoft.com/office/drawing/2014/main" xmlns="" id="{C427C168-69BF-4E89-B79C-E893EFDC3B08}"/>
               </a:ext>
             </a:extLst>
           </p:cNvPr>
@@ -8804,7 +8740,7 @@
         <p:spPr>
           <a:xfrm>
             <a:off x="174775" y="978039"/>
-            <a:ext cx="2758926" cy="4731552"/>
+            <a:ext cx="2758926" cy="3402022"/>
           </a:xfrm>
           <a:prstGeom prst="rect">
             <a:avLst/>
@@ -8859,7 +8795,7 @@
               <a:t>Детальный </a:t>
             </a:r>
             <a:r>
-              <a:rPr lang="ru-RU" sz="1600" dirty="0">
+              <a:rPr lang="ru-RU" sz="1600" dirty="0" smtClean="0">
                 <a:solidFill>
                   <a:srgbClr val="000000"/>
                 </a:solidFill>
@@ -8867,7 +8803,7 @@
                 <a:ea typeface="Times New Roman" panose="02020603050405020304" pitchFamily="18" charset="0"/>
                 <a:cs typeface="Times New Roman" panose="02020603050405020304" pitchFamily="18" charset="0"/>
               </a:rPr>
-              <a:t>онлайн-калькулятор КАСКО с возможностью выбора параметров.</a:t>
+              <a:t>онлайн-калькулятор</a:t>
             </a:r>
           </a:p>
           <a:p>
@@ -8890,10 +8826,10 @@
                 <a:ea typeface="Times New Roman" panose="02020603050405020304" pitchFamily="18" charset="0"/>
                 <a:cs typeface="Times New Roman" panose="02020603050405020304" pitchFamily="18" charset="0"/>
               </a:rPr>
-              <a:t>Поддержка </a:t>
-            </a:r>
-            <a:r>
-              <a:rPr lang="ru-RU" sz="1600" dirty="0" err="1">
+              <a:t>Поддержка современных </a:t>
+            </a:r>
+            <a:r>
+              <a:rPr lang="ru-RU" sz="1600" dirty="0">
                 <a:solidFill>
                   <a:srgbClr val="000000"/>
                 </a:solidFill>
@@ -8901,10 +8837,10 @@
                 <a:ea typeface="Times New Roman" panose="02020603050405020304" pitchFamily="18" charset="0"/>
                 <a:cs typeface="Times New Roman" panose="02020603050405020304" pitchFamily="18" charset="0"/>
               </a:rPr>
-              <a:t>Apple</a:t>
-            </a:r>
-            <a:r>
-              <a:rPr lang="ru-RU" sz="1600" dirty="0">
+              <a:t>способов оплаты</a:t>
+            </a:r>
+            <a:r>
+              <a:rPr lang="ru-RU" sz="1600" dirty="0" smtClean="0">
                 <a:solidFill>
                   <a:srgbClr val="000000"/>
                 </a:solidFill>
@@ -8912,40 +8848,7 @@
                 <a:ea typeface="Times New Roman" panose="02020603050405020304" pitchFamily="18" charset="0"/>
                 <a:cs typeface="Times New Roman" panose="02020603050405020304" pitchFamily="18" charset="0"/>
               </a:rPr>
-              <a:t> </a:t>
-            </a:r>
-            <a:r>
-              <a:rPr lang="ru-RU" sz="1600" dirty="0" err="1">
-                <a:solidFill>
-                  <a:srgbClr val="000000"/>
-                </a:solidFill>
-                <a:latin typeface="Times New Roman" panose="02020603050405020304" pitchFamily="18" charset="0"/>
-                <a:ea typeface="Times New Roman" panose="02020603050405020304" pitchFamily="18" charset="0"/>
-                <a:cs typeface="Times New Roman" panose="02020603050405020304" pitchFamily="18" charset="0"/>
-              </a:rPr>
-              <a:t>Pay</a:t>
-            </a:r>
-            <a:r>
-              <a:rPr lang="ru-RU" sz="1600" dirty="0">
-                <a:solidFill>
-                  <a:srgbClr val="000000"/>
-                </a:solidFill>
-                <a:latin typeface="Times New Roman" panose="02020603050405020304" pitchFamily="18" charset="0"/>
-                <a:ea typeface="Times New Roman" panose="02020603050405020304" pitchFamily="18" charset="0"/>
-                <a:cs typeface="Times New Roman" panose="02020603050405020304" pitchFamily="18" charset="0"/>
-              </a:rPr>
-              <a:t> и других современных способов оплаты</a:t>
-            </a:r>
-            <a:r>
-              <a:rPr lang="ru-RU" sz="1600" dirty="0" smtClean="0">
-                <a:solidFill>
-                  <a:srgbClr val="000000"/>
-                </a:solidFill>
-                <a:latin typeface="Times New Roman" panose="02020603050405020304" pitchFamily="18" charset="0"/>
-                <a:ea typeface="Times New Roman" panose="02020603050405020304" pitchFamily="18" charset="0"/>
-                <a:cs typeface="Times New Roman" panose="02020603050405020304" pitchFamily="18" charset="0"/>
-              </a:rPr>
-              <a:t>..</a:t>
+              <a:t>.</a:t>
             </a:r>
             <a:endParaRPr lang="ru-RU" sz="1600" dirty="0">
               <a:solidFill>
@@ -8997,18 +8900,7 @@
                 <a:ea typeface="Times New Roman" panose="02020603050405020304" pitchFamily="18" charset="0"/>
                 <a:cs typeface="Times New Roman" panose="02020603050405020304" pitchFamily="18" charset="0"/>
               </a:rPr>
-              <a:t>Интерфейс </a:t>
-            </a:r>
-            <a:r>
-              <a:rPr lang="ru-RU" sz="1600" dirty="0" smtClean="0">
-                <a:solidFill>
-                  <a:srgbClr val="000000"/>
-                </a:solidFill>
-                <a:latin typeface="Times New Roman" panose="02020603050405020304" pitchFamily="18" charset="0"/>
-                <a:ea typeface="Times New Roman" panose="02020603050405020304" pitchFamily="18" charset="0"/>
-                <a:cs typeface="Times New Roman" panose="02020603050405020304" pitchFamily="18" charset="0"/>
-              </a:rPr>
-              <a:t>перегружен </a:t>
+              <a:t>Интерфейс перегружен </a:t>
             </a:r>
             <a:r>
               <a:rPr lang="ru-RU" sz="1600" dirty="0">
@@ -9053,8 +8945,27 @@
                 <a:ea typeface="Times New Roman" panose="02020603050405020304" pitchFamily="18" charset="0"/>
                 <a:cs typeface="Times New Roman" panose="02020603050405020304" pitchFamily="18" charset="0"/>
               </a:rPr>
-              <a:t>кабинет имеет ограниченный функционал по сравнению с конкурентами.</a:t>
-            </a:r>
+              <a:t>кабинет имеет ограниченный </a:t>
+            </a:r>
+            <a:r>
+              <a:rPr lang="ru-RU" sz="1600" dirty="0" smtClean="0">
+                <a:solidFill>
+                  <a:srgbClr val="000000"/>
+                </a:solidFill>
+                <a:latin typeface="Times New Roman" panose="02020603050405020304" pitchFamily="18" charset="0"/>
+                <a:ea typeface="Times New Roman" panose="02020603050405020304" pitchFamily="18" charset="0"/>
+                <a:cs typeface="Times New Roman" panose="02020603050405020304" pitchFamily="18" charset="0"/>
+              </a:rPr>
+              <a:t>функционал</a:t>
+            </a:r>
+            <a:endParaRPr lang="ru-RU" sz="1600" dirty="0">
+              <a:solidFill>
+                <a:srgbClr val="000000"/>
+              </a:solidFill>
+              <a:latin typeface="Times New Roman" panose="02020603050405020304" pitchFamily="18" charset="0"/>
+              <a:ea typeface="Times New Roman" panose="02020603050405020304" pitchFamily="18" charset="0"/>
+              <a:cs typeface="Times New Roman" panose="02020603050405020304" pitchFamily="18" charset="0"/>
+            </a:endParaRPr>
           </a:p>
         </p:txBody>
       </p:sp>
@@ -9164,7 +9075,7 @@
           <p:cNvPr id="2" name="Номер слайда 1">
             <a:extLst>
               <a:ext uri="{FF2B5EF4-FFF2-40B4-BE49-F238E27FC236}">
-                <a16:creationId xmlns="" xmlns:a16="http://schemas.microsoft.com/office/drawing/2014/main" id="{46930FCD-49CE-443B-97F5-6039E4520D00}"/>
+                <a16:creationId xmlns:a16="http://schemas.microsoft.com/office/drawing/2014/main" xmlns="" id="{46930FCD-49CE-443B-97F5-6039E4520D00}"/>
               </a:ext>
             </a:extLst>
           </p:cNvPr>
@@ -9204,7 +9115,7 @@
           <p:cNvPr id="4" name="Прямоугольник 3">
             <a:extLst>
               <a:ext uri="{FF2B5EF4-FFF2-40B4-BE49-F238E27FC236}">
-                <a16:creationId xmlns="" xmlns:a16="http://schemas.microsoft.com/office/drawing/2014/main" id="{27480CD9-7B24-402C-9C1B-D0834A459CC5}"/>
+                <a16:creationId xmlns:a16="http://schemas.microsoft.com/office/drawing/2014/main" xmlns="" id="{27480CD9-7B24-402C-9C1B-D0834A459CC5}"/>
               </a:ext>
             </a:extLst>
           </p:cNvPr>
@@ -9214,7 +9125,7 @@
         <p:spPr>
           <a:xfrm>
             <a:off x="156853" y="647702"/>
-            <a:ext cx="2691122" cy="6017032"/>
+            <a:ext cx="2348222" cy="5201424"/>
           </a:xfrm>
           <a:prstGeom prst="rect">
             <a:avLst/>
@@ -9281,6 +9192,38 @@
             </a:r>
           </a:p>
           <a:p>
+            <a:pPr indent="337661" algn="just">
+              <a:lnSpc>
+                <a:spcPct val="150000"/>
+              </a:lnSpc>
+              <a:spcAft>
+                <a:spcPts val="600"/>
+              </a:spcAft>
+            </a:pPr>
+            <a:r>
+              <a:rPr lang="ru-RU" sz="1600" dirty="0" smtClean="0">
+                <a:solidFill>
+                  <a:srgbClr val="000000"/>
+                </a:solidFill>
+                <a:latin typeface="Times New Roman" panose="02020603050405020304" pitchFamily="18" charset="0"/>
+                <a:ea typeface="Times New Roman" panose="02020603050405020304" pitchFamily="18" charset="0"/>
+                <a:cs typeface="Times New Roman" panose="02020603050405020304" pitchFamily="18" charset="0"/>
+              </a:rPr>
+              <a:t>Слабые </a:t>
+            </a:r>
+            <a:r>
+              <a:rPr lang="ru-RU" sz="1600" dirty="0" smtClean="0">
+                <a:solidFill>
+                  <a:srgbClr val="000000"/>
+                </a:solidFill>
+                <a:latin typeface="Times New Roman" panose="02020603050405020304" pitchFamily="18" charset="0"/>
+                <a:ea typeface="Times New Roman" panose="02020603050405020304" pitchFamily="18" charset="0"/>
+                <a:cs typeface="Times New Roman" panose="02020603050405020304" pitchFamily="18" charset="0"/>
+              </a:rPr>
+              <a:t>стороны:</a:t>
+            </a:r>
+          </a:p>
+          <a:p>
             <a:pPr marL="285750" indent="-285750" algn="just">
               <a:lnSpc>
                 <a:spcPct val="150000"/>
@@ -9300,7 +9243,7 @@
                 <a:ea typeface="Times New Roman" panose="02020603050405020304" pitchFamily="18" charset="0"/>
                 <a:cs typeface="Times New Roman" panose="02020603050405020304" pitchFamily="18" charset="0"/>
               </a:rPr>
-              <a:t>Электронный </a:t>
+              <a:t>Калькулятор без </a:t>
             </a:r>
             <a:r>
               <a:rPr lang="ru-RU" sz="1600" dirty="0">
@@ -9311,7 +9254,7 @@
                 <a:ea typeface="Times New Roman" panose="02020603050405020304" pitchFamily="18" charset="0"/>
                 <a:cs typeface="Times New Roman" panose="02020603050405020304" pitchFamily="18" charset="0"/>
               </a:rPr>
-              <a:t>полис </a:t>
+              <a:t>полноценного </a:t>
             </a:r>
             <a:r>
               <a:rPr lang="ru-RU" sz="1600" dirty="0" smtClean="0">
@@ -9322,63 +9265,16 @@
                 <a:ea typeface="Times New Roman" panose="02020603050405020304" pitchFamily="18" charset="0"/>
                 <a:cs typeface="Times New Roman" panose="02020603050405020304" pitchFamily="18" charset="0"/>
               </a:rPr>
-              <a:t>с онлайн-оплатой	</a:t>
-            </a:r>
-          </a:p>
-          <a:p>
-            <a:pPr indent="337661" algn="just">
-              <a:lnSpc>
-                <a:spcPct val="150000"/>
-              </a:lnSpc>
-              <a:spcAft>
-                <a:spcPts val="600"/>
-              </a:spcAft>
-            </a:pPr>
-            <a:r>
-              <a:rPr lang="ru-RU" sz="1600" dirty="0" smtClean="0">
-                <a:solidFill>
-                  <a:srgbClr val="000000"/>
-                </a:solidFill>
-                <a:latin typeface="Times New Roman" panose="02020603050405020304" pitchFamily="18" charset="0"/>
-                <a:ea typeface="Times New Roman" panose="02020603050405020304" pitchFamily="18" charset="0"/>
-                <a:cs typeface="Times New Roman" panose="02020603050405020304" pitchFamily="18" charset="0"/>
-              </a:rPr>
-              <a:t>Слабые стороны:</a:t>
-            </a:r>
-          </a:p>
-          <a:p>
-            <a:pPr marL="285750" indent="-285750" algn="just">
-              <a:lnSpc>
-                <a:spcPct val="150000"/>
-              </a:lnSpc>
-              <a:spcAft>
-                <a:spcPts val="600"/>
-              </a:spcAft>
-              <a:buFont typeface="Arial" pitchFamily="34" charset="0"/>
-              <a:buChar char="•"/>
-            </a:pPr>
-            <a:r>
-              <a:rPr lang="ru-RU" sz="1600" dirty="0" smtClean="0">
-                <a:solidFill>
-                  <a:srgbClr val="000000"/>
-                </a:solidFill>
-                <a:latin typeface="Times New Roman" panose="02020603050405020304" pitchFamily="18" charset="0"/>
-                <a:ea typeface="Times New Roman" panose="02020603050405020304" pitchFamily="18" charset="0"/>
-                <a:cs typeface="Times New Roman" panose="02020603050405020304" pitchFamily="18" charset="0"/>
-              </a:rPr>
-              <a:t>Калькулятор </a:t>
-            </a:r>
-            <a:r>
-              <a:rPr lang="ru-RU" sz="1600" dirty="0">
-                <a:solidFill>
-                  <a:srgbClr val="000000"/>
-                </a:solidFill>
-                <a:latin typeface="Times New Roman" panose="02020603050405020304" pitchFamily="18" charset="0"/>
-                <a:ea typeface="Times New Roman" panose="02020603050405020304" pitchFamily="18" charset="0"/>
-                <a:cs typeface="Times New Roman" panose="02020603050405020304" pitchFamily="18" charset="0"/>
-              </a:rPr>
-              <a:t>КАСКО только через менеджера, полноценного онлайн-расчёта нет.</a:t>
-            </a:r>
+              <a:t>онлайн-расчёта.</a:t>
+            </a:r>
+            <a:endParaRPr lang="ru-RU" sz="1600" dirty="0">
+              <a:solidFill>
+                <a:srgbClr val="000000"/>
+              </a:solidFill>
+              <a:latin typeface="Times New Roman" panose="02020603050405020304" pitchFamily="18" charset="0"/>
+              <a:ea typeface="Times New Roman" panose="02020603050405020304" pitchFamily="18" charset="0"/>
+              <a:cs typeface="Times New Roman" panose="02020603050405020304" pitchFamily="18" charset="0"/>
+            </a:endParaRPr>
           </a:p>
           <a:p>
             <a:pPr marL="285750" indent="-285750" algn="just">
@@ -9500,8 +9396,8 @@
         </p:blipFill>
         <p:spPr bwMode="auto">
           <a:xfrm>
-            <a:off x="3019425" y="733426"/>
-            <a:ext cx="6032838" cy="3816350"/>
+            <a:off x="2713268" y="733426"/>
+            <a:ext cx="6338995" cy="4010024"/>
           </a:xfrm>
           <a:prstGeom prst="rect">
             <a:avLst/>
@@ -9583,7 +9479,7 @@
           <p:cNvPr id="2" name="Номер слайда 1">
             <a:extLst>
               <a:ext uri="{FF2B5EF4-FFF2-40B4-BE49-F238E27FC236}">
-                <a16:creationId xmlns="" xmlns:a16="http://schemas.microsoft.com/office/drawing/2014/main" id="{46930FCD-49CE-443B-97F5-6039E4520D00}"/>
+                <a16:creationId xmlns:a16="http://schemas.microsoft.com/office/drawing/2014/main" xmlns="" id="{46930FCD-49CE-443B-97F5-6039E4520D00}"/>
               </a:ext>
             </a:extLst>
           </p:cNvPr>
@@ -9732,7 +9628,7 @@
           <p:cNvPr id="2" name="Номер слайда 1">
             <a:extLst>
               <a:ext uri="{FF2B5EF4-FFF2-40B4-BE49-F238E27FC236}">
-                <a16:creationId xmlns="" xmlns:a16="http://schemas.microsoft.com/office/drawing/2014/main" id="{46930FCD-49CE-443B-97F5-6039E4520D00}"/>
+                <a16:creationId xmlns:a16="http://schemas.microsoft.com/office/drawing/2014/main" xmlns="" id="{46930FCD-49CE-443B-97F5-6039E4520D00}"/>
               </a:ext>
             </a:extLst>
           </p:cNvPr>
@@ -9888,7 +9784,7 @@
           <p:cNvPr id="2" name="Номер слайда 1">
             <a:extLst>
               <a:ext uri="{FF2B5EF4-FFF2-40B4-BE49-F238E27FC236}">
-                <a16:creationId xmlns="" xmlns:a16="http://schemas.microsoft.com/office/drawing/2014/main" id="{46930FCD-49CE-443B-97F5-6039E4520D00}"/>
+                <a16:creationId xmlns:a16="http://schemas.microsoft.com/office/drawing/2014/main" xmlns="" id="{46930FCD-49CE-443B-97F5-6039E4520D00}"/>
               </a:ext>
             </a:extLst>
           </p:cNvPr>
@@ -10292,7 +10188,7 @@
   <a:extraClrSchemeLst/>
   <a:extLst>
     <a:ext uri="{05A4C25C-085E-4340-85A3-A5531E510DB2}">
-      <thm15:themeFamily xmlns="" xmlns:thm15="http://schemas.microsoft.com/office/thememl/2012/main" name="Office Theme" id="{62F939B6-93AF-4DB8-9C6B-D6C7DFDC589F}" vid="{4A3C46E8-61CC-4603-A589-7422A47A8E4A}"/>
+      <thm15:themeFamily xmlns:thm15="http://schemas.microsoft.com/office/thememl/2012/main" xmlns="" name="Office Theme" id="{62F939B6-93AF-4DB8-9C6B-D6C7DFDC589F}" vid="{4A3C46E8-61CC-4603-A589-7422A47A8E4A}"/>
     </a:ext>
   </a:extLst>
 </a:theme>
@@ -10587,7 +10483,7 @@
   <a:extraClrSchemeLst/>
   <a:extLst>
     <a:ext uri="{05A4C25C-085E-4340-85A3-A5531E510DB2}">
-      <thm15:themeFamily xmlns="" xmlns:thm15="http://schemas.microsoft.com/office/thememl/2012/main" name="Office Theme" id="{62F939B6-93AF-4DB8-9C6B-D6C7DFDC589F}" vid="{4A3C46E8-61CC-4603-A589-7422A47A8E4A}"/>
+      <thm15:themeFamily xmlns:thm15="http://schemas.microsoft.com/office/thememl/2012/main" xmlns="" name="Office Theme" id="{62F939B6-93AF-4DB8-9C6B-D6C7DFDC589F}" vid="{4A3C46E8-61CC-4603-A589-7422A47A8E4A}"/>
     </a:ext>
   </a:extLst>
 </a:theme>
@@ -10848,7 +10744,7 @@
   <a:extraClrSchemeLst/>
   <a:extLst>
     <a:ext uri="{05A4C25C-085E-4340-85A3-A5531E510DB2}">
-      <thm15:themeFamily xmlns="" xmlns:thm15="http://schemas.microsoft.com/office/thememl/2012/main" name="Office Theme" id="{62F939B6-93AF-4DB8-9C6B-D6C7DFDC589F}" vid="{4A3C46E8-61CC-4603-A589-7422A47A8E4A}"/>
+      <thm15:themeFamily xmlns:thm15="http://schemas.microsoft.com/office/thememl/2012/main" xmlns="" name="Office Theme" id="{62F939B6-93AF-4DB8-9C6B-D6C7DFDC589F}" vid="{4A3C46E8-61CC-4603-A589-7422A47A8E4A}"/>
     </a:ext>
   </a:extLst>
 </a:theme>

--- a/docs/Презентация.pptx
+++ b/docs/Презентация.pptx
@@ -5,10 +5,10 @@
     <p:sldMasterId id="2147483660" r:id="rId1"/>
   </p:sldMasterIdLst>
   <p:notesMasterIdLst>
-    <p:notesMasterId r:id="rId22"/>
+    <p:notesMasterId r:id="rId23"/>
   </p:notesMasterIdLst>
   <p:handoutMasterIdLst>
-    <p:handoutMasterId r:id="rId23"/>
+    <p:handoutMasterId r:id="rId24"/>
   </p:handoutMasterIdLst>
   <p:sldIdLst>
     <p:sldId id="256" r:id="rId2"/>
@@ -18,19 +18,20 @@
     <p:sldId id="261" r:id="rId6"/>
     <p:sldId id="262" r:id="rId7"/>
     <p:sldId id="284" r:id="rId8"/>
-    <p:sldId id="285" r:id="rId9"/>
-    <p:sldId id="286" r:id="rId10"/>
-    <p:sldId id="287" r:id="rId11"/>
-    <p:sldId id="283" r:id="rId12"/>
-    <p:sldId id="266" r:id="rId13"/>
-    <p:sldId id="269" r:id="rId14"/>
+    <p:sldId id="286" r:id="rId9"/>
+    <p:sldId id="287" r:id="rId10"/>
+    <p:sldId id="283" r:id="rId11"/>
+    <p:sldId id="266" r:id="rId12"/>
+    <p:sldId id="269" r:id="rId13"/>
+    <p:sldId id="275" r:id="rId14"/>
     <p:sldId id="270" r:id="rId15"/>
     <p:sldId id="274" r:id="rId16"/>
-    <p:sldId id="275" r:id="rId17"/>
+    <p:sldId id="288" r:id="rId17"/>
     <p:sldId id="276" r:id="rId18"/>
     <p:sldId id="279" r:id="rId19"/>
     <p:sldId id="280" r:id="rId20"/>
-    <p:sldId id="271" r:id="rId21"/>
+    <p:sldId id="289" r:id="rId21"/>
+    <p:sldId id="271" r:id="rId22"/>
   </p:sldIdLst>
   <p:sldSz cx="9144000" cy="6858000" type="screen4x3"/>
   <p:notesSz cx="6858000" cy="9144000"/>
@@ -219,7 +220,7 @@
           <a:p>
             <a:fld id="{9F65BB0F-5409-4FF1-A969-70A87B29BB8B}" type="datetimeFigureOut">
               <a:rPr lang="ru-RU" smtClean="0"/>
-              <a:t>17.05.2026</a:t>
+              <a:t>21.05.2026</a:t>
             </a:fld>
             <a:endParaRPr lang="ru-RU"/>
           </a:p>
@@ -385,7 +386,7 @@
           <a:p>
             <a:fld id="{3A799A34-F3E5-4C3D-ADB1-4A75C1E2B066}" type="datetimeFigureOut">
               <a:rPr lang="ru-RU" smtClean="0"/>
-              <a:t>17.05.2026</a:t>
+              <a:t>21.05.2026</a:t>
             </a:fld>
             <a:endParaRPr lang="ru-RU"/>
           </a:p>
@@ -784,7 +785,7 @@
           <a:p>
             <a:fld id="{944D7497-E597-40D6-82A3-211805BF7E00}" type="datetime1">
               <a:rPr lang="ru-RU" smtClean="0"/>
-              <a:t>17.05.2026</a:t>
+              <a:t>21.05.2026</a:t>
             </a:fld>
             <a:endParaRPr lang="ru-RU"/>
           </a:p>
@@ -954,7 +955,7 @@
           <a:p>
             <a:fld id="{CECA9DB3-6C95-4CAD-89AE-43560E3F5B35}" type="datetime1">
               <a:rPr lang="ru-RU" smtClean="0"/>
-              <a:t>17.05.2026</a:t>
+              <a:t>21.05.2026</a:t>
             </a:fld>
             <a:endParaRPr lang="ru-RU"/>
           </a:p>
@@ -1134,7 +1135,7 @@
           <a:p>
             <a:fld id="{477AB4FA-6F82-4F7A-ABA6-B74718ED1911}" type="datetime1">
               <a:rPr lang="ru-RU" smtClean="0"/>
-              <a:t>17.05.2026</a:t>
+              <a:t>21.05.2026</a:t>
             </a:fld>
             <a:endParaRPr lang="ru-RU"/>
           </a:p>
@@ -1304,7 +1305,7 @@
           <a:p>
             <a:fld id="{7BC36C01-B2CF-4383-B6DB-0B7CE6D2A205}" type="datetime1">
               <a:rPr lang="ru-RU" smtClean="0"/>
-              <a:t>17.05.2026</a:t>
+              <a:t>21.05.2026</a:t>
             </a:fld>
             <a:endParaRPr lang="ru-RU"/>
           </a:p>
@@ -1548,7 +1549,7 @@
           <a:p>
             <a:fld id="{F2DAF142-4DC5-40DC-BFDC-60E8B12989AC}" type="datetime1">
               <a:rPr lang="ru-RU" smtClean="0"/>
-              <a:t>17.05.2026</a:t>
+              <a:t>21.05.2026</a:t>
             </a:fld>
             <a:endParaRPr lang="ru-RU"/>
           </a:p>
@@ -1780,7 +1781,7 @@
           <a:p>
             <a:fld id="{51E4BCAE-0071-4E5B-93FF-42D9B4519922}" type="datetime1">
               <a:rPr lang="ru-RU" smtClean="0"/>
-              <a:t>17.05.2026</a:t>
+              <a:t>21.05.2026</a:t>
             </a:fld>
             <a:endParaRPr lang="ru-RU"/>
           </a:p>
@@ -2147,7 +2148,7 @@
           <a:p>
             <a:fld id="{70580941-ADDB-4024-9177-E173E5FDEA39}" type="datetime1">
               <a:rPr lang="ru-RU" smtClean="0"/>
-              <a:t>17.05.2026</a:t>
+              <a:t>21.05.2026</a:t>
             </a:fld>
             <a:endParaRPr lang="ru-RU"/>
           </a:p>
@@ -2265,7 +2266,7 @@
           <a:p>
             <a:fld id="{C8BD5923-B027-4CDD-BC2C-5833CABD9DB2}" type="datetime1">
               <a:rPr lang="ru-RU" smtClean="0"/>
-              <a:t>17.05.2026</a:t>
+              <a:t>21.05.2026</a:t>
             </a:fld>
             <a:endParaRPr lang="ru-RU"/>
           </a:p>
@@ -2360,7 +2361,7 @@
           <a:p>
             <a:fld id="{7B360C31-BCCD-4BCA-9E6F-CDD828472544}" type="datetime1">
               <a:rPr lang="ru-RU" smtClean="0"/>
-              <a:t>17.05.2026</a:t>
+              <a:t>21.05.2026</a:t>
             </a:fld>
             <a:endParaRPr lang="ru-RU"/>
           </a:p>
@@ -2637,7 +2638,7 @@
           <a:p>
             <a:fld id="{B595A26D-666D-40B7-9405-EFEE904C4F5B}" type="datetime1">
               <a:rPr lang="ru-RU" smtClean="0"/>
-              <a:t>17.05.2026</a:t>
+              <a:t>21.05.2026</a:t>
             </a:fld>
             <a:endParaRPr lang="ru-RU"/>
           </a:p>
@@ -2894,7 +2895,7 @@
           <a:p>
             <a:fld id="{C74E6A0C-F33A-437C-B293-28AC52E68EF3}" type="datetime1">
               <a:rPr lang="ru-RU" smtClean="0"/>
-              <a:t>17.05.2026</a:t>
+              <a:t>21.05.2026</a:t>
             </a:fld>
             <a:endParaRPr lang="ru-RU"/>
           </a:p>
@@ -3107,7 +3108,7 @@
           <a:p>
             <a:fld id="{25F6AF81-EAB8-4DB9-8BFB-E5E2C80D8FC8}" type="datetime1">
               <a:rPr lang="ru-RU" smtClean="0"/>
-              <a:t>17.05.2026</a:t>
+              <a:t>21.05.2026</a:t>
             </a:fld>
             <a:endParaRPr lang="ru-RU"/>
           </a:p>
@@ -3600,6 +3601,16 @@
             </a:r>
           </a:p>
           <a:p>
+            <a:pPr algn="l" eaLnBrk="1" hangingPunct="1"/>
+            <a:r>
+              <a:rPr lang="ru-RU" altLang="ru-RU" sz="2000" dirty="0" smtClean="0">
+                <a:latin typeface="Times New Roman" panose="02020603050405020304" pitchFamily="18" charset="0"/>
+                <a:cs typeface="Times New Roman" panose="02020603050405020304" pitchFamily="18" charset="0"/>
+              </a:rPr>
+              <a:t>Группы: 1ИСП-21</a:t>
+            </a:r>
+          </a:p>
+          <a:p>
             <a:pPr algn="l"/>
             <a:r>
               <a:rPr lang="ru-RU" altLang="ru-RU" sz="2000" dirty="0" smtClean="0">
@@ -3613,7 +3624,7 @@
                 <a:latin typeface="Times New Roman" panose="02020603050405020304" pitchFamily="18" charset="0"/>
                 <a:cs typeface="Times New Roman" panose="02020603050405020304" pitchFamily="18" charset="0"/>
               </a:rPr>
-              <a:t>преп.</a:t>
+              <a:t>преподаватель</a:t>
             </a:r>
             <a:r>
               <a:rPr lang="ru-RU" sz="2000" dirty="0" smtClean="0">
@@ -3647,7 +3658,7 @@
         <p:spPr bwMode="auto">
           <a:xfrm>
             <a:off x="403654" y="313647"/>
-            <a:ext cx="8402595" cy="1323439"/>
+            <a:ext cx="8402595" cy="1015663"/>
           </a:xfrm>
           <a:prstGeom prst="rect">
             <a:avLst/>
@@ -3834,18 +3845,10 @@
                 <a:ea typeface="Helvetica Neue" panose="02000503000000020004" pitchFamily="2" charset="0"/>
                 <a:cs typeface="Times New Roman" panose="02020603050405020304" pitchFamily="18" charset="0"/>
               </a:rPr>
-              <a:t>Кафедра «Информатика, вычислительная техника и </a:t>
-            </a:r>
-          </a:p>
-          <a:p>
-            <a:pPr lvl="0" algn="ctr">
-              <a:spcBef>
-                <a:spcPct val="0"/>
-              </a:spcBef>
-              <a:defRPr/>
-            </a:pPr>
-            <a:r>
-              <a:rPr lang="ru-RU" sz="2000" dirty="0">
+              <a:t>Кафедра «</a:t>
+            </a:r>
+            <a:r>
+              <a:rPr lang="ru-RU" sz="2000" dirty="0" smtClean="0">
                 <a:solidFill>
                   <a:srgbClr val="000000"/>
                 </a:solidFill>
@@ -3853,8 +3856,16 @@
                 <a:ea typeface="Helvetica Neue" panose="02000503000000020004" pitchFamily="2" charset="0"/>
                 <a:cs typeface="Times New Roman" panose="02020603050405020304" pitchFamily="18" charset="0"/>
               </a:rPr>
-              <a:t>информационная безопасность»</a:t>
-            </a:r>
+              <a:t>Информационные системы в экономике»</a:t>
+            </a:r>
+            <a:endParaRPr lang="ru-RU" sz="2000" dirty="0">
+              <a:solidFill>
+                <a:srgbClr val="000000"/>
+              </a:solidFill>
+              <a:latin typeface="Times New Roman" panose="02020603050405020304" pitchFamily="18" charset="0"/>
+              <a:ea typeface="Helvetica Neue" panose="02000503000000020004" pitchFamily="2" charset="0"/>
+              <a:cs typeface="Times New Roman" panose="02020603050405020304" pitchFamily="18" charset="0"/>
+            </a:endParaRPr>
           </a:p>
         </p:txBody>
       </p:sp>
@@ -4063,169 +4074,6 @@
       </p:grpSpPr>
       <p:sp>
         <p:nvSpPr>
-          <p:cNvPr id="2" name="Номер слайда 1">
-            <a:extLst>
-              <a:ext uri="{FF2B5EF4-FFF2-40B4-BE49-F238E27FC236}">
-                <a16:creationId xmlns:a16="http://schemas.microsoft.com/office/drawing/2014/main" xmlns="" id="{46930FCD-49CE-443B-97F5-6039E4520D00}"/>
-              </a:ext>
-            </a:extLst>
-          </p:cNvPr>
-          <p:cNvSpPr>
-            <a:spLocks noGrp="1"/>
-          </p:cNvSpPr>
-          <p:nvPr>
-            <p:ph type="sldNum" sz="quarter" idx="12"/>
-          </p:nvPr>
-        </p:nvSpPr>
-        <p:spPr>
-          <a:xfrm>
-            <a:off x="6911031" y="188538"/>
-            <a:ext cx="2057400" cy="273844"/>
-          </a:xfrm>
-        </p:spPr>
-        <p:txBody>
-          <a:bodyPr/>
-          <a:lstStyle/>
-          <a:p>
-            <a:fld id="{9085F210-7A9F-4CCE-ADA7-E2F1EE154959}" type="slidenum">
-              <a:rPr lang="ru-RU" sz="2700">
-                <a:latin typeface="Times New Roman" panose="02020603050405020304" pitchFamily="18" charset="0"/>
-                <a:cs typeface="Times New Roman" panose="02020603050405020304" pitchFamily="18" charset="0"/>
-              </a:rPr>
-              <a:t>10</a:t>
-            </a:fld>
-            <a:endParaRPr lang="ru-RU" sz="2700" dirty="0">
-              <a:latin typeface="Times New Roman" panose="02020603050405020304" pitchFamily="18" charset="0"/>
-              <a:cs typeface="Times New Roman" panose="02020603050405020304" pitchFamily="18" charset="0"/>
-            </a:endParaRPr>
-          </a:p>
-        </p:txBody>
-      </p:sp>
-      <p:sp>
-        <p:nvSpPr>
-          <p:cNvPr id="5" name="TextBox 4"/>
-          <p:cNvSpPr txBox="1"/>
-          <p:nvPr/>
-        </p:nvSpPr>
-        <p:spPr>
-          <a:xfrm>
-            <a:off x="156851" y="188538"/>
-            <a:ext cx="3283912" cy="369332"/>
-          </a:xfrm>
-          <a:prstGeom prst="rect">
-            <a:avLst/>
-          </a:prstGeom>
-          <a:noFill/>
-        </p:spPr>
-        <p:txBody>
-          <a:bodyPr wrap="none" rtlCol="0">
-            <a:spAutoFit/>
-          </a:bodyPr>
-          <a:lstStyle/>
-          <a:p>
-            <a:r>
-              <a:rPr lang="en-US" b="1" dirty="0">
-                <a:latin typeface="Times New Roman" panose="02020603050405020304" pitchFamily="18" charset="0"/>
-                <a:cs typeface="Times New Roman" panose="02020603050405020304" pitchFamily="18" charset="0"/>
-              </a:rPr>
-              <a:t>IDEF0 </a:t>
-            </a:r>
-            <a:r>
-              <a:rPr lang="ru-RU" b="1" dirty="0">
-                <a:latin typeface="Times New Roman" panose="02020603050405020304" pitchFamily="18" charset="0"/>
-                <a:cs typeface="Times New Roman" panose="02020603050405020304" pitchFamily="18" charset="0"/>
-              </a:rPr>
-              <a:t>диаграмма</a:t>
-            </a:r>
-            <a:r>
-              <a:rPr lang="en-US" b="1" dirty="0">
-                <a:latin typeface="Times New Roman" panose="02020603050405020304" pitchFamily="18" charset="0"/>
-                <a:cs typeface="Times New Roman" panose="02020603050405020304" pitchFamily="18" charset="0"/>
-              </a:rPr>
-              <a:t> </a:t>
-            </a:r>
-            <a:r>
-              <a:rPr lang="ru-RU" b="1" dirty="0">
-                <a:latin typeface="Times New Roman" panose="02020603050405020304" pitchFamily="18" charset="0"/>
-                <a:cs typeface="Times New Roman" panose="02020603050405020304" pitchFamily="18" charset="0"/>
-              </a:rPr>
-              <a:t>уровень </a:t>
-            </a:r>
-            <a:r>
-              <a:rPr lang="ru-RU" b="1" dirty="0" smtClean="0">
-                <a:latin typeface="Times New Roman" panose="02020603050405020304" pitchFamily="18" charset="0"/>
-                <a:cs typeface="Times New Roman" panose="02020603050405020304" pitchFamily="18" charset="0"/>
-              </a:rPr>
-              <a:t>А2</a:t>
-            </a:r>
-            <a:endParaRPr lang="ru-RU" b="1" dirty="0">
-              <a:latin typeface="Times New Roman" panose="02020603050405020304" pitchFamily="18" charset="0"/>
-              <a:cs typeface="Times New Roman" panose="02020603050405020304" pitchFamily="18" charset="0"/>
-            </a:endParaRPr>
-          </a:p>
-        </p:txBody>
-      </p:sp>
-      <p:pic>
-        <p:nvPicPr>
-          <p:cNvPr id="6" name="Рисунок 5"/>
-          <p:cNvPicPr/>
-          <p:nvPr/>
-        </p:nvPicPr>
-        <p:blipFill>
-          <a:blip r:embed="rId2"/>
-          <a:stretch>
-            <a:fillRect/>
-          </a:stretch>
-        </p:blipFill>
-        <p:spPr>
-          <a:xfrm>
-            <a:off x="285750" y="685800"/>
-            <a:ext cx="8534399" cy="5962649"/>
-          </a:xfrm>
-          <a:prstGeom prst="rect">
-            <a:avLst/>
-          </a:prstGeom>
-        </p:spPr>
-      </p:pic>
-    </p:spTree>
-    <p:extLst>
-      <p:ext uri="{BB962C8B-B14F-4D97-AF65-F5344CB8AC3E}">
-        <p14:creationId xmlns:p14="http://schemas.microsoft.com/office/powerpoint/2010/main" val="101058881"/>
-      </p:ext>
-    </p:extLst>
-  </p:cSld>
-  <p:clrMapOvr>
-    <a:masterClrMapping/>
-  </p:clrMapOvr>
-  <p:timing>
-    <p:tnLst>
-      <p:par>
-        <p:cTn id="1" dur="indefinite" restart="never" nodeType="tmRoot"/>
-      </p:par>
-    </p:tnLst>
-  </p:timing>
-</p:sld>
-</file>
-
-<file path=ppt/slides/slide11.xml><?xml version="1.0" encoding="utf-8"?>
-<p:sld xmlns:a="http://schemas.openxmlformats.org/drawingml/2006/main" xmlns:r="http://schemas.openxmlformats.org/officeDocument/2006/relationships" xmlns:p="http://schemas.openxmlformats.org/presentationml/2006/main">
-  <p:cSld>
-    <p:spTree>
-      <p:nvGrpSpPr>
-        <p:cNvPr id="1" name=""/>
-        <p:cNvGrpSpPr/>
-        <p:nvPr/>
-      </p:nvGrpSpPr>
-      <p:grpSpPr>
-        <a:xfrm>
-          <a:off x="0" y="0"/>
-          <a:ext cx="0" cy="0"/>
-          <a:chOff x="0" y="0"/>
-          <a:chExt cx="0" cy="0"/>
-        </a:xfrm>
-      </p:grpSpPr>
-      <p:sp>
-        <p:nvSpPr>
           <p:cNvPr id="2" name="Заголовок 1"/>
           <p:cNvSpPr>
             <a:spLocks noGrp="1"/>
@@ -4285,7 +4133,7 @@
                 <a:latin typeface="Times New Roman" panose="02020603050405020304" pitchFamily="18" charset="0"/>
                 <a:cs typeface="Times New Roman" panose="02020603050405020304" pitchFamily="18" charset="0"/>
               </a:rPr>
-              <a:t>11</a:t>
+              <a:t>10</a:t>
             </a:fld>
             <a:endParaRPr lang="ru-RU" sz="2700" dirty="0">
               <a:latin typeface="Times New Roman" panose="02020603050405020304" pitchFamily="18" charset="0"/>
@@ -4594,6 +4442,549 @@
 </p:sld>
 </file>
 
+<file path=ppt/slides/slide11.xml><?xml version="1.0" encoding="utf-8"?>
+<p:sld xmlns:a="http://schemas.openxmlformats.org/drawingml/2006/main" xmlns:r="http://schemas.openxmlformats.org/officeDocument/2006/relationships" xmlns:p="http://schemas.openxmlformats.org/presentationml/2006/main">
+  <p:cSld>
+    <p:spTree>
+      <p:nvGrpSpPr>
+        <p:cNvPr id="1" name=""/>
+        <p:cNvGrpSpPr/>
+        <p:nvPr/>
+      </p:nvGrpSpPr>
+      <p:grpSpPr>
+        <a:xfrm>
+          <a:off x="0" y="0"/>
+          <a:ext cx="0" cy="0"/>
+          <a:chOff x="0" y="0"/>
+          <a:chExt cx="0" cy="0"/>
+        </a:xfrm>
+      </p:grpSpPr>
+      <p:sp>
+        <p:nvSpPr>
+          <p:cNvPr id="2" name="Номер слайда 1">
+            <a:extLst>
+              <a:ext uri="{FF2B5EF4-FFF2-40B4-BE49-F238E27FC236}">
+                <a16:creationId xmlns:a16="http://schemas.microsoft.com/office/drawing/2014/main" xmlns="" id="{8C826DA7-D1DD-4311-A823-D438A4D9C3AA}"/>
+              </a:ext>
+            </a:extLst>
+          </p:cNvPr>
+          <p:cNvSpPr>
+            <a:spLocks noGrp="1"/>
+          </p:cNvSpPr>
+          <p:nvPr>
+            <p:ph type="sldNum" sz="quarter" idx="12"/>
+          </p:nvPr>
+        </p:nvSpPr>
+        <p:spPr>
+          <a:xfrm>
+            <a:off x="6944613" y="143311"/>
+            <a:ext cx="2057400" cy="273844"/>
+          </a:xfrm>
+        </p:spPr>
+        <p:txBody>
+          <a:bodyPr/>
+          <a:lstStyle/>
+          <a:p>
+            <a:fld id="{9085F210-7A9F-4CCE-ADA7-E2F1EE154959}" type="slidenum">
+              <a:rPr lang="ru-RU" sz="2700">
+                <a:latin typeface="Times New Roman" panose="02020603050405020304" pitchFamily="18" charset="0"/>
+                <a:cs typeface="Times New Roman" panose="02020603050405020304" pitchFamily="18" charset="0"/>
+              </a:rPr>
+              <a:t>11</a:t>
+            </a:fld>
+            <a:endParaRPr lang="ru-RU" sz="2700" dirty="0">
+              <a:latin typeface="Times New Roman" panose="02020603050405020304" pitchFamily="18" charset="0"/>
+              <a:cs typeface="Times New Roman" panose="02020603050405020304" pitchFamily="18" charset="0"/>
+            </a:endParaRPr>
+          </a:p>
+        </p:txBody>
+      </p:sp>
+      <p:sp>
+        <p:nvSpPr>
+          <p:cNvPr id="4" name="Прямоугольник 3">
+            <a:extLst>
+              <a:ext uri="{FF2B5EF4-FFF2-40B4-BE49-F238E27FC236}">
+                <a16:creationId xmlns:a16="http://schemas.microsoft.com/office/drawing/2014/main" xmlns="" id="{E2B8A57F-0C4E-48A2-8E8F-1C89F19B4C11}"/>
+              </a:ext>
+            </a:extLst>
+          </p:cNvPr>
+          <p:cNvSpPr/>
+          <p:nvPr/>
+        </p:nvSpPr>
+        <p:spPr>
+          <a:xfrm>
+            <a:off x="-264341" y="-31550"/>
+            <a:ext cx="3583032" cy="504625"/>
+          </a:xfrm>
+          <a:prstGeom prst="rect">
+            <a:avLst/>
+          </a:prstGeom>
+        </p:spPr>
+        <p:txBody>
+          <a:bodyPr wrap="none">
+            <a:spAutoFit/>
+          </a:bodyPr>
+          <a:lstStyle/>
+          <a:p>
+            <a:pPr lvl="1" algn="just">
+              <a:lnSpc>
+                <a:spcPct val="150000"/>
+              </a:lnSpc>
+              <a:spcAft>
+                <a:spcPts val="600"/>
+              </a:spcAft>
+            </a:pPr>
+            <a:r>
+              <a:rPr lang="ru-RU" sz="2000" b="1" dirty="0">
+                <a:solidFill>
+                  <a:srgbClr val="000000"/>
+                </a:solidFill>
+                <a:latin typeface="Times New Roman" panose="02020603050405020304" pitchFamily="18" charset="0"/>
+                <a:ea typeface="Times New Roman" panose="02020603050405020304" pitchFamily="18" charset="0"/>
+                <a:cs typeface="Times New Roman" panose="02020603050405020304" pitchFamily="18" charset="0"/>
+              </a:rPr>
+              <a:t>Способ хранения данных</a:t>
+            </a:r>
+            <a:endParaRPr lang="ru-RU" dirty="0">
+              <a:latin typeface="Calibri" panose="020F0502020204030204" pitchFamily="34" charset="0"/>
+              <a:ea typeface="Calibri" panose="020F0502020204030204" pitchFamily="34" charset="0"/>
+              <a:cs typeface="Times New Roman" panose="02020603050405020304" pitchFamily="18" charset="0"/>
+            </a:endParaRPr>
+          </a:p>
+        </p:txBody>
+      </p:sp>
+      <p:sp>
+        <p:nvSpPr>
+          <p:cNvPr id="3" name="AutoShape 2" descr="Picture background"/>
+          <p:cNvSpPr>
+            <a:spLocks noChangeAspect="1" noChangeArrowheads="1"/>
+          </p:cNvSpPr>
+          <p:nvPr/>
+        </p:nvSpPr>
+        <p:spPr bwMode="auto">
+          <a:xfrm>
+            <a:off x="155575" y="-144463"/>
+            <a:ext cx="304800" cy="304801"/>
+          </a:xfrm>
+          <a:prstGeom prst="rect">
+            <a:avLst/>
+          </a:prstGeom>
+          <a:noFill/>
+          <a:extLst>
+            <a:ext uri="{909E8E84-426E-40DD-AFC4-6F175D3DCCD1}">
+              <a14:hiddenFill xmlns:a14="http://schemas.microsoft.com/office/drawing/2010/main">
+                <a:solidFill>
+                  <a:srgbClr val="FFFFFF"/>
+                </a:solidFill>
+              </a14:hiddenFill>
+            </a:ext>
+          </a:extLst>
+        </p:spPr>
+        <p:txBody>
+          <a:bodyPr vert="horz" wrap="square" lIns="91440" tIns="45720" rIns="91440" bIns="45720" numCol="1" anchor="t" anchorCtr="0" compatLnSpc="1">
+            <a:prstTxWarp prst="textNoShape">
+              <a:avLst/>
+            </a:prstTxWarp>
+          </a:bodyPr>
+          <a:lstStyle/>
+          <a:p>
+            <a:endParaRPr lang="ru-RU"/>
+          </a:p>
+        </p:txBody>
+      </p:sp>
+      <p:sp>
+        <p:nvSpPr>
+          <p:cNvPr id="5" name="AutoShape 4" descr="Picture background"/>
+          <p:cNvSpPr>
+            <a:spLocks noChangeAspect="1" noChangeArrowheads="1"/>
+          </p:cNvSpPr>
+          <p:nvPr/>
+        </p:nvSpPr>
+        <p:spPr bwMode="auto">
+          <a:xfrm>
+            <a:off x="307975" y="7937"/>
+            <a:ext cx="304800" cy="304801"/>
+          </a:xfrm>
+          <a:prstGeom prst="rect">
+            <a:avLst/>
+          </a:prstGeom>
+          <a:noFill/>
+          <a:extLst>
+            <a:ext uri="{909E8E84-426E-40DD-AFC4-6F175D3DCCD1}">
+              <a14:hiddenFill xmlns:a14="http://schemas.microsoft.com/office/drawing/2010/main">
+                <a:solidFill>
+                  <a:srgbClr val="FFFFFF"/>
+                </a:solidFill>
+              </a14:hiddenFill>
+            </a:ext>
+          </a:extLst>
+        </p:spPr>
+        <p:txBody>
+          <a:bodyPr vert="horz" wrap="square" lIns="91440" tIns="45720" rIns="91440" bIns="45720" numCol="1" anchor="t" anchorCtr="0" compatLnSpc="1">
+            <a:prstTxWarp prst="textNoShape">
+              <a:avLst/>
+            </a:prstTxWarp>
+          </a:bodyPr>
+          <a:lstStyle/>
+          <a:p>
+            <a:endParaRPr lang="ru-RU"/>
+          </a:p>
+        </p:txBody>
+      </p:sp>
+      <p:sp>
+        <p:nvSpPr>
+          <p:cNvPr id="6" name="AutoShape 6" descr="Picture background"/>
+          <p:cNvSpPr>
+            <a:spLocks noChangeAspect="1" noChangeArrowheads="1"/>
+          </p:cNvSpPr>
+          <p:nvPr/>
+        </p:nvSpPr>
+        <p:spPr bwMode="auto">
+          <a:xfrm>
+            <a:off x="460375" y="160337"/>
+            <a:ext cx="304800" cy="304801"/>
+          </a:xfrm>
+          <a:prstGeom prst="rect">
+            <a:avLst/>
+          </a:prstGeom>
+          <a:noFill/>
+          <a:extLst>
+            <a:ext uri="{909E8E84-426E-40DD-AFC4-6F175D3DCCD1}">
+              <a14:hiddenFill xmlns:a14="http://schemas.microsoft.com/office/drawing/2010/main">
+                <a:solidFill>
+                  <a:srgbClr val="FFFFFF"/>
+                </a:solidFill>
+              </a14:hiddenFill>
+            </a:ext>
+          </a:extLst>
+        </p:spPr>
+        <p:txBody>
+          <a:bodyPr vert="horz" wrap="square" lIns="91440" tIns="45720" rIns="91440" bIns="45720" numCol="1" anchor="t" anchorCtr="0" compatLnSpc="1">
+            <a:prstTxWarp prst="textNoShape">
+              <a:avLst/>
+            </a:prstTxWarp>
+          </a:bodyPr>
+          <a:lstStyle/>
+          <a:p>
+            <a:endParaRPr lang="ru-RU"/>
+          </a:p>
+        </p:txBody>
+      </p:sp>
+      <p:sp>
+        <p:nvSpPr>
+          <p:cNvPr id="8" name="AutoShape 8" descr="Picture background"/>
+          <p:cNvSpPr>
+            <a:spLocks noChangeAspect="1" noChangeArrowheads="1"/>
+          </p:cNvSpPr>
+          <p:nvPr/>
+        </p:nvSpPr>
+        <p:spPr bwMode="auto">
+          <a:xfrm>
+            <a:off x="612775" y="312737"/>
+            <a:ext cx="304800" cy="304801"/>
+          </a:xfrm>
+          <a:prstGeom prst="rect">
+            <a:avLst/>
+          </a:prstGeom>
+          <a:noFill/>
+          <a:extLst>
+            <a:ext uri="{909E8E84-426E-40DD-AFC4-6F175D3DCCD1}">
+              <a14:hiddenFill xmlns:a14="http://schemas.microsoft.com/office/drawing/2010/main">
+                <a:solidFill>
+                  <a:srgbClr val="FFFFFF"/>
+                </a:solidFill>
+              </a14:hiddenFill>
+            </a:ext>
+          </a:extLst>
+        </p:spPr>
+        <p:txBody>
+          <a:bodyPr vert="horz" wrap="square" lIns="91440" tIns="45720" rIns="91440" bIns="45720" numCol="1" anchor="t" anchorCtr="0" compatLnSpc="1">
+            <a:prstTxWarp prst="textNoShape">
+              <a:avLst/>
+            </a:prstTxWarp>
+          </a:bodyPr>
+          <a:lstStyle/>
+          <a:p>
+            <a:endParaRPr lang="ru-RU"/>
+          </a:p>
+        </p:txBody>
+      </p:sp>
+      <p:sp>
+        <p:nvSpPr>
+          <p:cNvPr id="10" name="AutoShape 10" descr="Picture background"/>
+          <p:cNvSpPr>
+            <a:spLocks noChangeAspect="1" noChangeArrowheads="1"/>
+          </p:cNvSpPr>
+          <p:nvPr/>
+        </p:nvSpPr>
+        <p:spPr bwMode="auto">
+          <a:xfrm>
+            <a:off x="765175" y="465137"/>
+            <a:ext cx="304800" cy="304801"/>
+          </a:xfrm>
+          <a:prstGeom prst="rect">
+            <a:avLst/>
+          </a:prstGeom>
+          <a:noFill/>
+          <a:extLst>
+            <a:ext uri="{909E8E84-426E-40DD-AFC4-6F175D3DCCD1}">
+              <a14:hiddenFill xmlns:a14="http://schemas.microsoft.com/office/drawing/2010/main">
+                <a:solidFill>
+                  <a:srgbClr val="FFFFFF"/>
+                </a:solidFill>
+              </a14:hiddenFill>
+            </a:ext>
+          </a:extLst>
+        </p:spPr>
+        <p:txBody>
+          <a:bodyPr vert="horz" wrap="square" lIns="91440" tIns="45720" rIns="91440" bIns="45720" numCol="1" anchor="t" anchorCtr="0" compatLnSpc="1">
+            <a:prstTxWarp prst="textNoShape">
+              <a:avLst/>
+            </a:prstTxWarp>
+          </a:bodyPr>
+          <a:lstStyle/>
+          <a:p>
+            <a:endParaRPr lang="ru-RU"/>
+          </a:p>
+        </p:txBody>
+      </p:sp>
+      <p:sp>
+        <p:nvSpPr>
+          <p:cNvPr id="11" name="AutoShape 12" descr="Picture background"/>
+          <p:cNvSpPr>
+            <a:spLocks noChangeAspect="1" noChangeArrowheads="1"/>
+          </p:cNvSpPr>
+          <p:nvPr/>
+        </p:nvSpPr>
+        <p:spPr bwMode="auto">
+          <a:xfrm>
+            <a:off x="917575" y="617537"/>
+            <a:ext cx="304800" cy="304801"/>
+          </a:xfrm>
+          <a:prstGeom prst="rect">
+            <a:avLst/>
+          </a:prstGeom>
+          <a:noFill/>
+          <a:extLst>
+            <a:ext uri="{909E8E84-426E-40DD-AFC4-6F175D3DCCD1}">
+              <a14:hiddenFill xmlns:a14="http://schemas.microsoft.com/office/drawing/2010/main">
+                <a:solidFill>
+                  <a:srgbClr val="FFFFFF"/>
+                </a:solidFill>
+              </a14:hiddenFill>
+            </a:ext>
+          </a:extLst>
+        </p:spPr>
+        <p:txBody>
+          <a:bodyPr vert="horz" wrap="square" lIns="91440" tIns="45720" rIns="91440" bIns="45720" numCol="1" anchor="t" anchorCtr="0" compatLnSpc="1">
+            <a:prstTxWarp prst="textNoShape">
+              <a:avLst/>
+            </a:prstTxWarp>
+          </a:bodyPr>
+          <a:lstStyle/>
+          <a:p>
+            <a:endParaRPr lang="ru-RU"/>
+          </a:p>
+        </p:txBody>
+      </p:sp>
+      <p:sp>
+        <p:nvSpPr>
+          <p:cNvPr id="12" name="AutoShape 14" descr="Picture background"/>
+          <p:cNvSpPr>
+            <a:spLocks noChangeAspect="1" noChangeArrowheads="1"/>
+          </p:cNvSpPr>
+          <p:nvPr/>
+        </p:nvSpPr>
+        <p:spPr bwMode="auto">
+          <a:xfrm>
+            <a:off x="1069975" y="769937"/>
+            <a:ext cx="304800" cy="304801"/>
+          </a:xfrm>
+          <a:prstGeom prst="rect">
+            <a:avLst/>
+          </a:prstGeom>
+          <a:noFill/>
+          <a:extLst>
+            <a:ext uri="{909E8E84-426E-40DD-AFC4-6F175D3DCCD1}">
+              <a14:hiddenFill xmlns:a14="http://schemas.microsoft.com/office/drawing/2010/main">
+                <a:solidFill>
+                  <a:srgbClr val="FFFFFF"/>
+                </a:solidFill>
+              </a14:hiddenFill>
+            </a:ext>
+          </a:extLst>
+        </p:spPr>
+        <p:txBody>
+          <a:bodyPr vert="horz" wrap="square" lIns="91440" tIns="45720" rIns="91440" bIns="45720" numCol="1" anchor="t" anchorCtr="0" compatLnSpc="1">
+            <a:prstTxWarp prst="textNoShape">
+              <a:avLst/>
+            </a:prstTxWarp>
+          </a:bodyPr>
+          <a:lstStyle/>
+          <a:p>
+            <a:endParaRPr lang="ru-RU"/>
+          </a:p>
+        </p:txBody>
+      </p:sp>
+      <p:sp>
+        <p:nvSpPr>
+          <p:cNvPr id="13" name="AutoShape 16" descr="Picture background"/>
+          <p:cNvSpPr>
+            <a:spLocks noChangeAspect="1" noChangeArrowheads="1"/>
+          </p:cNvSpPr>
+          <p:nvPr/>
+        </p:nvSpPr>
+        <p:spPr bwMode="auto">
+          <a:xfrm>
+            <a:off x="1222375" y="922337"/>
+            <a:ext cx="304800" cy="304801"/>
+          </a:xfrm>
+          <a:prstGeom prst="rect">
+            <a:avLst/>
+          </a:prstGeom>
+          <a:noFill/>
+          <a:extLst>
+            <a:ext uri="{909E8E84-426E-40DD-AFC4-6F175D3DCCD1}">
+              <a14:hiddenFill xmlns:a14="http://schemas.microsoft.com/office/drawing/2010/main">
+                <a:solidFill>
+                  <a:srgbClr val="FFFFFF"/>
+                </a:solidFill>
+              </a14:hiddenFill>
+            </a:ext>
+          </a:extLst>
+        </p:spPr>
+        <p:txBody>
+          <a:bodyPr vert="horz" wrap="square" lIns="91440" tIns="45720" rIns="91440" bIns="45720" numCol="1" anchor="t" anchorCtr="0" compatLnSpc="1">
+            <a:prstTxWarp prst="textNoShape">
+              <a:avLst/>
+            </a:prstTxWarp>
+          </a:bodyPr>
+          <a:lstStyle/>
+          <a:p>
+            <a:endParaRPr lang="ru-RU"/>
+          </a:p>
+        </p:txBody>
+      </p:sp>
+      <p:sp>
+        <p:nvSpPr>
+          <p:cNvPr id="14" name="AutoShape 18" descr="Picture background"/>
+          <p:cNvSpPr>
+            <a:spLocks noChangeAspect="1" noChangeArrowheads="1"/>
+          </p:cNvSpPr>
+          <p:nvPr/>
+        </p:nvSpPr>
+        <p:spPr bwMode="auto">
+          <a:xfrm>
+            <a:off x="1374775" y="1074737"/>
+            <a:ext cx="304800" cy="304801"/>
+          </a:xfrm>
+          <a:prstGeom prst="rect">
+            <a:avLst/>
+          </a:prstGeom>
+          <a:noFill/>
+          <a:extLst>
+            <a:ext uri="{909E8E84-426E-40DD-AFC4-6F175D3DCCD1}">
+              <a14:hiddenFill xmlns:a14="http://schemas.microsoft.com/office/drawing/2010/main">
+                <a:solidFill>
+                  <a:srgbClr val="FFFFFF"/>
+                </a:solidFill>
+              </a14:hiddenFill>
+            </a:ext>
+          </a:extLst>
+        </p:spPr>
+        <p:txBody>
+          <a:bodyPr vert="horz" wrap="square" lIns="91440" tIns="45720" rIns="91440" bIns="45720" numCol="1" anchor="t" anchorCtr="0" compatLnSpc="1">
+            <a:prstTxWarp prst="textNoShape">
+              <a:avLst/>
+            </a:prstTxWarp>
+          </a:bodyPr>
+          <a:lstStyle/>
+          <a:p>
+            <a:endParaRPr lang="ru-RU"/>
+          </a:p>
+        </p:txBody>
+      </p:sp>
+      <p:sp>
+        <p:nvSpPr>
+          <p:cNvPr id="15" name="AutoShape 20" descr="Picture background"/>
+          <p:cNvSpPr>
+            <a:spLocks noChangeAspect="1" noChangeArrowheads="1"/>
+          </p:cNvSpPr>
+          <p:nvPr/>
+        </p:nvSpPr>
+        <p:spPr bwMode="auto">
+          <a:xfrm>
+            <a:off x="1527175" y="1227137"/>
+            <a:ext cx="304800" cy="304801"/>
+          </a:xfrm>
+          <a:prstGeom prst="rect">
+            <a:avLst/>
+          </a:prstGeom>
+          <a:noFill/>
+          <a:extLst>
+            <a:ext uri="{909E8E84-426E-40DD-AFC4-6F175D3DCCD1}">
+              <a14:hiddenFill xmlns:a14="http://schemas.microsoft.com/office/drawing/2010/main">
+                <a:solidFill>
+                  <a:srgbClr val="FFFFFF"/>
+                </a:solidFill>
+              </a14:hiddenFill>
+            </a:ext>
+          </a:extLst>
+        </p:spPr>
+        <p:txBody>
+          <a:bodyPr vert="horz" wrap="square" lIns="91440" tIns="45720" rIns="91440" bIns="45720" numCol="1" anchor="t" anchorCtr="0" compatLnSpc="1">
+            <a:prstTxWarp prst="textNoShape">
+              <a:avLst/>
+            </a:prstTxWarp>
+          </a:bodyPr>
+          <a:lstStyle/>
+          <a:p>
+            <a:endParaRPr lang="ru-RU"/>
+          </a:p>
+        </p:txBody>
+      </p:sp>
+      <p:pic>
+        <p:nvPicPr>
+          <p:cNvPr id="18" name="Рисунок 17"/>
+          <p:cNvPicPr/>
+          <p:nvPr/>
+        </p:nvPicPr>
+        <p:blipFill>
+          <a:blip r:embed="rId2"/>
+          <a:stretch>
+            <a:fillRect/>
+          </a:stretch>
+        </p:blipFill>
+        <p:spPr>
+          <a:xfrm>
+            <a:off x="0" y="473075"/>
+            <a:ext cx="9143999" cy="6283873"/>
+          </a:xfrm>
+          <a:prstGeom prst="rect">
+            <a:avLst/>
+          </a:prstGeom>
+        </p:spPr>
+      </p:pic>
+    </p:spTree>
+    <p:extLst>
+      <p:ext uri="{BB962C8B-B14F-4D97-AF65-F5344CB8AC3E}">
+        <p14:creationId xmlns:p14="http://schemas.microsoft.com/office/powerpoint/2010/main" val="2643016256"/>
+      </p:ext>
+    </p:extLst>
+  </p:cSld>
+  <p:clrMapOvr>
+    <a:masterClrMapping/>
+  </p:clrMapOvr>
+  <p:timing>
+    <p:tnLst>
+      <p:par>
+        <p:cTn id="1" dur="indefinite" restart="never" nodeType="tmRoot"/>
+      </p:par>
+    </p:tnLst>
+  </p:timing>
+</p:sld>
+</file>
+
 <file path=ppt/slides/slide12.xml><?xml version="1.0" encoding="utf-8"?>
 <p:sld xmlns:a="http://schemas.openxmlformats.org/drawingml/2006/main" xmlns:r="http://schemas.openxmlformats.org/officeDocument/2006/relationships" xmlns:p="http://schemas.openxmlformats.org/presentationml/2006/main">
   <p:cSld>
@@ -4616,7 +5007,7 @@
           <p:cNvPr id="2" name="Номер слайда 1">
             <a:extLst>
               <a:ext uri="{FF2B5EF4-FFF2-40B4-BE49-F238E27FC236}">
-                <a16:creationId xmlns:a16="http://schemas.microsoft.com/office/drawing/2014/main" xmlns="" id="{8C826DA7-D1DD-4311-A823-D438A4D9C3AA}"/>
+                <a16:creationId xmlns:a16="http://schemas.microsoft.com/office/drawing/2014/main" xmlns="" id="{9BE8A756-4F8A-4B4E-9CA4-0B2B58754F23}"/>
               </a:ext>
             </a:extLst>
           </p:cNvPr>
@@ -4629,7 +5020,7 @@
         </p:nvSpPr>
         <p:spPr>
           <a:xfrm>
-            <a:off x="6944613" y="143311"/>
+            <a:off x="6913091" y="179218"/>
             <a:ext cx="2057400" cy="273844"/>
           </a:xfrm>
         </p:spPr>
@@ -4653,10 +5044,10 @@
       </p:sp>
       <p:sp>
         <p:nvSpPr>
-          <p:cNvPr id="4" name="Прямоугольник 3">
+          <p:cNvPr id="3" name="Прямоугольник 2">
             <a:extLst>
               <a:ext uri="{FF2B5EF4-FFF2-40B4-BE49-F238E27FC236}">
-                <a16:creationId xmlns:a16="http://schemas.microsoft.com/office/drawing/2014/main" xmlns="" id="{E2B8A57F-0C4E-48A2-8E8F-1C89F19B4C11}"/>
+                <a16:creationId xmlns:a16="http://schemas.microsoft.com/office/drawing/2014/main" xmlns="" id="{F1F27FB0-1F6C-44A1-A435-43CA134E566B}"/>
               </a:ext>
             </a:extLst>
           </p:cNvPr>
@@ -4665,8 +5056,8 @@
         </p:nvSpPr>
         <p:spPr>
           <a:xfrm>
-            <a:off x="0" y="164842"/>
-            <a:ext cx="3583032" cy="504625"/>
+            <a:off x="214762" y="179218"/>
+            <a:ext cx="2358210" cy="400110"/>
           </a:xfrm>
           <a:prstGeom prst="rect">
             <a:avLst/>
@@ -4678,28 +5069,22 @@
           </a:bodyPr>
           <a:lstStyle/>
           <a:p>
-            <a:pPr lvl="1" algn="just">
-              <a:lnSpc>
-                <a:spcPct val="150000"/>
-              </a:lnSpc>
-              <a:spcAft>
-                <a:spcPts val="600"/>
-              </a:spcAft>
-            </a:pPr>
             <a:r>
               <a:rPr lang="ru-RU" sz="2000" b="1" dirty="0">
-                <a:solidFill>
-                  <a:srgbClr val="000000"/>
-                </a:solidFill>
-                <a:latin typeface="Times New Roman" panose="02020603050405020304" pitchFamily="18" charset="0"/>
-                <a:ea typeface="Times New Roman" panose="02020603050405020304" pitchFamily="18" charset="0"/>
-                <a:cs typeface="Times New Roman" panose="02020603050405020304" pitchFamily="18" charset="0"/>
-              </a:rPr>
-              <a:t>Способ хранения данных</a:t>
-            </a:r>
-            <a:endParaRPr lang="ru-RU" dirty="0">
-              <a:latin typeface="Calibri" panose="020F0502020204030204" pitchFamily="34" charset="0"/>
-              <a:ea typeface="Calibri" panose="020F0502020204030204" pitchFamily="34" charset="0"/>
+                <a:latin typeface="Times New Roman" panose="02020603050405020304" pitchFamily="18" charset="0"/>
+                <a:cs typeface="Times New Roman" panose="02020603050405020304" pitchFamily="18" charset="0"/>
+              </a:rPr>
+              <a:t>Главная </a:t>
+            </a:r>
+            <a:r>
+              <a:rPr lang="ru-RU" sz="2000" b="1" dirty="0" smtClean="0">
+                <a:latin typeface="Times New Roman" panose="02020603050405020304" pitchFamily="18" charset="0"/>
+                <a:cs typeface="Times New Roman" panose="02020603050405020304" pitchFamily="18" charset="0"/>
+              </a:rPr>
+              <a:t>страница</a:t>
+            </a:r>
+            <a:endParaRPr lang="ru-RU" sz="2000" b="1" dirty="0">
+              <a:latin typeface="Times New Roman" panose="02020603050405020304" pitchFamily="18" charset="0"/>
               <a:cs typeface="Times New Roman" panose="02020603050405020304" pitchFamily="18" charset="0"/>
             </a:endParaRPr>
           </a:p>
@@ -4707,434 +5092,88 @@
       </p:sp>
       <p:sp>
         <p:nvSpPr>
-          <p:cNvPr id="7" name="Прямоугольник 6">
+          <p:cNvPr id="7" name="TextBox 6">
             <a:extLst>
               <a:ext uri="{FF2B5EF4-FFF2-40B4-BE49-F238E27FC236}">
-                <a16:creationId xmlns:a16="http://schemas.microsoft.com/office/drawing/2014/main" xmlns="" id="{8B4CD0C1-7F79-4EE9-92E1-4406C1DE0C4D}"/>
+                <a16:creationId xmlns:a16="http://schemas.microsoft.com/office/drawing/2014/main" xmlns="" id="{4A43B050-07A0-4514-AC09-5D92151B5A5B}"/>
               </a:ext>
             </a:extLst>
           </p:cNvPr>
-          <p:cNvSpPr/>
+          <p:cNvSpPr txBox="1"/>
           <p:nvPr/>
         </p:nvSpPr>
         <p:spPr>
           <a:xfrm>
-            <a:off x="5742376" y="6276109"/>
-            <a:ext cx="2877326" cy="323165"/>
-          </a:xfrm>
-          <a:prstGeom prst="rect">
-            <a:avLst/>
-          </a:prstGeom>
-        </p:spPr>
-        <p:txBody>
-          <a:bodyPr wrap="none">
-            <a:spAutoFit/>
-          </a:bodyPr>
-          <a:lstStyle/>
-          <a:p>
-            <a:r>
-              <a:rPr lang="ru-RU" sz="1500" dirty="0">
-                <a:latin typeface="Times New Roman" panose="02020603050405020304" pitchFamily="18" charset="0"/>
-                <a:cs typeface="Times New Roman" panose="02020603050405020304" pitchFamily="18" charset="0"/>
-              </a:rPr>
-              <a:t>Физическая модель базы данных</a:t>
-            </a:r>
-          </a:p>
-        </p:txBody>
-      </p:sp>
-      <p:sp>
-        <p:nvSpPr>
-          <p:cNvPr id="3" name="AutoShape 2" descr="Picture background"/>
-          <p:cNvSpPr>
-            <a:spLocks noChangeAspect="1" noChangeArrowheads="1"/>
-          </p:cNvSpPr>
-          <p:nvPr/>
-        </p:nvSpPr>
-        <p:spPr bwMode="auto">
-          <a:xfrm>
-            <a:off x="155575" y="-144463"/>
-            <a:ext cx="304800" cy="304801"/>
+            <a:off x="1277437" y="6086698"/>
+            <a:ext cx="1726627" cy="338554"/>
           </a:xfrm>
           <a:prstGeom prst="rect">
             <a:avLst/>
           </a:prstGeom>
           <a:noFill/>
-          <a:extLst>
-            <a:ext uri="{909E8E84-426E-40DD-AFC4-6F175D3DCCD1}">
-              <a14:hiddenFill xmlns:a14="http://schemas.microsoft.com/office/drawing/2010/main">
-                <a:solidFill>
-                  <a:srgbClr val="FFFFFF"/>
-                </a:solidFill>
-              </a14:hiddenFill>
-            </a:ext>
-          </a:extLst>
-        </p:spPr>
-        <p:txBody>
-          <a:bodyPr vert="horz" wrap="square" lIns="91440" tIns="45720" rIns="91440" bIns="45720" numCol="1" anchor="t" anchorCtr="0" compatLnSpc="1">
-            <a:prstTxWarp prst="textNoShape">
-              <a:avLst/>
-            </a:prstTxWarp>
+        </p:spPr>
+        <p:txBody>
+          <a:bodyPr wrap="none" rtlCol="0">
+            <a:spAutoFit/>
           </a:bodyPr>
           <a:lstStyle/>
           <a:p>
-            <a:endParaRPr lang="ru-RU"/>
-          </a:p>
-        </p:txBody>
-      </p:sp>
-      <p:sp>
-        <p:nvSpPr>
-          <p:cNvPr id="5" name="AutoShape 4" descr="Picture background"/>
-          <p:cNvSpPr>
-            <a:spLocks noChangeAspect="1" noChangeArrowheads="1"/>
-          </p:cNvSpPr>
+            <a:r>
+              <a:rPr lang="ru-RU" sz="1600" dirty="0">
+                <a:latin typeface="Times New Roman" panose="02020603050405020304" pitchFamily="18" charset="0"/>
+                <a:cs typeface="Times New Roman" panose="02020603050405020304" pitchFamily="18" charset="0"/>
+              </a:rPr>
+              <a:t>Главная страница</a:t>
+            </a:r>
+          </a:p>
+        </p:txBody>
+      </p:sp>
+      <p:sp>
+        <p:nvSpPr>
+          <p:cNvPr id="10" name="TextBox 9">
+            <a:extLst>
+              <a:ext uri="{FF2B5EF4-FFF2-40B4-BE49-F238E27FC236}">
+                <a16:creationId xmlns:a16="http://schemas.microsoft.com/office/drawing/2014/main" xmlns="" id="{55B50A2E-4A39-49F0-B727-CDF21C8341D9}"/>
+              </a:ext>
+            </a:extLst>
+          </p:cNvPr>
+          <p:cNvSpPr txBox="1"/>
           <p:nvPr/>
         </p:nvSpPr>
-        <p:spPr bwMode="auto">
-          <a:xfrm>
-            <a:off x="307975" y="7937"/>
-            <a:ext cx="304800" cy="304801"/>
+        <p:spPr>
+          <a:xfrm>
+            <a:off x="4584320" y="6088005"/>
+            <a:ext cx="3940408" cy="338554"/>
           </a:xfrm>
           <a:prstGeom prst="rect">
             <a:avLst/>
           </a:prstGeom>
           <a:noFill/>
-          <a:extLst>
-            <a:ext uri="{909E8E84-426E-40DD-AFC4-6F175D3DCCD1}">
-              <a14:hiddenFill xmlns:a14="http://schemas.microsoft.com/office/drawing/2010/main">
-                <a:solidFill>
-                  <a:srgbClr val="FFFFFF"/>
-                </a:solidFill>
-              </a14:hiddenFill>
-            </a:ext>
-          </a:extLst>
-        </p:spPr>
-        <p:txBody>
-          <a:bodyPr vert="horz" wrap="square" lIns="91440" tIns="45720" rIns="91440" bIns="45720" numCol="1" anchor="t" anchorCtr="0" compatLnSpc="1">
-            <a:prstTxWarp prst="textNoShape">
-              <a:avLst/>
-            </a:prstTxWarp>
+        </p:spPr>
+        <p:txBody>
+          <a:bodyPr wrap="square" rtlCol="0">
+            <a:spAutoFit/>
           </a:bodyPr>
           <a:lstStyle/>
           <a:p>
-            <a:endParaRPr lang="ru-RU"/>
-          </a:p>
-        </p:txBody>
-      </p:sp>
-      <p:sp>
-        <p:nvSpPr>
-          <p:cNvPr id="6" name="AutoShape 6" descr="Picture background"/>
-          <p:cNvSpPr>
-            <a:spLocks noChangeAspect="1" noChangeArrowheads="1"/>
-          </p:cNvSpPr>
-          <p:nvPr/>
-        </p:nvSpPr>
-        <p:spPr bwMode="auto">
-          <a:xfrm>
-            <a:off x="460375" y="160337"/>
-            <a:ext cx="304800" cy="304801"/>
-          </a:xfrm>
-          <a:prstGeom prst="rect">
-            <a:avLst/>
-          </a:prstGeom>
-          <a:noFill/>
-          <a:extLst>
-            <a:ext uri="{909E8E84-426E-40DD-AFC4-6F175D3DCCD1}">
-              <a14:hiddenFill xmlns:a14="http://schemas.microsoft.com/office/drawing/2010/main">
-                <a:solidFill>
-                  <a:srgbClr val="FFFFFF"/>
-                </a:solidFill>
-              </a14:hiddenFill>
-            </a:ext>
-          </a:extLst>
-        </p:spPr>
-        <p:txBody>
-          <a:bodyPr vert="horz" wrap="square" lIns="91440" tIns="45720" rIns="91440" bIns="45720" numCol="1" anchor="t" anchorCtr="0" compatLnSpc="1">
-            <a:prstTxWarp prst="textNoShape">
-              <a:avLst/>
-            </a:prstTxWarp>
-          </a:bodyPr>
-          <a:lstStyle/>
-          <a:p>
-            <a:endParaRPr lang="ru-RU"/>
-          </a:p>
-        </p:txBody>
-      </p:sp>
-      <p:sp>
-        <p:nvSpPr>
-          <p:cNvPr id="8" name="AutoShape 8" descr="Picture background"/>
-          <p:cNvSpPr>
-            <a:spLocks noChangeAspect="1" noChangeArrowheads="1"/>
-          </p:cNvSpPr>
-          <p:nvPr/>
-        </p:nvSpPr>
-        <p:spPr bwMode="auto">
-          <a:xfrm>
-            <a:off x="612775" y="312737"/>
-            <a:ext cx="304800" cy="304801"/>
-          </a:xfrm>
-          <a:prstGeom prst="rect">
-            <a:avLst/>
-          </a:prstGeom>
-          <a:noFill/>
-          <a:extLst>
-            <a:ext uri="{909E8E84-426E-40DD-AFC4-6F175D3DCCD1}">
-              <a14:hiddenFill xmlns:a14="http://schemas.microsoft.com/office/drawing/2010/main">
-                <a:solidFill>
-                  <a:srgbClr val="FFFFFF"/>
-                </a:solidFill>
-              </a14:hiddenFill>
-            </a:ext>
-          </a:extLst>
-        </p:spPr>
-        <p:txBody>
-          <a:bodyPr vert="horz" wrap="square" lIns="91440" tIns="45720" rIns="91440" bIns="45720" numCol="1" anchor="t" anchorCtr="0" compatLnSpc="1">
-            <a:prstTxWarp prst="textNoShape">
-              <a:avLst/>
-            </a:prstTxWarp>
-          </a:bodyPr>
-          <a:lstStyle/>
-          <a:p>
-            <a:endParaRPr lang="ru-RU"/>
-          </a:p>
-        </p:txBody>
-      </p:sp>
-      <p:sp>
-        <p:nvSpPr>
-          <p:cNvPr id="10" name="AutoShape 10" descr="Picture background"/>
-          <p:cNvSpPr>
-            <a:spLocks noChangeAspect="1" noChangeArrowheads="1"/>
-          </p:cNvSpPr>
-          <p:nvPr/>
-        </p:nvSpPr>
-        <p:spPr bwMode="auto">
-          <a:xfrm>
-            <a:off x="765175" y="465137"/>
-            <a:ext cx="304800" cy="304801"/>
-          </a:xfrm>
-          <a:prstGeom prst="rect">
-            <a:avLst/>
-          </a:prstGeom>
-          <a:noFill/>
-          <a:extLst>
-            <a:ext uri="{909E8E84-426E-40DD-AFC4-6F175D3DCCD1}">
-              <a14:hiddenFill xmlns:a14="http://schemas.microsoft.com/office/drawing/2010/main">
-                <a:solidFill>
-                  <a:srgbClr val="FFFFFF"/>
-                </a:solidFill>
-              </a14:hiddenFill>
-            </a:ext>
-          </a:extLst>
-        </p:spPr>
-        <p:txBody>
-          <a:bodyPr vert="horz" wrap="square" lIns="91440" tIns="45720" rIns="91440" bIns="45720" numCol="1" anchor="t" anchorCtr="0" compatLnSpc="1">
-            <a:prstTxWarp prst="textNoShape">
-              <a:avLst/>
-            </a:prstTxWarp>
-          </a:bodyPr>
-          <a:lstStyle/>
-          <a:p>
-            <a:endParaRPr lang="ru-RU"/>
-          </a:p>
-        </p:txBody>
-      </p:sp>
-      <p:sp>
-        <p:nvSpPr>
-          <p:cNvPr id="11" name="AutoShape 12" descr="Picture background"/>
-          <p:cNvSpPr>
-            <a:spLocks noChangeAspect="1" noChangeArrowheads="1"/>
-          </p:cNvSpPr>
-          <p:nvPr/>
-        </p:nvSpPr>
-        <p:spPr bwMode="auto">
-          <a:xfrm>
-            <a:off x="917575" y="617537"/>
-            <a:ext cx="304800" cy="304801"/>
-          </a:xfrm>
-          <a:prstGeom prst="rect">
-            <a:avLst/>
-          </a:prstGeom>
-          <a:noFill/>
-          <a:extLst>
-            <a:ext uri="{909E8E84-426E-40DD-AFC4-6F175D3DCCD1}">
-              <a14:hiddenFill xmlns:a14="http://schemas.microsoft.com/office/drawing/2010/main">
-                <a:solidFill>
-                  <a:srgbClr val="FFFFFF"/>
-                </a:solidFill>
-              </a14:hiddenFill>
-            </a:ext>
-          </a:extLst>
-        </p:spPr>
-        <p:txBody>
-          <a:bodyPr vert="horz" wrap="square" lIns="91440" tIns="45720" rIns="91440" bIns="45720" numCol="1" anchor="t" anchorCtr="0" compatLnSpc="1">
-            <a:prstTxWarp prst="textNoShape">
-              <a:avLst/>
-            </a:prstTxWarp>
-          </a:bodyPr>
-          <a:lstStyle/>
-          <a:p>
-            <a:endParaRPr lang="ru-RU"/>
-          </a:p>
-        </p:txBody>
-      </p:sp>
-      <p:sp>
-        <p:nvSpPr>
-          <p:cNvPr id="12" name="AutoShape 14" descr="Picture background"/>
-          <p:cNvSpPr>
-            <a:spLocks noChangeAspect="1" noChangeArrowheads="1"/>
-          </p:cNvSpPr>
-          <p:nvPr/>
-        </p:nvSpPr>
-        <p:spPr bwMode="auto">
-          <a:xfrm>
-            <a:off x="1069975" y="769937"/>
-            <a:ext cx="304800" cy="304801"/>
-          </a:xfrm>
-          <a:prstGeom prst="rect">
-            <a:avLst/>
-          </a:prstGeom>
-          <a:noFill/>
-          <a:extLst>
-            <a:ext uri="{909E8E84-426E-40DD-AFC4-6F175D3DCCD1}">
-              <a14:hiddenFill xmlns:a14="http://schemas.microsoft.com/office/drawing/2010/main">
-                <a:solidFill>
-                  <a:srgbClr val="FFFFFF"/>
-                </a:solidFill>
-              </a14:hiddenFill>
-            </a:ext>
-          </a:extLst>
-        </p:spPr>
-        <p:txBody>
-          <a:bodyPr vert="horz" wrap="square" lIns="91440" tIns="45720" rIns="91440" bIns="45720" numCol="1" anchor="t" anchorCtr="0" compatLnSpc="1">
-            <a:prstTxWarp prst="textNoShape">
-              <a:avLst/>
-            </a:prstTxWarp>
-          </a:bodyPr>
-          <a:lstStyle/>
-          <a:p>
-            <a:endParaRPr lang="ru-RU"/>
-          </a:p>
-        </p:txBody>
-      </p:sp>
-      <p:sp>
-        <p:nvSpPr>
-          <p:cNvPr id="13" name="AutoShape 16" descr="Picture background"/>
-          <p:cNvSpPr>
-            <a:spLocks noChangeAspect="1" noChangeArrowheads="1"/>
-          </p:cNvSpPr>
-          <p:nvPr/>
-        </p:nvSpPr>
-        <p:spPr bwMode="auto">
-          <a:xfrm>
-            <a:off x="1222375" y="922337"/>
-            <a:ext cx="304800" cy="304801"/>
-          </a:xfrm>
-          <a:prstGeom prst="rect">
-            <a:avLst/>
-          </a:prstGeom>
-          <a:noFill/>
-          <a:extLst>
-            <a:ext uri="{909E8E84-426E-40DD-AFC4-6F175D3DCCD1}">
-              <a14:hiddenFill xmlns:a14="http://schemas.microsoft.com/office/drawing/2010/main">
-                <a:solidFill>
-                  <a:srgbClr val="FFFFFF"/>
-                </a:solidFill>
-              </a14:hiddenFill>
-            </a:ext>
-          </a:extLst>
-        </p:spPr>
-        <p:txBody>
-          <a:bodyPr vert="horz" wrap="square" lIns="91440" tIns="45720" rIns="91440" bIns="45720" numCol="1" anchor="t" anchorCtr="0" compatLnSpc="1">
-            <a:prstTxWarp prst="textNoShape">
-              <a:avLst/>
-            </a:prstTxWarp>
-          </a:bodyPr>
-          <a:lstStyle/>
-          <a:p>
-            <a:endParaRPr lang="ru-RU"/>
-          </a:p>
-        </p:txBody>
-      </p:sp>
-      <p:sp>
-        <p:nvSpPr>
-          <p:cNvPr id="14" name="AutoShape 18" descr="Picture background"/>
-          <p:cNvSpPr>
-            <a:spLocks noChangeAspect="1" noChangeArrowheads="1"/>
-          </p:cNvSpPr>
-          <p:nvPr/>
-        </p:nvSpPr>
-        <p:spPr bwMode="auto">
-          <a:xfrm>
-            <a:off x="1374775" y="1074737"/>
-            <a:ext cx="304800" cy="304801"/>
-          </a:xfrm>
-          <a:prstGeom prst="rect">
-            <a:avLst/>
-          </a:prstGeom>
-          <a:noFill/>
-          <a:extLst>
-            <a:ext uri="{909E8E84-426E-40DD-AFC4-6F175D3DCCD1}">
-              <a14:hiddenFill xmlns:a14="http://schemas.microsoft.com/office/drawing/2010/main">
-                <a:solidFill>
-                  <a:srgbClr val="FFFFFF"/>
-                </a:solidFill>
-              </a14:hiddenFill>
-            </a:ext>
-          </a:extLst>
-        </p:spPr>
-        <p:txBody>
-          <a:bodyPr vert="horz" wrap="square" lIns="91440" tIns="45720" rIns="91440" bIns="45720" numCol="1" anchor="t" anchorCtr="0" compatLnSpc="1">
-            <a:prstTxWarp prst="textNoShape">
-              <a:avLst/>
-            </a:prstTxWarp>
-          </a:bodyPr>
-          <a:lstStyle/>
-          <a:p>
-            <a:endParaRPr lang="ru-RU"/>
-          </a:p>
-        </p:txBody>
-      </p:sp>
-      <p:sp>
-        <p:nvSpPr>
-          <p:cNvPr id="15" name="AutoShape 20" descr="Picture background"/>
-          <p:cNvSpPr>
-            <a:spLocks noChangeAspect="1" noChangeArrowheads="1"/>
-          </p:cNvSpPr>
-          <p:nvPr/>
-        </p:nvSpPr>
-        <p:spPr bwMode="auto">
-          <a:xfrm>
-            <a:off x="1527175" y="1227137"/>
-            <a:ext cx="304800" cy="304801"/>
-          </a:xfrm>
-          <a:prstGeom prst="rect">
-            <a:avLst/>
-          </a:prstGeom>
-          <a:noFill/>
-          <a:extLst>
-            <a:ext uri="{909E8E84-426E-40DD-AFC4-6F175D3DCCD1}">
-              <a14:hiddenFill xmlns:a14="http://schemas.microsoft.com/office/drawing/2010/main">
-                <a:solidFill>
-                  <a:srgbClr val="FFFFFF"/>
-                </a:solidFill>
-              </a14:hiddenFill>
-            </a:ext>
-          </a:extLst>
-        </p:spPr>
-        <p:txBody>
-          <a:bodyPr vert="horz" wrap="square" lIns="91440" tIns="45720" rIns="91440" bIns="45720" numCol="1" anchor="t" anchorCtr="0" compatLnSpc="1">
-            <a:prstTxWarp prst="textNoShape">
-              <a:avLst/>
-            </a:prstTxWarp>
-          </a:bodyPr>
-          <a:lstStyle/>
-          <a:p>
-            <a:endParaRPr lang="ru-RU"/>
+            <a:pPr algn="ctr"/>
+            <a:r>
+              <a:rPr lang="ru-RU" sz="1600" dirty="0" smtClean="0">
+                <a:latin typeface="Times New Roman" panose="02020603050405020304" pitchFamily="18" charset="0"/>
+                <a:cs typeface="Times New Roman" panose="02020603050405020304" pitchFamily="18" charset="0"/>
+              </a:rPr>
+              <a:t>Выбор продукта и подвал сайта</a:t>
+            </a:r>
+            <a:endParaRPr lang="ru-RU" sz="1600" dirty="0">
+              <a:latin typeface="Times New Roman" panose="02020603050405020304" pitchFamily="18" charset="0"/>
+              <a:cs typeface="Times New Roman" panose="02020603050405020304" pitchFamily="18" charset="0"/>
+            </a:endParaRPr>
           </a:p>
         </p:txBody>
       </p:sp>
       <p:pic>
         <p:nvPicPr>
-          <p:cNvPr id="3093" name="Picture 21"/>
+          <p:cNvPr id="4100" name="Picture 4"/>
           <p:cNvPicPr>
             <a:picLocks noChangeAspect="1" noChangeArrowheads="1"/>
           </p:cNvPicPr>
@@ -5155,8 +5194,49 @@
         </p:blipFill>
         <p:spPr bwMode="auto">
           <a:xfrm>
-            <a:off x="6080901" y="860831"/>
-            <a:ext cx="2200275" cy="1476375"/>
+            <a:off x="342900" y="743485"/>
+            <a:ext cx="4167188" cy="5104865"/>
+          </a:xfrm>
+          <a:prstGeom prst="rect">
+            <a:avLst/>
+          </a:prstGeom>
+          <a:noFill/>
+          <a:extLst>
+            <a:ext uri="{909E8E84-426E-40DD-AFC4-6F175D3DCCD1}">
+              <a14:hiddenFill xmlns:a14="http://schemas.microsoft.com/office/drawing/2010/main">
+                <a:solidFill>
+                  <a:srgbClr val="FFFFFF"/>
+                </a:solidFill>
+              </a14:hiddenFill>
+            </a:ext>
+          </a:extLst>
+        </p:spPr>
+      </p:pic>
+      <p:pic>
+        <p:nvPicPr>
+          <p:cNvPr id="3074" name="Picture 2"/>
+          <p:cNvPicPr>
+            <a:picLocks noChangeAspect="1" noChangeArrowheads="1"/>
+          </p:cNvPicPr>
+          <p:nvPr/>
+        </p:nvPicPr>
+        <p:blipFill>
+          <a:blip r:embed="rId3">
+            <a:extLst>
+              <a:ext uri="{28A0092B-C50C-407E-A947-70E740481C1C}">
+                <a14:useLocalDpi xmlns:a14="http://schemas.microsoft.com/office/drawing/2010/main" val="0"/>
+              </a:ext>
+            </a:extLst>
+          </a:blip>
+          <a:srcRect/>
+          <a:stretch>
+            <a:fillRect/>
+          </a:stretch>
+        </p:blipFill>
+        <p:spPr bwMode="auto">
+          <a:xfrm>
+            <a:off x="4584320" y="919742"/>
+            <a:ext cx="4451973" cy="5090531"/>
           </a:xfrm>
           <a:prstGeom prst="rect">
             <a:avLst/>
@@ -5196,32 +5276,10 @@
           </a:extLst>
         </p:spPr>
       </p:pic>
-      <p:pic>
-        <p:nvPicPr>
-          <p:cNvPr id="18" name="Рисунок 17"/>
-          <p:cNvPicPr/>
-          <p:nvPr/>
-        </p:nvPicPr>
-        <p:blipFill>
-          <a:blip r:embed="rId3"/>
-          <a:stretch>
-            <a:fillRect/>
-          </a:stretch>
-        </p:blipFill>
-        <p:spPr>
-          <a:xfrm>
-            <a:off x="494101" y="824318"/>
-            <a:ext cx="5084763" cy="5932629"/>
-          </a:xfrm>
-          <a:prstGeom prst="rect">
-            <a:avLst/>
-          </a:prstGeom>
-        </p:spPr>
-      </p:pic>
     </p:spTree>
     <p:extLst>
       <p:ext uri="{BB962C8B-B14F-4D97-AF65-F5344CB8AC3E}">
-        <p14:creationId xmlns:p14="http://schemas.microsoft.com/office/powerpoint/2010/main" val="2643016256"/>
+        <p14:creationId xmlns:p14="http://schemas.microsoft.com/office/powerpoint/2010/main" val="3716399807"/>
       </p:ext>
     </p:extLst>
   </p:cSld>
@@ -5257,84 +5315,32 @@
       </p:grpSpPr>
       <p:sp>
         <p:nvSpPr>
-          <p:cNvPr id="2" name="Номер слайда 1">
-            <a:extLst>
-              <a:ext uri="{FF2B5EF4-FFF2-40B4-BE49-F238E27FC236}">
-                <a16:creationId xmlns:a16="http://schemas.microsoft.com/office/drawing/2014/main" xmlns="" id="{9BE8A756-4F8A-4B4E-9CA4-0B2B58754F23}"/>
-              </a:ext>
-            </a:extLst>
-          </p:cNvPr>
+          <p:cNvPr id="2" name="Заголовок 1"/>
           <p:cNvSpPr>
             <a:spLocks noGrp="1"/>
           </p:cNvSpPr>
           <p:nvPr>
-            <p:ph type="sldNum" sz="quarter" idx="12"/>
+            <p:ph type="title"/>
           </p:nvPr>
         </p:nvSpPr>
         <p:spPr>
           <a:xfrm>
-            <a:off x="6913091" y="179218"/>
-            <a:ext cx="2057400" cy="273844"/>
-          </a:xfrm>
-        </p:spPr>
-        <p:txBody>
-          <a:bodyPr/>
-          <a:lstStyle/>
-          <a:p>
-            <a:fld id="{9085F210-7A9F-4CCE-ADA7-E2F1EE154959}" type="slidenum">
-              <a:rPr lang="ru-RU" sz="2700">
-                <a:latin typeface="Times New Roman" panose="02020603050405020304" pitchFamily="18" charset="0"/>
-                <a:cs typeface="Times New Roman" panose="02020603050405020304" pitchFamily="18" charset="0"/>
-              </a:rPr>
-              <a:t>13</a:t>
-            </a:fld>
-            <a:endParaRPr lang="ru-RU" sz="2700" dirty="0">
-              <a:latin typeface="Times New Roman" panose="02020603050405020304" pitchFamily="18" charset="0"/>
-              <a:cs typeface="Times New Roman" panose="02020603050405020304" pitchFamily="18" charset="0"/>
-            </a:endParaRPr>
-          </a:p>
-        </p:txBody>
-      </p:sp>
-      <p:sp>
-        <p:nvSpPr>
-          <p:cNvPr id="3" name="Прямоугольник 2">
-            <a:extLst>
-              <a:ext uri="{FF2B5EF4-FFF2-40B4-BE49-F238E27FC236}">
-                <a16:creationId xmlns:a16="http://schemas.microsoft.com/office/drawing/2014/main" xmlns="" id="{F1F27FB0-1F6C-44A1-A435-43CA134E566B}"/>
-              </a:ext>
-            </a:extLst>
-          </p:cNvPr>
-          <p:cNvSpPr/>
-          <p:nvPr/>
-        </p:nvSpPr>
-        <p:spPr>
-          <a:xfrm>
-            <a:off x="214762" y="179218"/>
-            <a:ext cx="2358210" cy="400110"/>
-          </a:xfrm>
-          <a:prstGeom prst="rect">
-            <a:avLst/>
-          </a:prstGeom>
-        </p:spPr>
-        <p:txBody>
-          <a:bodyPr wrap="none">
-            <a:spAutoFit/>
+            <a:off x="87174" y="159030"/>
+            <a:ext cx="3290340" cy="418488"/>
+          </a:xfrm>
+        </p:spPr>
+        <p:txBody>
+          <a:bodyPr>
+            <a:noAutofit/>
           </a:bodyPr>
           <a:lstStyle/>
           <a:p>
             <a:r>
-              <a:rPr lang="ru-RU" sz="2000" b="1" dirty="0">
-                <a:latin typeface="Times New Roman" panose="02020603050405020304" pitchFamily="18" charset="0"/>
-                <a:cs typeface="Times New Roman" panose="02020603050405020304" pitchFamily="18" charset="0"/>
-              </a:rPr>
-              <a:t>Главная </a:t>
-            </a:r>
-            <a:r>
               <a:rPr lang="ru-RU" sz="2000" b="1" dirty="0" smtClean="0">
                 <a:latin typeface="Times New Roman" panose="02020603050405020304" pitchFamily="18" charset="0"/>
                 <a:cs typeface="Times New Roman" panose="02020603050405020304" pitchFamily="18" charset="0"/>
               </a:rPr>
-              <a:t>страница</a:t>
+              <a:t>О компании</a:t>
             </a:r>
             <a:endParaRPr lang="ru-RU" sz="2000" b="1" dirty="0">
               <a:latin typeface="Times New Roman" panose="02020603050405020304" pitchFamily="18" charset="0"/>
@@ -5345,10 +5351,44 @@
       </p:sp>
       <p:sp>
         <p:nvSpPr>
-          <p:cNvPr id="7" name="TextBox 6">
+          <p:cNvPr id="4" name="Номер слайда 3"/>
+          <p:cNvSpPr>
+            <a:spLocks noGrp="1"/>
+          </p:cNvSpPr>
+          <p:nvPr>
+            <p:ph type="sldNum" sz="quarter" idx="12"/>
+          </p:nvPr>
+        </p:nvSpPr>
+        <p:spPr>
+          <a:xfrm>
+            <a:off x="6927508" y="159030"/>
+            <a:ext cx="2057400" cy="273844"/>
+          </a:xfrm>
+        </p:spPr>
+        <p:txBody>
+          <a:bodyPr/>
+          <a:lstStyle/>
+          <a:p>
+            <a:fld id="{9085F210-7A9F-4CCE-ADA7-E2F1EE154959}" type="slidenum">
+              <a:rPr lang="ru-RU" sz="2700">
+                <a:latin typeface="Times New Roman" panose="02020603050405020304" pitchFamily="18" charset="0"/>
+                <a:cs typeface="Times New Roman" panose="02020603050405020304" pitchFamily="18" charset="0"/>
+              </a:rPr>
+              <a:t>13</a:t>
+            </a:fld>
+            <a:endParaRPr lang="ru-RU" dirty="0">
+              <a:latin typeface="Times New Roman" panose="02020603050405020304" pitchFamily="18" charset="0"/>
+              <a:cs typeface="Times New Roman" panose="02020603050405020304" pitchFamily="18" charset="0"/>
+            </a:endParaRPr>
+          </a:p>
+        </p:txBody>
+      </p:sp>
+      <p:sp>
+        <p:nvSpPr>
+          <p:cNvPr id="9" name="TextBox 8">
             <a:extLst>
               <a:ext uri="{FF2B5EF4-FFF2-40B4-BE49-F238E27FC236}">
-                <a16:creationId xmlns:a16="http://schemas.microsoft.com/office/drawing/2014/main" xmlns="" id="{4A43B050-07A0-4514-AC09-5D92151B5A5B}"/>
+                <a16:creationId xmlns:a16="http://schemas.microsoft.com/office/drawing/2014/main" xmlns="" id="{42642DA8-38FB-40C2-A8E5-E2D7DE3F20BE}"/>
               </a:ext>
             </a:extLst>
           </p:cNvPr>
@@ -5357,8 +5397,8 @@
         </p:nvSpPr>
         <p:spPr>
           <a:xfrm>
-            <a:off x="1277437" y="6086698"/>
-            <a:ext cx="1726627" cy="338554"/>
+            <a:off x="996014" y="4395959"/>
+            <a:ext cx="2730501" cy="584775"/>
           </a:xfrm>
           <a:prstGeom prst="rect">
             <a:avLst/>
@@ -5366,18 +5406,22 @@
           <a:noFill/>
         </p:spPr>
         <p:txBody>
-          <a:bodyPr wrap="none" rtlCol="0">
+          <a:bodyPr wrap="square" rtlCol="0">
             <a:spAutoFit/>
           </a:bodyPr>
           <a:lstStyle/>
           <a:p>
             <a:r>
-              <a:rPr lang="ru-RU" sz="1600" dirty="0">
-                <a:latin typeface="Times New Roman" panose="02020603050405020304" pitchFamily="18" charset="0"/>
-                <a:cs typeface="Times New Roman" panose="02020603050405020304" pitchFamily="18" charset="0"/>
-              </a:rPr>
-              <a:t>Главная страница</a:t>
-            </a:r>
+              <a:rPr lang="ru-RU" sz="1600" dirty="0" smtClean="0">
+                <a:latin typeface="Times New Roman" panose="02020603050405020304" pitchFamily="18" charset="0"/>
+                <a:cs typeface="Times New Roman" panose="02020603050405020304" pitchFamily="18" charset="0"/>
+              </a:rPr>
+              <a:t>Начало информационной страницы</a:t>
+            </a:r>
+            <a:endParaRPr lang="ru-RU" sz="1600" dirty="0">
+              <a:latin typeface="Times New Roman" panose="02020603050405020304" pitchFamily="18" charset="0"/>
+              <a:cs typeface="Times New Roman" panose="02020603050405020304" pitchFamily="18" charset="0"/>
+            </a:endParaRPr>
           </a:p>
         </p:txBody>
       </p:sp>
@@ -5386,7 +5430,7 @@
           <p:cNvPr id="10" name="TextBox 9">
             <a:extLst>
               <a:ext uri="{FF2B5EF4-FFF2-40B4-BE49-F238E27FC236}">
-                <a16:creationId xmlns:a16="http://schemas.microsoft.com/office/drawing/2014/main" xmlns="" id="{55B50A2E-4A39-49F0-B727-CDF21C8341D9}"/>
+                <a16:creationId xmlns:a16="http://schemas.microsoft.com/office/drawing/2014/main" xmlns="" id="{42642DA8-38FB-40C2-A8E5-E2D7DE3F20BE}"/>
               </a:ext>
             </a:extLst>
           </p:cNvPr>
@@ -5395,8 +5439,8 @@
         </p:nvSpPr>
         <p:spPr>
           <a:xfrm>
-            <a:off x="4584320" y="6088005"/>
-            <a:ext cx="3940408" cy="338554"/>
+            <a:off x="6016893" y="6363244"/>
+            <a:ext cx="1481046" cy="300082"/>
           </a:xfrm>
           <a:prstGeom prst="rect">
             <a:avLst/>
@@ -5404,20 +5448,19 @@
           <a:noFill/>
         </p:spPr>
         <p:txBody>
-          <a:bodyPr wrap="square" rtlCol="0">
+          <a:bodyPr wrap="none" rtlCol="0">
             <a:spAutoFit/>
           </a:bodyPr>
           <a:lstStyle/>
           <a:p>
-            <a:pPr algn="ctr"/>
-            <a:r>
-              <a:rPr lang="ru-RU" sz="1600" dirty="0" smtClean="0">
-                <a:latin typeface="Times New Roman" panose="02020603050405020304" pitchFamily="18" charset="0"/>
-                <a:cs typeface="Times New Roman" panose="02020603050405020304" pitchFamily="18" charset="0"/>
-              </a:rPr>
-              <a:t>Выбор продукта и подвал сайта</a:t>
-            </a:r>
-            <a:endParaRPr lang="ru-RU" sz="1600" dirty="0">
+            <a:r>
+              <a:rPr lang="ru-RU" sz="1350" dirty="0" smtClean="0">
+                <a:latin typeface="Times New Roman" panose="02020603050405020304" pitchFamily="18" charset="0"/>
+                <a:cs typeface="Times New Roman" panose="02020603050405020304" pitchFamily="18" charset="0"/>
+              </a:rPr>
+              <a:t>Подвал страницы</a:t>
+            </a:r>
+            <a:endParaRPr lang="ru-RU" sz="1350" dirty="0">
               <a:latin typeface="Times New Roman" panose="02020603050405020304" pitchFamily="18" charset="0"/>
               <a:cs typeface="Times New Roman" panose="02020603050405020304" pitchFamily="18" charset="0"/>
             </a:endParaRPr>
@@ -5426,7 +5469,7 @@
       </p:sp>
       <p:pic>
         <p:nvPicPr>
-          <p:cNvPr id="4100" name="Picture 4"/>
+          <p:cNvPr id="6146" name="Picture 2"/>
           <p:cNvPicPr>
             <a:picLocks noChangeAspect="1" noChangeArrowheads="1"/>
           </p:cNvPicPr>
@@ -5447,27 +5490,50 @@
         </p:blipFill>
         <p:spPr bwMode="auto">
           <a:xfrm>
-            <a:off x="342900" y="743485"/>
-            <a:ext cx="4167188" cy="5104865"/>
+            <a:off x="93407" y="819150"/>
+            <a:ext cx="4535716" cy="3409949"/>
           </a:xfrm>
           <a:prstGeom prst="rect">
             <a:avLst/>
           </a:prstGeom>
           <a:noFill/>
+          <a:ln>
+            <a:noFill/>
+          </a:ln>
+          <a:effectLst/>
           <a:extLst>
             <a:ext uri="{909E8E84-426E-40DD-AFC4-6F175D3DCCD1}">
               <a14:hiddenFill xmlns:a14="http://schemas.microsoft.com/office/drawing/2010/main">
                 <a:solidFill>
-                  <a:srgbClr val="FFFFFF"/>
+                  <a:schemeClr val="accent1"/>
                 </a:solidFill>
               </a14:hiddenFill>
             </a:ext>
+            <a:ext uri="{91240B29-F687-4F45-9708-019B960494DF}">
+              <a14:hiddenLine xmlns:a14="http://schemas.microsoft.com/office/drawing/2010/main" w="9525">
+                <a:solidFill>
+                  <a:schemeClr val="tx1"/>
+                </a:solidFill>
+                <a:miter lim="800000"/>
+                <a:headEnd/>
+                <a:tailEnd/>
+              </a14:hiddenLine>
+            </a:ext>
+            <a:ext uri="{AF507438-7753-43E0-B8FC-AC1667EBCBE1}">
+              <a14:hiddenEffects xmlns:a14="http://schemas.microsoft.com/office/drawing/2010/main">
+                <a:effectLst>
+                  <a:outerShdw dist="35921" dir="2700000" algn="ctr" rotWithShape="0">
+                    <a:schemeClr val="bg2"/>
+                  </a:outerShdw>
+                </a:effectLst>
+              </a14:hiddenEffects>
+            </a:ext>
           </a:extLst>
         </p:spPr>
       </p:pic>
       <p:pic>
         <p:nvPicPr>
-          <p:cNvPr id="4101" name="Picture 5"/>
+          <p:cNvPr id="6147" name="Picture 3"/>
           <p:cNvPicPr>
             <a:picLocks noChangeAspect="1" noChangeArrowheads="1"/>
           </p:cNvPicPr>
@@ -5488,20 +5554,43 @@
         </p:blipFill>
         <p:spPr bwMode="auto">
           <a:xfrm>
-            <a:off x="4584319" y="743485"/>
-            <a:ext cx="3940408" cy="5104865"/>
+            <a:off x="4770808" y="3253376"/>
+            <a:ext cx="4201742" cy="2962275"/>
           </a:xfrm>
           <a:prstGeom prst="rect">
             <a:avLst/>
           </a:prstGeom>
           <a:noFill/>
+          <a:ln>
+            <a:noFill/>
+          </a:ln>
+          <a:effectLst/>
           <a:extLst>
             <a:ext uri="{909E8E84-426E-40DD-AFC4-6F175D3DCCD1}">
               <a14:hiddenFill xmlns:a14="http://schemas.microsoft.com/office/drawing/2010/main">
                 <a:solidFill>
-                  <a:srgbClr val="FFFFFF"/>
+                  <a:schemeClr val="accent1"/>
                 </a:solidFill>
               </a14:hiddenFill>
+            </a:ext>
+            <a:ext uri="{91240B29-F687-4F45-9708-019B960494DF}">
+              <a14:hiddenLine xmlns:a14="http://schemas.microsoft.com/office/drawing/2010/main" w="9525">
+                <a:solidFill>
+                  <a:schemeClr val="tx1"/>
+                </a:solidFill>
+                <a:miter lim="800000"/>
+                <a:headEnd/>
+                <a:tailEnd/>
+              </a14:hiddenLine>
+            </a:ext>
+            <a:ext uri="{AF507438-7753-43E0-B8FC-AC1667EBCBE1}">
+              <a14:hiddenEffects xmlns:a14="http://schemas.microsoft.com/office/drawing/2010/main">
+                <a:effectLst>
+                  <a:outerShdw dist="35921" dir="2700000" algn="ctr" rotWithShape="0">
+                    <a:schemeClr val="bg2"/>
+                  </a:outerShdw>
+                </a:effectLst>
+              </a14:hiddenEffects>
             </a:ext>
           </a:extLst>
         </p:spPr>
@@ -5509,7 +5598,7 @@
     </p:spTree>
     <p:extLst>
       <p:ext uri="{BB962C8B-B14F-4D97-AF65-F5344CB8AC3E}">
-        <p14:creationId xmlns:p14="http://schemas.microsoft.com/office/powerpoint/2010/main" val="3716399807"/>
+        <p14:creationId xmlns:p14="http://schemas.microsoft.com/office/powerpoint/2010/main" val="3639243475"/>
       </p:ext>
     </p:extLst>
   </p:cSld>
@@ -6048,8 +6137,8 @@
         </p:nvSpPr>
         <p:spPr>
           <a:xfrm>
-            <a:off x="87174" y="159030"/>
-            <a:ext cx="3290340" cy="418488"/>
+            <a:off x="213919" y="115495"/>
+            <a:ext cx="3666103" cy="477271"/>
           </a:xfrm>
         </p:spPr>
         <p:txBody>
@@ -6063,7 +6152,7 @@
                 <a:latin typeface="Times New Roman" panose="02020603050405020304" pitchFamily="18" charset="0"/>
                 <a:cs typeface="Times New Roman" panose="02020603050405020304" pitchFamily="18" charset="0"/>
               </a:rPr>
-              <a:t>О компании</a:t>
+              <a:t>Расчёт стоимости полиса</a:t>
             </a:r>
             <a:endParaRPr lang="ru-RU" sz="2000" b="1" dirty="0">
               <a:latin typeface="Times New Roman" panose="02020603050405020304" pitchFamily="18" charset="0"/>
@@ -6084,7 +6173,7 @@
         </p:nvSpPr>
         <p:spPr>
           <a:xfrm>
-            <a:off x="6927508" y="159030"/>
+            <a:off x="6933687" y="217209"/>
             <a:ext cx="2057400" cy="273844"/>
           </a:xfrm>
         </p:spPr>
@@ -6099,229 +6188,39 @@
               </a:rPr>
               <a:t>16</a:t>
             </a:fld>
-            <a:endParaRPr lang="ru-RU" dirty="0">
+            <a:endParaRPr lang="ru-RU" sz="2700" dirty="0">
               <a:latin typeface="Times New Roman" panose="02020603050405020304" pitchFamily="18" charset="0"/>
               <a:cs typeface="Times New Roman" panose="02020603050405020304" pitchFamily="18" charset="0"/>
             </a:endParaRPr>
           </a:p>
         </p:txBody>
       </p:sp>
-      <p:sp>
-        <p:nvSpPr>
-          <p:cNvPr id="9" name="TextBox 8">
-            <a:extLst>
-              <a:ext uri="{FF2B5EF4-FFF2-40B4-BE49-F238E27FC236}">
-                <a16:creationId xmlns:a16="http://schemas.microsoft.com/office/drawing/2014/main" xmlns="" id="{42642DA8-38FB-40C2-A8E5-E2D7DE3F20BE}"/>
-              </a:ext>
-            </a:extLst>
-          </p:cNvPr>
-          <p:cNvSpPr txBox="1"/>
-          <p:nvPr/>
-        </p:nvSpPr>
-        <p:spPr>
-          <a:xfrm>
-            <a:off x="996014" y="4395959"/>
-            <a:ext cx="2730501" cy="584775"/>
-          </a:xfrm>
-          <a:prstGeom prst="rect">
-            <a:avLst/>
-          </a:prstGeom>
-          <a:noFill/>
-        </p:spPr>
-        <p:txBody>
-          <a:bodyPr wrap="square" rtlCol="0">
-            <a:spAutoFit/>
-          </a:bodyPr>
-          <a:lstStyle/>
-          <a:p>
-            <a:r>
-              <a:rPr lang="ru-RU" sz="1600" dirty="0" smtClean="0">
-                <a:latin typeface="Times New Roman" panose="02020603050405020304" pitchFamily="18" charset="0"/>
-                <a:cs typeface="Times New Roman" panose="02020603050405020304" pitchFamily="18" charset="0"/>
-              </a:rPr>
-              <a:t>Начало информационной страницы</a:t>
-            </a:r>
-            <a:endParaRPr lang="ru-RU" sz="1600" dirty="0">
-              <a:latin typeface="Times New Roman" panose="02020603050405020304" pitchFamily="18" charset="0"/>
-              <a:cs typeface="Times New Roman" panose="02020603050405020304" pitchFamily="18" charset="0"/>
-            </a:endParaRPr>
-          </a:p>
-        </p:txBody>
-      </p:sp>
-      <p:sp>
-        <p:nvSpPr>
-          <p:cNvPr id="10" name="TextBox 9">
-            <a:extLst>
-              <a:ext uri="{FF2B5EF4-FFF2-40B4-BE49-F238E27FC236}">
-                <a16:creationId xmlns:a16="http://schemas.microsoft.com/office/drawing/2014/main" xmlns="" id="{42642DA8-38FB-40C2-A8E5-E2D7DE3F20BE}"/>
-              </a:ext>
-            </a:extLst>
-          </p:cNvPr>
-          <p:cNvSpPr txBox="1"/>
-          <p:nvPr/>
-        </p:nvSpPr>
-        <p:spPr>
-          <a:xfrm>
-            <a:off x="6016893" y="6363244"/>
-            <a:ext cx="1481046" cy="300082"/>
-          </a:xfrm>
-          <a:prstGeom prst="rect">
-            <a:avLst/>
-          </a:prstGeom>
-          <a:noFill/>
-        </p:spPr>
-        <p:txBody>
-          <a:bodyPr wrap="none" rtlCol="0">
-            <a:spAutoFit/>
-          </a:bodyPr>
-          <a:lstStyle/>
-          <a:p>
-            <a:r>
-              <a:rPr lang="ru-RU" sz="1350" dirty="0" smtClean="0">
-                <a:latin typeface="Times New Roman" panose="02020603050405020304" pitchFamily="18" charset="0"/>
-                <a:cs typeface="Times New Roman" panose="02020603050405020304" pitchFamily="18" charset="0"/>
-              </a:rPr>
-              <a:t>Подвал страницы</a:t>
-            </a:r>
-            <a:endParaRPr lang="ru-RU" sz="1350" dirty="0">
-              <a:latin typeface="Times New Roman" panose="02020603050405020304" pitchFamily="18" charset="0"/>
-              <a:cs typeface="Times New Roman" panose="02020603050405020304" pitchFamily="18" charset="0"/>
-            </a:endParaRPr>
-          </a:p>
-        </p:txBody>
-      </p:sp>
       <p:pic>
         <p:nvPicPr>
-          <p:cNvPr id="6146" name="Picture 2"/>
-          <p:cNvPicPr>
-            <a:picLocks noChangeAspect="1" noChangeArrowheads="1"/>
-          </p:cNvPicPr>
+          <p:cNvPr id="8" name="Рисунок 7"/>
+          <p:cNvPicPr/>
           <p:nvPr/>
         </p:nvPicPr>
         <p:blipFill>
-          <a:blip r:embed="rId2">
-            <a:extLst>
-              <a:ext uri="{28A0092B-C50C-407E-A947-70E740481C1C}">
-                <a14:useLocalDpi xmlns:a14="http://schemas.microsoft.com/office/drawing/2010/main" val="0"/>
-              </a:ext>
-            </a:extLst>
-          </a:blip>
-          <a:srcRect/>
+          <a:blip r:embed="rId2"/>
           <a:stretch>
             <a:fillRect/>
           </a:stretch>
         </p:blipFill>
-        <p:spPr bwMode="auto">
-          <a:xfrm>
-            <a:off x="93407" y="819150"/>
-            <a:ext cx="4535716" cy="3409949"/>
+        <p:spPr>
+          <a:xfrm>
+            <a:off x="238124" y="910371"/>
+            <a:ext cx="8620125" cy="5480904"/>
           </a:xfrm>
           <a:prstGeom prst="rect">
             <a:avLst/>
           </a:prstGeom>
-          <a:noFill/>
-          <a:ln>
-            <a:noFill/>
-          </a:ln>
-          <a:effectLst/>
-          <a:extLst>
-            <a:ext uri="{909E8E84-426E-40DD-AFC4-6F175D3DCCD1}">
-              <a14:hiddenFill xmlns:a14="http://schemas.microsoft.com/office/drawing/2010/main">
-                <a:solidFill>
-                  <a:schemeClr val="accent1"/>
-                </a:solidFill>
-              </a14:hiddenFill>
-            </a:ext>
-            <a:ext uri="{91240B29-F687-4F45-9708-019B960494DF}">
-              <a14:hiddenLine xmlns:a14="http://schemas.microsoft.com/office/drawing/2010/main" w="9525">
-                <a:solidFill>
-                  <a:schemeClr val="tx1"/>
-                </a:solidFill>
-                <a:miter lim="800000"/>
-                <a:headEnd/>
-                <a:tailEnd/>
-              </a14:hiddenLine>
-            </a:ext>
-            <a:ext uri="{AF507438-7753-43E0-B8FC-AC1667EBCBE1}">
-              <a14:hiddenEffects xmlns:a14="http://schemas.microsoft.com/office/drawing/2010/main">
-                <a:effectLst>
-                  <a:outerShdw dist="35921" dir="2700000" algn="ctr" rotWithShape="0">
-                    <a:schemeClr val="bg2"/>
-                  </a:outerShdw>
-                </a:effectLst>
-              </a14:hiddenEffects>
-            </a:ext>
-          </a:extLst>
-        </p:spPr>
-      </p:pic>
-      <p:pic>
-        <p:nvPicPr>
-          <p:cNvPr id="6147" name="Picture 3"/>
-          <p:cNvPicPr>
-            <a:picLocks noChangeAspect="1" noChangeArrowheads="1"/>
-          </p:cNvPicPr>
-          <p:nvPr/>
-        </p:nvPicPr>
-        <p:blipFill>
-          <a:blip r:embed="rId3">
-            <a:extLst>
-              <a:ext uri="{28A0092B-C50C-407E-A947-70E740481C1C}">
-                <a14:useLocalDpi xmlns:a14="http://schemas.microsoft.com/office/drawing/2010/main" val="0"/>
-              </a:ext>
-            </a:extLst>
-          </a:blip>
-          <a:srcRect/>
-          <a:stretch>
-            <a:fillRect/>
-          </a:stretch>
-        </p:blipFill>
-        <p:spPr bwMode="auto">
-          <a:xfrm>
-            <a:off x="4770808" y="3253376"/>
-            <a:ext cx="4201742" cy="2962275"/>
-          </a:xfrm>
-          <a:prstGeom prst="rect">
-            <a:avLst/>
-          </a:prstGeom>
-          <a:noFill/>
-          <a:ln>
-            <a:noFill/>
-          </a:ln>
-          <a:effectLst/>
-          <a:extLst>
-            <a:ext uri="{909E8E84-426E-40DD-AFC4-6F175D3DCCD1}">
-              <a14:hiddenFill xmlns:a14="http://schemas.microsoft.com/office/drawing/2010/main">
-                <a:solidFill>
-                  <a:schemeClr val="accent1"/>
-                </a:solidFill>
-              </a14:hiddenFill>
-            </a:ext>
-            <a:ext uri="{91240B29-F687-4F45-9708-019B960494DF}">
-              <a14:hiddenLine xmlns:a14="http://schemas.microsoft.com/office/drawing/2010/main" w="9525">
-                <a:solidFill>
-                  <a:schemeClr val="tx1"/>
-                </a:solidFill>
-                <a:miter lim="800000"/>
-                <a:headEnd/>
-                <a:tailEnd/>
-              </a14:hiddenLine>
-            </a:ext>
-            <a:ext uri="{AF507438-7753-43E0-B8FC-AC1667EBCBE1}">
-              <a14:hiddenEffects xmlns:a14="http://schemas.microsoft.com/office/drawing/2010/main">
-                <a:effectLst>
-                  <a:outerShdw dist="35921" dir="2700000" algn="ctr" rotWithShape="0">
-                    <a:schemeClr val="bg2"/>
-                  </a:outerShdw>
-                </a:effectLst>
-              </a14:hiddenEffects>
-            </a:ext>
-          </a:extLst>
         </p:spPr>
       </p:pic>
     </p:spTree>
     <p:extLst>
       <p:ext uri="{BB962C8B-B14F-4D97-AF65-F5344CB8AC3E}">
-        <p14:creationId xmlns:p14="http://schemas.microsoft.com/office/powerpoint/2010/main" val="3639243475"/>
+        <p14:creationId xmlns:p14="http://schemas.microsoft.com/office/powerpoint/2010/main" val="1621956115"/>
       </p:ext>
     </p:extLst>
   </p:cSld>
@@ -6382,7 +6281,7 @@
                 <a:latin typeface="Times New Roman" panose="02020603050405020304" pitchFamily="18" charset="0"/>
                 <a:cs typeface="Times New Roman" panose="02020603050405020304" pitchFamily="18" charset="0"/>
               </a:rPr>
-              <a:t>Расчёт и оплата полиса</a:t>
+              <a:t>Оплата полиса</a:t>
             </a:r>
             <a:endParaRPr lang="ru-RU" sz="2000" b="1" dirty="0">
               <a:latin typeface="Times New Roman" panose="02020603050405020304" pitchFamily="18" charset="0"/>
@@ -6425,198 +6324,26 @@
           </a:p>
         </p:txBody>
       </p:sp>
-      <p:sp>
-        <p:nvSpPr>
-          <p:cNvPr id="10" name="TextBox 9">
-            <a:extLst>
-              <a:ext uri="{FF2B5EF4-FFF2-40B4-BE49-F238E27FC236}">
-                <a16:creationId xmlns:a16="http://schemas.microsoft.com/office/drawing/2014/main" xmlns="" id="{42642DA8-38FB-40C2-A8E5-E2D7DE3F20BE}"/>
-              </a:ext>
-            </a:extLst>
-          </p:cNvPr>
-          <p:cNvSpPr txBox="1"/>
-          <p:nvPr/>
-        </p:nvSpPr>
-        <p:spPr>
-          <a:xfrm>
-            <a:off x="764840" y="4161884"/>
-            <a:ext cx="3235660" cy="300082"/>
-          </a:xfrm>
-          <a:prstGeom prst="rect">
-            <a:avLst/>
-          </a:prstGeom>
-          <a:noFill/>
-        </p:spPr>
-        <p:txBody>
-          <a:bodyPr wrap="square" rtlCol="0">
-            <a:spAutoFit/>
-          </a:bodyPr>
-          <a:lstStyle/>
-          <a:p>
-            <a:pPr algn="ctr"/>
-            <a:r>
-              <a:rPr lang="ru-RU" sz="1350" dirty="0" smtClean="0">
-                <a:latin typeface="Times New Roman" panose="02020603050405020304" pitchFamily="18" charset="0"/>
-                <a:cs typeface="Times New Roman" panose="02020603050405020304" pitchFamily="18" charset="0"/>
-              </a:rPr>
-              <a:t>Калькулятор страховки</a:t>
-            </a:r>
-            <a:endParaRPr lang="ru-RU" sz="1350" dirty="0">
-              <a:latin typeface="Times New Roman" panose="02020603050405020304" pitchFamily="18" charset="0"/>
-              <a:cs typeface="Times New Roman" panose="02020603050405020304" pitchFamily="18" charset="0"/>
-            </a:endParaRPr>
-          </a:p>
-        </p:txBody>
-      </p:sp>
-      <p:sp>
-        <p:nvSpPr>
-          <p:cNvPr id="20" name="TextBox 19">
-            <a:extLst>
-              <a:ext uri="{FF2B5EF4-FFF2-40B4-BE49-F238E27FC236}">
-                <a16:creationId xmlns:a16="http://schemas.microsoft.com/office/drawing/2014/main" xmlns="" id="{42642DA8-38FB-40C2-A8E5-E2D7DE3F20BE}"/>
-              </a:ext>
-            </a:extLst>
-          </p:cNvPr>
-          <p:cNvSpPr txBox="1"/>
-          <p:nvPr/>
-        </p:nvSpPr>
-        <p:spPr>
-          <a:xfrm>
-            <a:off x="5957671" y="2917606"/>
-            <a:ext cx="1791979" cy="338554"/>
-          </a:xfrm>
-          <a:prstGeom prst="rect">
-            <a:avLst/>
-          </a:prstGeom>
-          <a:noFill/>
-        </p:spPr>
-        <p:txBody>
-          <a:bodyPr wrap="square" rtlCol="0">
-            <a:spAutoFit/>
-          </a:bodyPr>
-          <a:lstStyle/>
-          <a:p>
-            <a:pPr algn="ctr"/>
-            <a:r>
-              <a:rPr lang="ru-RU" sz="1600" dirty="0" smtClean="0">
-                <a:latin typeface="Times New Roman" panose="02020603050405020304" pitchFamily="18" charset="0"/>
-                <a:cs typeface="Times New Roman" panose="02020603050405020304" pitchFamily="18" charset="0"/>
-              </a:rPr>
-              <a:t>Оплата</a:t>
-            </a:r>
-            <a:endParaRPr lang="ru-RU" sz="1600" dirty="0">
-              <a:latin typeface="Times New Roman" panose="02020603050405020304" pitchFamily="18" charset="0"/>
-              <a:cs typeface="Times New Roman" panose="02020603050405020304" pitchFamily="18" charset="0"/>
-            </a:endParaRPr>
-          </a:p>
-        </p:txBody>
-      </p:sp>
       <p:pic>
         <p:nvPicPr>
-          <p:cNvPr id="7170" name="Picture 2" descr="screencapture-localhost-3000-Calculator-2026-04-28-08_06_20"/>
-          <p:cNvPicPr>
-            <a:picLocks noChangeAspect="1" noChangeArrowheads="1"/>
-          </p:cNvPicPr>
+          <p:cNvPr id="9" name="Рисунок 8"/>
+          <p:cNvPicPr/>
           <p:nvPr/>
         </p:nvPicPr>
         <p:blipFill>
-          <a:blip r:embed="rId2" cstate="print">
-            <a:extLst>
-              <a:ext uri="{28A0092B-C50C-407E-A947-70E740481C1C}">
-                <a14:useLocalDpi xmlns:a14="http://schemas.microsoft.com/office/drawing/2010/main" val="0"/>
-              </a:ext>
-            </a:extLst>
-          </a:blip>
-          <a:srcRect/>
+          <a:blip r:embed="rId2"/>
           <a:stretch>
             <a:fillRect/>
           </a:stretch>
         </p:blipFill>
-        <p:spPr bwMode="auto">
-          <a:xfrm>
-            <a:off x="-1" y="895349"/>
-            <a:ext cx="5074543" cy="2924175"/>
+        <p:spPr>
+          <a:xfrm>
+            <a:off x="92496" y="663850"/>
+            <a:ext cx="8937204" cy="5984600"/>
           </a:xfrm>
           <a:prstGeom prst="rect">
             <a:avLst/>
           </a:prstGeom>
-          <a:noFill/>
-          <a:ln>
-            <a:noFill/>
-          </a:ln>
-          <a:extLst>
-            <a:ext uri="{909E8E84-426E-40DD-AFC4-6F175D3DCCD1}">
-              <a14:hiddenFill xmlns:a14="http://schemas.microsoft.com/office/drawing/2010/main">
-                <a:solidFill>
-                  <a:srgbClr val="FFFFFF"/>
-                </a:solidFill>
-              </a14:hiddenFill>
-            </a:ext>
-            <a:ext uri="{91240B29-F687-4F45-9708-019B960494DF}">
-              <a14:hiddenLine xmlns:a14="http://schemas.microsoft.com/office/drawing/2010/main" w="9525">
-                <a:solidFill>
-                  <a:srgbClr val="000000"/>
-                </a:solidFill>
-                <a:miter lim="800000"/>
-                <a:headEnd/>
-                <a:tailEnd/>
-              </a14:hiddenLine>
-            </a:ext>
-          </a:extLst>
-        </p:spPr>
-      </p:pic>
-      <p:pic>
-        <p:nvPicPr>
-          <p:cNvPr id="7171" name="Picture 3" descr="screencapture-localhost-3000-Payment-7-2026-04-28-08_06_30"/>
-          <p:cNvPicPr>
-            <a:picLocks noChangeAspect="1" noChangeArrowheads="1"/>
-          </p:cNvPicPr>
-          <p:nvPr/>
-        </p:nvPicPr>
-        <p:blipFill>
-          <a:blip r:embed="rId3" cstate="print">
-            <a:extLst>
-              <a:ext uri="{28A0092B-C50C-407E-A947-70E740481C1C}">
-                <a14:useLocalDpi xmlns:a14="http://schemas.microsoft.com/office/drawing/2010/main" val="0"/>
-              </a:ext>
-            </a:extLst>
-          </a:blip>
-          <a:srcRect/>
-          <a:stretch>
-            <a:fillRect/>
-          </a:stretch>
-        </p:blipFill>
-        <p:spPr bwMode="auto">
-          <a:xfrm>
-            <a:off x="4257675" y="3548162"/>
-            <a:ext cx="4886324" cy="3309837"/>
-          </a:xfrm>
-          <a:prstGeom prst="rect">
-            <a:avLst/>
-          </a:prstGeom>
-          <a:noFill/>
-          <a:ln>
-            <a:noFill/>
-          </a:ln>
-          <a:extLst>
-            <a:ext uri="{909E8E84-426E-40DD-AFC4-6F175D3DCCD1}">
-              <a14:hiddenFill xmlns:a14="http://schemas.microsoft.com/office/drawing/2010/main">
-                <a:solidFill>
-                  <a:srgbClr val="FFFFFF"/>
-                </a:solidFill>
-              </a14:hiddenFill>
-            </a:ext>
-            <a:ext uri="{91240B29-F687-4F45-9708-019B960494DF}">
-              <a14:hiddenLine xmlns:a14="http://schemas.microsoft.com/office/drawing/2010/main" w="9525">
-                <a:solidFill>
-                  <a:srgbClr val="000000"/>
-                </a:solidFill>
-                <a:miter lim="800000"/>
-                <a:headEnd/>
-                <a:tailEnd/>
-              </a14:hiddenLine>
-            </a:ext>
-          </a:extLst>
         </p:spPr>
       </p:pic>
     </p:spTree>
@@ -6728,56 +6455,24 @@
       </p:sp>
       <p:pic>
         <p:nvPicPr>
-          <p:cNvPr id="8194" name="Picture 2" descr="screencapture-localhost-3000-Accident-2026-04-28-08_04_48"/>
-          <p:cNvPicPr>
-            <a:picLocks noChangeAspect="1" noChangeArrowheads="1"/>
-          </p:cNvPicPr>
+          <p:cNvPr id="6" name="Рисунок 5"/>
+          <p:cNvPicPr/>
           <p:nvPr/>
         </p:nvPicPr>
         <p:blipFill>
-          <a:blip r:embed="rId2">
-            <a:extLst>
-              <a:ext uri="{28A0092B-C50C-407E-A947-70E740481C1C}">
-                <a14:useLocalDpi xmlns:a14="http://schemas.microsoft.com/office/drawing/2010/main" val="0"/>
-              </a:ext>
-            </a:extLst>
-          </a:blip>
-          <a:srcRect/>
+          <a:blip r:embed="rId2"/>
           <a:stretch>
             <a:fillRect/>
           </a:stretch>
         </p:blipFill>
-        <p:spPr bwMode="auto">
-          <a:xfrm>
-            <a:off x="514350" y="1095374"/>
-            <a:ext cx="8540138" cy="4619625"/>
+        <p:spPr>
+          <a:xfrm>
+            <a:off x="563562" y="768348"/>
+            <a:ext cx="7970838" cy="5822951"/>
           </a:xfrm>
           <a:prstGeom prst="rect">
             <a:avLst/>
           </a:prstGeom>
-          <a:noFill/>
-          <a:ln>
-            <a:noFill/>
-          </a:ln>
-          <a:extLst>
-            <a:ext uri="{909E8E84-426E-40DD-AFC4-6F175D3DCCD1}">
-              <a14:hiddenFill xmlns:a14="http://schemas.microsoft.com/office/drawing/2010/main">
-                <a:solidFill>
-                  <a:srgbClr val="FFFFFF"/>
-                </a:solidFill>
-              </a14:hiddenFill>
-            </a:ext>
-            <a:ext uri="{91240B29-F687-4F45-9708-019B960494DF}">
-              <a14:hiddenLine xmlns:a14="http://schemas.microsoft.com/office/drawing/2010/main" w="9525">
-                <a:solidFill>
-                  <a:srgbClr val="000000"/>
-                </a:solidFill>
-                <a:miter lim="800000"/>
-                <a:headEnd/>
-                <a:tailEnd/>
-              </a14:hiddenLine>
-            </a:ext>
-          </a:extLst>
         </p:spPr>
       </p:pic>
     </p:spTree>
@@ -6840,26 +6535,16 @@
           <a:lstStyle/>
           <a:p>
             <a:r>
-              <a:rPr lang="ru-RU" sz="2000" b="1" dirty="0">
-                <a:latin typeface="Times New Roman" panose="02020603050405020304" pitchFamily="18" charset="0"/>
-                <a:cs typeface="Times New Roman" panose="02020603050405020304" pitchFamily="18" charset="0"/>
-              </a:rPr>
-              <a:t>Админ-панель и </a:t>
-            </a:r>
-            <a:r>
               <a:rPr lang="ru-RU" sz="2000" b="1" dirty="0" smtClean="0">
                 <a:latin typeface="Times New Roman" panose="02020603050405020304" pitchFamily="18" charset="0"/>
                 <a:cs typeface="Times New Roman" panose="02020603050405020304" pitchFamily="18" charset="0"/>
               </a:rPr>
-              <a:t>панель </a:t>
-            </a:r>
-            <a:r>
-              <a:rPr lang="ru-RU" sz="2000" b="1" dirty="0">
-                <a:latin typeface="Times New Roman" panose="02020603050405020304" pitchFamily="18" charset="0"/>
-                <a:cs typeface="Times New Roman" panose="02020603050405020304" pitchFamily="18" charset="0"/>
-              </a:rPr>
-              <a:t>страхового агента</a:t>
-            </a:r>
+              <a:t>Админ-панель</a:t>
+            </a:r>
+            <a:endParaRPr lang="ru-RU" sz="2000" b="1" dirty="0">
+              <a:latin typeface="Times New Roman" panose="02020603050405020304" pitchFamily="18" charset="0"/>
+              <a:cs typeface="Times New Roman" panose="02020603050405020304" pitchFamily="18" charset="0"/>
+            </a:endParaRPr>
           </a:p>
         </p:txBody>
       </p:sp>
@@ -6920,8 +6605,8 @@
         </p:blipFill>
         <p:spPr bwMode="auto">
           <a:xfrm>
-            <a:off x="114143" y="661987"/>
-            <a:ext cx="4998524" cy="2671763"/>
+            <a:off x="257016" y="1138237"/>
+            <a:ext cx="8615993" cy="4605338"/>
           </a:xfrm>
           <a:prstGeom prst="rect">
             <a:avLst/>
@@ -6951,74 +6636,20 @@
           </a:extLst>
         </p:spPr>
       </p:pic>
-      <p:pic>
-        <p:nvPicPr>
-          <p:cNvPr id="14" name="Picture 2" descr="screencapture-localhost-3000-Agent-2026-04-28-08_09_18"/>
-          <p:cNvPicPr>
-            <a:picLocks noChangeAspect="1" noChangeArrowheads="1"/>
-          </p:cNvPicPr>
+      <p:sp>
+        <p:nvSpPr>
+          <p:cNvPr id="15" name="Прямоугольник 14"/>
+          <p:cNvSpPr/>
           <p:nvPr/>
-        </p:nvPicPr>
-        <p:blipFill>
-          <a:blip r:embed="rId3" cstate="print">
-            <a:extLst>
-              <a:ext uri="{28A0092B-C50C-407E-A947-70E740481C1C}">
-                <a14:useLocalDpi xmlns:a14="http://schemas.microsoft.com/office/drawing/2010/main" val="0"/>
-              </a:ext>
-            </a:extLst>
-          </a:blip>
-          <a:srcRect/>
-          <a:stretch>
-            <a:fillRect/>
-          </a:stretch>
-        </p:blipFill>
-        <p:spPr bwMode="auto">
-          <a:xfrm>
-            <a:off x="3138761" y="3002303"/>
-            <a:ext cx="5912646" cy="3160371"/>
+        </p:nvSpPr>
+        <p:spPr>
+          <a:xfrm>
+            <a:off x="5078122" y="6248400"/>
+            <a:ext cx="184731" cy="369332"/>
           </a:xfrm>
           <a:prstGeom prst="rect">
             <a:avLst/>
           </a:prstGeom>
-          <a:noFill/>
-          <a:ln>
-            <a:noFill/>
-          </a:ln>
-          <a:extLst>
-            <a:ext uri="{909E8E84-426E-40DD-AFC4-6F175D3DCCD1}">
-              <a14:hiddenFill xmlns:a14="http://schemas.microsoft.com/office/drawing/2010/main">
-                <a:solidFill>
-                  <a:srgbClr val="FFFFFF"/>
-                </a:solidFill>
-              </a14:hiddenFill>
-            </a:ext>
-            <a:ext uri="{91240B29-F687-4F45-9708-019B960494DF}">
-              <a14:hiddenLine xmlns:a14="http://schemas.microsoft.com/office/drawing/2010/main" w="9525">
-                <a:solidFill>
-                  <a:srgbClr val="000000"/>
-                </a:solidFill>
-                <a:miter lim="800000"/>
-                <a:headEnd/>
-                <a:tailEnd/>
-              </a14:hiddenLine>
-            </a:ext>
-          </a:extLst>
-        </p:spPr>
-      </p:pic>
-      <p:sp>
-        <p:nvSpPr>
-          <p:cNvPr id="15" name="Прямоугольник 14"/>
-          <p:cNvSpPr/>
-          <p:nvPr/>
-        </p:nvSpPr>
-        <p:spPr>
-          <a:xfrm>
-            <a:off x="5078122" y="6248400"/>
-            <a:ext cx="184731" cy="369332"/>
-          </a:xfrm>
-          <a:prstGeom prst="rect">
-            <a:avLst/>
-          </a:prstGeom>
         </p:spPr>
         <p:txBody>
           <a:bodyPr wrap="none">
@@ -7027,92 +6658,6 @@
           <a:lstStyle/>
           <a:p>
             <a:endParaRPr lang="ru-RU" dirty="0"/>
-          </a:p>
-        </p:txBody>
-      </p:sp>
-      <p:sp>
-        <p:nvSpPr>
-          <p:cNvPr id="16" name="TextBox 15">
-            <a:extLst>
-              <a:ext uri="{FF2B5EF4-FFF2-40B4-BE49-F238E27FC236}">
-                <a16:creationId xmlns:a16="http://schemas.microsoft.com/office/drawing/2014/main" xmlns="" id="{42642DA8-38FB-40C2-A8E5-E2D7DE3F20BE}"/>
-              </a:ext>
-            </a:extLst>
-          </p:cNvPr>
-          <p:cNvSpPr txBox="1"/>
-          <p:nvPr/>
-        </p:nvSpPr>
-        <p:spPr>
-          <a:xfrm>
-            <a:off x="96931" y="3580859"/>
-            <a:ext cx="3235660" cy="300082"/>
-          </a:xfrm>
-          <a:prstGeom prst="rect">
-            <a:avLst/>
-          </a:prstGeom>
-          <a:noFill/>
-        </p:spPr>
-        <p:txBody>
-          <a:bodyPr wrap="square" rtlCol="0">
-            <a:spAutoFit/>
-          </a:bodyPr>
-          <a:lstStyle/>
-          <a:p>
-            <a:pPr algn="ctr"/>
-            <a:r>
-              <a:rPr lang="ru-RU" sz="1350" dirty="0" smtClean="0">
-                <a:latin typeface="Times New Roman" panose="02020603050405020304" pitchFamily="18" charset="0"/>
-                <a:cs typeface="Times New Roman" panose="02020603050405020304" pitchFamily="18" charset="0"/>
-              </a:rPr>
-              <a:t>Админ-панель</a:t>
-            </a:r>
-            <a:endParaRPr lang="ru-RU" sz="1350" dirty="0">
-              <a:latin typeface="Times New Roman" panose="02020603050405020304" pitchFamily="18" charset="0"/>
-              <a:cs typeface="Times New Roman" panose="02020603050405020304" pitchFamily="18" charset="0"/>
-            </a:endParaRPr>
-          </a:p>
-        </p:txBody>
-      </p:sp>
-      <p:sp>
-        <p:nvSpPr>
-          <p:cNvPr id="17" name="TextBox 16">
-            <a:extLst>
-              <a:ext uri="{FF2B5EF4-FFF2-40B4-BE49-F238E27FC236}">
-                <a16:creationId xmlns:a16="http://schemas.microsoft.com/office/drawing/2014/main" xmlns="" id="{42642DA8-38FB-40C2-A8E5-E2D7DE3F20BE}"/>
-              </a:ext>
-            </a:extLst>
-          </p:cNvPr>
-          <p:cNvSpPr txBox="1"/>
-          <p:nvPr/>
-        </p:nvSpPr>
-        <p:spPr>
-          <a:xfrm>
-            <a:off x="4477254" y="6188349"/>
-            <a:ext cx="3235660" cy="300082"/>
-          </a:xfrm>
-          <a:prstGeom prst="rect">
-            <a:avLst/>
-          </a:prstGeom>
-          <a:noFill/>
-        </p:spPr>
-        <p:txBody>
-          <a:bodyPr wrap="square" rtlCol="0">
-            <a:spAutoFit/>
-          </a:bodyPr>
-          <a:lstStyle/>
-          <a:p>
-            <a:pPr algn="ctr"/>
-            <a:r>
-              <a:rPr lang="ru-RU" sz="1350" dirty="0" smtClean="0">
-                <a:latin typeface="Times New Roman" panose="02020603050405020304" pitchFamily="18" charset="0"/>
-                <a:cs typeface="Times New Roman" panose="02020603050405020304" pitchFamily="18" charset="0"/>
-              </a:rPr>
-              <a:t>Панель страхового агента</a:t>
-            </a:r>
-            <a:endParaRPr lang="ru-RU" sz="1350" dirty="0">
-              <a:latin typeface="Times New Roman" panose="02020603050405020304" pitchFamily="18" charset="0"/>
-              <a:cs typeface="Times New Roman" panose="02020603050405020304" pitchFamily="18" charset="0"/>
-            </a:endParaRPr>
           </a:p>
         </p:txBody>
       </p:sp>
@@ -7566,6 +7111,163 @@
       </p:grpSpPr>
       <p:sp>
         <p:nvSpPr>
+          <p:cNvPr id="5" name="Заголовок 1"/>
+          <p:cNvSpPr>
+            <a:spLocks noGrp="1"/>
+          </p:cNvSpPr>
+          <p:nvPr>
+            <p:ph type="title"/>
+          </p:nvPr>
+        </p:nvSpPr>
+        <p:spPr>
+          <a:xfrm>
+            <a:off x="103739" y="158273"/>
+            <a:ext cx="7886700" cy="313023"/>
+          </a:xfrm>
+        </p:spPr>
+        <p:txBody>
+          <a:bodyPr>
+            <a:noAutofit/>
+          </a:bodyPr>
+          <a:lstStyle/>
+          <a:p>
+            <a:r>
+              <a:rPr lang="ru-RU" sz="2000" b="1" dirty="0" smtClean="0">
+                <a:latin typeface="Times New Roman" panose="02020603050405020304" pitchFamily="18" charset="0"/>
+                <a:cs typeface="Times New Roman" panose="02020603050405020304" pitchFamily="18" charset="0"/>
+              </a:rPr>
+              <a:t>Панель </a:t>
+            </a:r>
+            <a:r>
+              <a:rPr lang="ru-RU" sz="2000" b="1" dirty="0">
+                <a:latin typeface="Times New Roman" panose="02020603050405020304" pitchFamily="18" charset="0"/>
+                <a:cs typeface="Times New Roman" panose="02020603050405020304" pitchFamily="18" charset="0"/>
+              </a:rPr>
+              <a:t>страхового агента</a:t>
+            </a:r>
+          </a:p>
+        </p:txBody>
+      </p:sp>
+      <p:sp>
+        <p:nvSpPr>
+          <p:cNvPr id="4" name="Номер слайда 3"/>
+          <p:cNvSpPr>
+            <a:spLocks noGrp="1"/>
+          </p:cNvSpPr>
+          <p:nvPr>
+            <p:ph type="sldNum" sz="quarter" idx="12"/>
+          </p:nvPr>
+        </p:nvSpPr>
+        <p:spPr>
+          <a:xfrm>
+            <a:off x="6927506" y="158273"/>
+            <a:ext cx="2057400" cy="273844"/>
+          </a:xfrm>
+        </p:spPr>
+        <p:txBody>
+          <a:bodyPr/>
+          <a:lstStyle/>
+          <a:p>
+            <a:fld id="{9085F210-7A9F-4CCE-ADA7-E2F1EE154959}" type="slidenum">
+              <a:rPr lang="ru-RU" sz="2700">
+                <a:latin typeface="Times New Roman" panose="02020603050405020304" pitchFamily="18" charset="0"/>
+                <a:cs typeface="Times New Roman" panose="02020603050405020304" pitchFamily="18" charset="0"/>
+              </a:rPr>
+              <a:t>20</a:t>
+            </a:fld>
+            <a:endParaRPr lang="ru-RU" dirty="0">
+              <a:latin typeface="Times New Roman" panose="02020603050405020304" pitchFamily="18" charset="0"/>
+              <a:cs typeface="Times New Roman" panose="02020603050405020304" pitchFamily="18" charset="0"/>
+            </a:endParaRPr>
+          </a:p>
+        </p:txBody>
+      </p:sp>
+      <p:sp>
+        <p:nvSpPr>
+          <p:cNvPr id="15" name="Прямоугольник 14"/>
+          <p:cNvSpPr/>
+          <p:nvPr/>
+        </p:nvSpPr>
+        <p:spPr>
+          <a:xfrm>
+            <a:off x="5078122" y="6248400"/>
+            <a:ext cx="184731" cy="369332"/>
+          </a:xfrm>
+          <a:prstGeom prst="rect">
+            <a:avLst/>
+          </a:prstGeom>
+        </p:spPr>
+        <p:txBody>
+          <a:bodyPr wrap="none">
+            <a:spAutoFit/>
+          </a:bodyPr>
+          <a:lstStyle/>
+          <a:p>
+            <a:endParaRPr lang="ru-RU" dirty="0"/>
+          </a:p>
+        </p:txBody>
+      </p:sp>
+      <p:pic>
+        <p:nvPicPr>
+          <p:cNvPr id="9" name="Рисунок 8"/>
+          <p:cNvPicPr/>
+          <p:nvPr/>
+        </p:nvPicPr>
+        <p:blipFill>
+          <a:blip r:embed="rId2"/>
+          <a:stretch>
+            <a:fillRect/>
+          </a:stretch>
+        </p:blipFill>
+        <p:spPr>
+          <a:xfrm>
+            <a:off x="277812" y="837564"/>
+            <a:ext cx="8370888" cy="5595502"/>
+          </a:xfrm>
+          <a:prstGeom prst="rect">
+            <a:avLst/>
+          </a:prstGeom>
+        </p:spPr>
+      </p:pic>
+    </p:spTree>
+    <p:extLst>
+      <p:ext uri="{BB962C8B-B14F-4D97-AF65-F5344CB8AC3E}">
+        <p14:creationId xmlns:p14="http://schemas.microsoft.com/office/powerpoint/2010/main" val="1252723199"/>
+      </p:ext>
+    </p:extLst>
+  </p:cSld>
+  <p:clrMapOvr>
+    <a:masterClrMapping/>
+  </p:clrMapOvr>
+  <p:timing>
+    <p:tnLst>
+      <p:par>
+        <p:cTn id="1" dur="indefinite" restart="never" nodeType="tmRoot"/>
+      </p:par>
+    </p:tnLst>
+  </p:timing>
+</p:sld>
+</file>
+
+<file path=ppt/slides/slide21.xml><?xml version="1.0" encoding="utf-8"?>
+<p:sld xmlns:a="http://schemas.openxmlformats.org/drawingml/2006/main" xmlns:r="http://schemas.openxmlformats.org/officeDocument/2006/relationships" xmlns:p="http://schemas.openxmlformats.org/presentationml/2006/main">
+  <p:cSld>
+    <p:spTree>
+      <p:nvGrpSpPr>
+        <p:cNvPr id="1" name=""/>
+        <p:cNvGrpSpPr/>
+        <p:nvPr/>
+      </p:nvGrpSpPr>
+      <p:grpSpPr>
+        <a:xfrm>
+          <a:off x="0" y="0"/>
+          <a:ext cx="0" cy="0"/>
+          <a:chOff x="0" y="0"/>
+          <a:chExt cx="0" cy="0"/>
+        </a:xfrm>
+      </p:grpSpPr>
+      <p:sp>
+        <p:nvSpPr>
           <p:cNvPr id="2" name="Номер слайда 1">
             <a:extLst>
               <a:ext uri="{FF2B5EF4-FFF2-40B4-BE49-F238E27FC236}">
@@ -7595,7 +7297,7 @@
                 <a:latin typeface="Times New Roman" panose="02020603050405020304" pitchFamily="18" charset="0"/>
                 <a:cs typeface="Times New Roman" panose="02020603050405020304" pitchFamily="18" charset="0"/>
               </a:rPr>
-              <a:t>20</a:t>
+              <a:t>21</a:t>
             </a:fld>
             <a:endParaRPr lang="ru-RU" dirty="0">
               <a:latin typeface="Times New Roman" panose="02020603050405020304" pitchFamily="18" charset="0"/>
@@ -8351,8 +8053,8 @@
         </p:nvSpPr>
         <p:spPr>
           <a:xfrm>
-            <a:off x="214361" y="1256258"/>
-            <a:ext cx="3119389" cy="3785652"/>
+            <a:off x="-238125" y="1256258"/>
+            <a:ext cx="3119389" cy="4154984"/>
           </a:xfrm>
           <a:prstGeom prst="rect">
             <a:avLst/>
@@ -8382,7 +8084,7 @@
             </a:r>
           </a:p>
           <a:p>
-            <a:pPr marL="285750" indent="-285750" algn="just">
+            <a:pPr marL="742950" lvl="1" indent="-285750" algn="just">
               <a:lnSpc>
                 <a:spcPct val="150000"/>
               </a:lnSpc>
@@ -8398,8 +8100,15 @@
                 <a:ea typeface="Times New Roman" panose="02020603050405020304" pitchFamily="18" charset="0"/>
                 <a:cs typeface="Times New Roman" panose="02020603050405020304" pitchFamily="18" charset="0"/>
               </a:rPr>
-              <a:t>Калькулятор </a:t>
-            </a:r>
+              <a:t>Калькулятор имеет простой интерфейс и заполняется в 3 шага.</a:t>
+            </a:r>
+          </a:p>
+          <a:p>
+            <a:pPr lvl="1" indent="342900" algn="just">
+              <a:lnSpc>
+                <a:spcPct val="150000"/>
+              </a:lnSpc>
+            </a:pPr>
             <a:r>
               <a:rPr lang="ru-RU" sz="1600" dirty="0" smtClean="0">
                 <a:solidFill>
@@ -8409,35 +8118,6 @@
                 <a:ea typeface="Times New Roman" panose="02020603050405020304" pitchFamily="18" charset="0"/>
                 <a:cs typeface="Times New Roman" panose="02020603050405020304" pitchFamily="18" charset="0"/>
               </a:rPr>
-              <a:t>имеет </a:t>
-            </a:r>
-            <a:r>
-              <a:rPr lang="ru-RU" sz="1600" dirty="0" smtClean="0">
-                <a:solidFill>
-                  <a:srgbClr val="000000"/>
-                </a:solidFill>
-                <a:latin typeface="Times New Roman" panose="02020603050405020304" pitchFamily="18" charset="0"/>
-                <a:ea typeface="Times New Roman" panose="02020603050405020304" pitchFamily="18" charset="0"/>
-                <a:cs typeface="Times New Roman" panose="02020603050405020304" pitchFamily="18" charset="0"/>
-              </a:rPr>
-              <a:t>простой интерфейс и заполняется в 3 шага.</a:t>
-            </a:r>
-          </a:p>
-          <a:p>
-            <a:pPr indent="342900" algn="just">
-              <a:lnSpc>
-                <a:spcPct val="150000"/>
-              </a:lnSpc>
-            </a:pPr>
-            <a:r>
-              <a:rPr lang="ru-RU" sz="1600" dirty="0" smtClean="0">
-                <a:solidFill>
-                  <a:srgbClr val="000000"/>
-                </a:solidFill>
-                <a:latin typeface="Times New Roman" panose="02020603050405020304" pitchFamily="18" charset="0"/>
-                <a:ea typeface="Times New Roman" panose="02020603050405020304" pitchFamily="18" charset="0"/>
-                <a:cs typeface="Times New Roman" panose="02020603050405020304" pitchFamily="18" charset="0"/>
-              </a:rPr>
               <a:t>Слабые </a:t>
             </a:r>
             <a:r>
@@ -8453,7 +8133,7 @@
             </a:r>
           </a:p>
           <a:p>
-            <a:pPr marL="285750" indent="-285750" algn="just">
+            <a:pPr marL="742950" lvl="1" indent="-285750" algn="just">
               <a:lnSpc>
                 <a:spcPct val="150000"/>
               </a:lnSpc>
@@ -8469,18 +8149,7 @@
                 <a:ea typeface="Times New Roman" panose="02020603050405020304" pitchFamily="18" charset="0"/>
                 <a:cs typeface="Times New Roman" panose="02020603050405020304" pitchFamily="18" charset="0"/>
               </a:rPr>
-              <a:t>Не</a:t>
-            </a:r>
-            <a:r>
-              <a:rPr lang="ru-RU" sz="1600" dirty="0" smtClean="0">
-                <a:solidFill>
-                  <a:srgbClr val="000000"/>
-                </a:solidFill>
-                <a:latin typeface="Times New Roman" panose="02020603050405020304" pitchFamily="18" charset="0"/>
-                <a:ea typeface="Times New Roman" panose="02020603050405020304" pitchFamily="18" charset="0"/>
-                <a:cs typeface="Times New Roman" panose="02020603050405020304" pitchFamily="18" charset="0"/>
-              </a:rPr>
-              <a:t>полноценный онлайн-расчёт.</a:t>
+              <a:t>Неполноценный онлайн-расчёт.</a:t>
             </a:r>
             <a:endParaRPr lang="ru-RU" sz="1600" dirty="0">
               <a:solidFill>
@@ -8492,7 +8161,7 @@
             </a:endParaRPr>
           </a:p>
           <a:p>
-            <a:pPr marL="285750" indent="-285750" algn="just">
+            <a:pPr marL="742950" lvl="1" indent="-285750" algn="just">
               <a:lnSpc>
                 <a:spcPct val="150000"/>
               </a:lnSpc>
@@ -8739,8 +8408,8 @@
         </p:nvSpPr>
         <p:spPr>
           <a:xfrm>
-            <a:off x="174775" y="978039"/>
-            <a:ext cx="2758926" cy="3402022"/>
+            <a:off x="-190500" y="984528"/>
+            <a:ext cx="2758926" cy="3933834"/>
           </a:xfrm>
           <a:prstGeom prst="rect">
             <a:avLst/>
@@ -8773,7 +8442,7 @@
             </a:r>
           </a:p>
           <a:p>
-            <a:pPr marL="285750" indent="-285750" algn="just">
+            <a:pPr marL="742950" lvl="1" indent="-285750" algn="just">
               <a:lnSpc>
                 <a:spcPct val="108000"/>
               </a:lnSpc>
@@ -8792,22 +8461,11 @@
                 <a:ea typeface="Times New Roman" panose="02020603050405020304" pitchFamily="18" charset="0"/>
                 <a:cs typeface="Times New Roman" panose="02020603050405020304" pitchFamily="18" charset="0"/>
               </a:rPr>
-              <a:t>Детальный </a:t>
-            </a:r>
-            <a:r>
-              <a:rPr lang="ru-RU" sz="1600" dirty="0" smtClean="0">
-                <a:solidFill>
-                  <a:srgbClr val="000000"/>
-                </a:solidFill>
-                <a:latin typeface="Times New Roman" panose="02020603050405020304" pitchFamily="18" charset="0"/>
-                <a:ea typeface="Times New Roman" panose="02020603050405020304" pitchFamily="18" charset="0"/>
-                <a:cs typeface="Times New Roman" panose="02020603050405020304" pitchFamily="18" charset="0"/>
-              </a:rPr>
-              <a:t>онлайн-калькулятор</a:t>
-            </a:r>
-          </a:p>
-          <a:p>
-            <a:pPr marL="285750" indent="-285750" algn="just">
+              <a:t>Детальный онлайн-калькулятор</a:t>
+            </a:r>
+          </a:p>
+          <a:p>
+            <a:pPr marL="742950" lvl="1" indent="-285750" algn="just">
               <a:lnSpc>
                 <a:spcPct val="108000"/>
               </a:lnSpc>
@@ -8860,7 +8518,7 @@
             </a:endParaRPr>
           </a:p>
           <a:p>
-            <a:pPr indent="337661" algn="just">
+            <a:pPr lvl="1" indent="337661" algn="just">
               <a:lnSpc>
                 <a:spcPct val="108000"/>
               </a:lnSpc>
@@ -8881,7 +8539,7 @@
             </a:r>
           </a:p>
           <a:p>
-            <a:pPr marL="285750" indent="-285750" algn="just">
+            <a:pPr marL="742950" lvl="1" indent="-285750" algn="just">
               <a:lnSpc>
                 <a:spcPct val="108000"/>
               </a:lnSpc>
@@ -8915,7 +8573,7 @@
             </a:r>
           </a:p>
           <a:p>
-            <a:pPr marL="285750" indent="-285750" algn="just">
+            <a:pPr marL="742950" lvl="1" indent="-285750" algn="just">
               <a:lnSpc>
                 <a:spcPct val="108000"/>
               </a:lnSpc>
@@ -8992,8 +8650,8 @@
         </p:blipFill>
         <p:spPr bwMode="auto">
           <a:xfrm>
-            <a:off x="2933701" y="1077306"/>
-            <a:ext cx="6134100" cy="4267111"/>
+            <a:off x="2568426" y="1077306"/>
+            <a:ext cx="6499375" cy="4267111"/>
           </a:xfrm>
           <a:prstGeom prst="rect">
             <a:avLst/>
@@ -9124,8 +8782,8 @@
         </p:nvSpPr>
         <p:spPr>
           <a:xfrm>
-            <a:off x="156853" y="647702"/>
-            <a:ext cx="2348222" cy="5201424"/>
+            <a:off x="-147947" y="557870"/>
+            <a:ext cx="2348222" cy="6309420"/>
           </a:xfrm>
           <a:prstGeom prst="rect">
             <a:avLst/>
@@ -9158,7 +8816,7 @@
             </a:r>
           </a:p>
           <a:p>
-            <a:pPr marL="285750" indent="-285750" algn="just">
+            <a:pPr marL="742950" lvl="1" indent="-285750" algn="just">
               <a:lnSpc>
                 <a:spcPct val="150000"/>
               </a:lnSpc>
@@ -9192,7 +8850,7 @@
             </a:r>
           </a:p>
           <a:p>
-            <a:pPr indent="337661" algn="just">
+            <a:pPr lvl="1" indent="337661" algn="just">
               <a:lnSpc>
                 <a:spcPct val="150000"/>
               </a:lnSpc>
@@ -9209,22 +8867,11 @@
                 <a:ea typeface="Times New Roman" panose="02020603050405020304" pitchFamily="18" charset="0"/>
                 <a:cs typeface="Times New Roman" panose="02020603050405020304" pitchFamily="18" charset="0"/>
               </a:rPr>
-              <a:t>Слабые </a:t>
-            </a:r>
-            <a:r>
-              <a:rPr lang="ru-RU" sz="1600" dirty="0" smtClean="0">
-                <a:solidFill>
-                  <a:srgbClr val="000000"/>
-                </a:solidFill>
-                <a:latin typeface="Times New Roman" panose="02020603050405020304" pitchFamily="18" charset="0"/>
-                <a:ea typeface="Times New Roman" panose="02020603050405020304" pitchFamily="18" charset="0"/>
-                <a:cs typeface="Times New Roman" panose="02020603050405020304" pitchFamily="18" charset="0"/>
-              </a:rPr>
-              <a:t>стороны:</a:t>
-            </a:r>
-          </a:p>
-          <a:p>
-            <a:pPr marL="285750" indent="-285750" algn="just">
+              <a:t>Слабые стороны:</a:t>
+            </a:r>
+          </a:p>
+          <a:p>
+            <a:pPr marL="742950" lvl="1" indent="-285750" algn="just">
               <a:lnSpc>
                 <a:spcPct val="150000"/>
               </a:lnSpc>
@@ -9277,7 +8924,7 @@
             </a:endParaRPr>
           </a:p>
           <a:p>
-            <a:pPr marL="285750" indent="-285750" algn="just">
+            <a:pPr marL="742950" lvl="1" indent="-285750" algn="just">
               <a:lnSpc>
                 <a:spcPct val="150000"/>
               </a:lnSpc>
@@ -9396,8 +9043,8 @@
         </p:blipFill>
         <p:spPr bwMode="auto">
           <a:xfrm>
-            <a:off x="2713268" y="733426"/>
-            <a:ext cx="6338995" cy="4010024"/>
+            <a:off x="2278010" y="885825"/>
+            <a:ext cx="6865990" cy="4343399"/>
           </a:xfrm>
           <a:prstGeom prst="rect">
             <a:avLst/>
@@ -9522,7 +9169,7 @@
         </p:nvSpPr>
         <p:spPr>
           <a:xfrm>
-            <a:off x="156851" y="188538"/>
+            <a:off x="0" y="3872"/>
             <a:ext cx="2242922" cy="369332"/>
           </a:xfrm>
           <a:prstGeom prst="rect">
@@ -9566,24 +9213,66 @@
       </p:sp>
       <p:pic>
         <p:nvPicPr>
-          <p:cNvPr id="6" name="Рисунок 5"/>
-          <p:cNvPicPr/>
+          <p:cNvPr id="4098" name="Picture 2"/>
+          <p:cNvPicPr>
+            <a:picLocks noChangeAspect="1" noChangeArrowheads="1"/>
+          </p:cNvPicPr>
           <p:nvPr/>
         </p:nvPicPr>
         <p:blipFill>
-          <a:blip r:embed="rId2"/>
+          <a:blip r:embed="rId2">
+            <a:extLst>
+              <a:ext uri="{28A0092B-C50C-407E-A947-70E740481C1C}">
+                <a14:useLocalDpi xmlns:a14="http://schemas.microsoft.com/office/drawing/2010/main" val="0"/>
+              </a:ext>
+            </a:extLst>
+          </a:blip>
+          <a:srcRect/>
           <a:stretch>
             <a:fillRect/>
           </a:stretch>
         </p:blipFill>
-        <p:spPr>
-          <a:xfrm>
-            <a:off x="323850" y="828675"/>
-            <a:ext cx="8715375" cy="5895975"/>
+        <p:spPr bwMode="auto">
+          <a:xfrm>
+            <a:off x="46037" y="360363"/>
+            <a:ext cx="9097963" cy="6497637"/>
           </a:xfrm>
           <a:prstGeom prst="rect">
             <a:avLst/>
           </a:prstGeom>
+          <a:noFill/>
+          <a:ln>
+            <a:noFill/>
+          </a:ln>
+          <a:effectLst/>
+          <a:extLst>
+            <a:ext uri="{909E8E84-426E-40DD-AFC4-6F175D3DCCD1}">
+              <a14:hiddenFill xmlns:a14="http://schemas.microsoft.com/office/drawing/2010/main">
+                <a:solidFill>
+                  <a:schemeClr val="accent1"/>
+                </a:solidFill>
+              </a14:hiddenFill>
+            </a:ext>
+            <a:ext uri="{91240B29-F687-4F45-9708-019B960494DF}">
+              <a14:hiddenLine xmlns:a14="http://schemas.microsoft.com/office/drawing/2010/main" w="9525">
+                <a:solidFill>
+                  <a:schemeClr val="tx1"/>
+                </a:solidFill>
+                <a:miter lim="800000"/>
+                <a:headEnd/>
+                <a:tailEnd/>
+              </a14:hiddenLine>
+            </a:ext>
+            <a:ext uri="{AF507438-7753-43E0-B8FC-AC1667EBCBE1}">
+              <a14:hiddenEffects xmlns:a14="http://schemas.microsoft.com/office/drawing/2010/main">
+                <a:effectLst>
+                  <a:outerShdw dist="35921" dir="2700000" algn="ctr" rotWithShape="0">
+                    <a:schemeClr val="bg2"/>
+                  </a:outerShdw>
+                </a:effectLst>
+              </a14:hiddenEffects>
+            </a:ext>
+          </a:extLst>
         </p:spPr>
       </p:pic>
     </p:spTree>
@@ -9672,7 +9361,7 @@
         <p:spPr>
           <a:xfrm>
             <a:off x="156851" y="188538"/>
-            <a:ext cx="3288080" cy="369332"/>
+            <a:ext cx="3283912" cy="369332"/>
           </a:xfrm>
           <a:prstGeom prst="rect">
             <a:avLst/>
@@ -9686,32 +9375,39 @@
           <a:lstStyle/>
           <a:p>
             <a:r>
-              <a:rPr lang="en-US" b="1" dirty="0" smtClean="0">
+              <a:rPr lang="en-US" b="1" dirty="0">
                 <a:latin typeface="Times New Roman" panose="02020603050405020304" pitchFamily="18" charset="0"/>
                 <a:cs typeface="Times New Roman" panose="02020603050405020304" pitchFamily="18" charset="0"/>
               </a:rPr>
               <a:t>IDEF0 </a:t>
             </a:r>
             <a:r>
+              <a:rPr lang="ru-RU" b="1" dirty="0">
+                <a:latin typeface="Times New Roman" panose="02020603050405020304" pitchFamily="18" charset="0"/>
+                <a:cs typeface="Times New Roman" panose="02020603050405020304" pitchFamily="18" charset="0"/>
+              </a:rPr>
+              <a:t>диаграмма</a:t>
+            </a:r>
+            <a:r>
+              <a:rPr lang="en-US" b="1" dirty="0">
+                <a:latin typeface="Times New Roman" panose="02020603050405020304" pitchFamily="18" charset="0"/>
+                <a:cs typeface="Times New Roman" panose="02020603050405020304" pitchFamily="18" charset="0"/>
+              </a:rPr>
+              <a:t> </a:t>
+            </a:r>
+            <a:r>
+              <a:rPr lang="ru-RU" b="1" dirty="0">
+                <a:latin typeface="Times New Roman" panose="02020603050405020304" pitchFamily="18" charset="0"/>
+                <a:cs typeface="Times New Roman" panose="02020603050405020304" pitchFamily="18" charset="0"/>
+              </a:rPr>
+              <a:t>уровень </a:t>
+            </a:r>
+            <a:r>
               <a:rPr lang="ru-RU" b="1" dirty="0" smtClean="0">
                 <a:latin typeface="Times New Roman" panose="02020603050405020304" pitchFamily="18" charset="0"/>
                 <a:cs typeface="Times New Roman" panose="02020603050405020304" pitchFamily="18" charset="0"/>
               </a:rPr>
-              <a:t>диаграмма</a:t>
-            </a:r>
-            <a:r>
-              <a:rPr lang="en-US" b="1" dirty="0" smtClean="0">
-                <a:latin typeface="Times New Roman" panose="02020603050405020304" pitchFamily="18" charset="0"/>
-                <a:cs typeface="Times New Roman" panose="02020603050405020304" pitchFamily="18" charset="0"/>
-              </a:rPr>
-              <a:t> </a:t>
-            </a:r>
-            <a:r>
-              <a:rPr lang="ru-RU" b="1" dirty="0" smtClean="0">
-                <a:latin typeface="Times New Roman" panose="02020603050405020304" pitchFamily="18" charset="0"/>
-                <a:cs typeface="Times New Roman" panose="02020603050405020304" pitchFamily="18" charset="0"/>
-              </a:rPr>
-              <a:t>уровень А0</a:t>
+              <a:t>А1</a:t>
             </a:r>
             <a:endParaRPr lang="ru-RU" b="1" dirty="0">
               <a:latin typeface="Times New Roman" panose="02020603050405020304" pitchFamily="18" charset="0"/>
@@ -9722,30 +9418,72 @@
       </p:sp>
       <p:pic>
         <p:nvPicPr>
-          <p:cNvPr id="7" name="Рисунок 6"/>
-          <p:cNvPicPr/>
+          <p:cNvPr id="1028" name="Picture 4"/>
+          <p:cNvPicPr>
+            <a:picLocks noChangeAspect="1" noChangeArrowheads="1"/>
+          </p:cNvPicPr>
           <p:nvPr/>
         </p:nvPicPr>
         <p:blipFill>
-          <a:blip r:embed="rId2"/>
+          <a:blip r:embed="rId2">
+            <a:extLst>
+              <a:ext uri="{28A0092B-C50C-407E-A947-70E740481C1C}">
+                <a14:useLocalDpi xmlns:a14="http://schemas.microsoft.com/office/drawing/2010/main" val="0"/>
+              </a:ext>
+            </a:extLst>
+          </a:blip>
+          <a:srcRect/>
           <a:stretch>
             <a:fillRect/>
           </a:stretch>
         </p:blipFill>
-        <p:spPr>
-          <a:xfrm>
-            <a:off x="238125" y="685800"/>
-            <a:ext cx="8610600" cy="5762625"/>
+        <p:spPr bwMode="auto">
+          <a:xfrm>
+            <a:off x="85725" y="834096"/>
+            <a:ext cx="8920955" cy="5404780"/>
           </a:xfrm>
           <a:prstGeom prst="rect">
             <a:avLst/>
           </a:prstGeom>
+          <a:noFill/>
+          <a:ln>
+            <a:noFill/>
+          </a:ln>
+          <a:effectLst/>
+          <a:extLst>
+            <a:ext uri="{909E8E84-426E-40DD-AFC4-6F175D3DCCD1}">
+              <a14:hiddenFill xmlns:a14="http://schemas.microsoft.com/office/drawing/2010/main">
+                <a:solidFill>
+                  <a:schemeClr val="accent1"/>
+                </a:solidFill>
+              </a14:hiddenFill>
+            </a:ext>
+            <a:ext uri="{91240B29-F687-4F45-9708-019B960494DF}">
+              <a14:hiddenLine xmlns:a14="http://schemas.microsoft.com/office/drawing/2010/main" w="9525">
+                <a:solidFill>
+                  <a:schemeClr val="tx1"/>
+                </a:solidFill>
+                <a:miter lim="800000"/>
+                <a:headEnd/>
+                <a:tailEnd/>
+              </a14:hiddenLine>
+            </a:ext>
+            <a:ext uri="{AF507438-7753-43E0-B8FC-AC1667EBCBE1}">
+              <a14:hiddenEffects xmlns:a14="http://schemas.microsoft.com/office/drawing/2010/main">
+                <a:effectLst>
+                  <a:outerShdw dist="35921" dir="2700000" algn="ctr" rotWithShape="0">
+                    <a:schemeClr val="bg2"/>
+                  </a:outerShdw>
+                </a:effectLst>
+              </a14:hiddenEffects>
+            </a:ext>
+          </a:extLst>
         </p:spPr>
       </p:pic>
     </p:spTree>
     <p:extLst>
       <p:ext uri="{BB962C8B-B14F-4D97-AF65-F5344CB8AC3E}">
-        <p14:creationId xmlns:p14="http://schemas.microsoft.com/office/powerpoint/2010/main" val="2434609660"/>
+        <p14:creationId xmlns:p14="http://schemas.microsoft.com/office/powerpoint/2010/main" val="2758574466"/>
       </p:ext>
     </p:extLst>
   </p:cSld>
@@ -9874,7 +9612,7 @@
                 <a:latin typeface="Times New Roman" panose="02020603050405020304" pitchFamily="18" charset="0"/>
                 <a:cs typeface="Times New Roman" panose="02020603050405020304" pitchFamily="18" charset="0"/>
               </a:rPr>
-              <a:t>А1</a:t>
+              <a:t>А2</a:t>
             </a:r>
             <a:endParaRPr lang="ru-RU" b="1" dirty="0">
               <a:latin typeface="Times New Roman" panose="02020603050405020304" pitchFamily="18" charset="0"/>
@@ -9885,8 +9623,10 @@
       </p:sp>
       <p:pic>
         <p:nvPicPr>
-          <p:cNvPr id="6" name="Рисунок 5"/>
-          <p:cNvPicPr/>
+          <p:cNvPr id="2050" name="Picture 2"/>
+          <p:cNvPicPr>
+            <a:picLocks noChangeAspect="1" noChangeArrowheads="1"/>
+          </p:cNvPicPr>
           <p:nvPr/>
         </p:nvPicPr>
         <p:blipFill>
@@ -9904,19 +9644,51 @@
         </p:blipFill>
         <p:spPr bwMode="auto">
           <a:xfrm>
-            <a:off x="485775" y="809625"/>
-            <a:ext cx="8277225" cy="5800725"/>
+            <a:off x="512762" y="760413"/>
+            <a:ext cx="8116887" cy="5716587"/>
           </a:xfrm>
           <a:prstGeom prst="rect">
             <a:avLst/>
           </a:prstGeom>
           <a:noFill/>
+          <a:ln>
+            <a:noFill/>
+          </a:ln>
+          <a:effectLst/>
+          <a:extLst>
+            <a:ext uri="{909E8E84-426E-40DD-AFC4-6F175D3DCCD1}">
+              <a14:hiddenFill xmlns:a14="http://schemas.microsoft.com/office/drawing/2010/main">
+                <a:solidFill>
+                  <a:schemeClr val="accent1"/>
+                </a:solidFill>
+              </a14:hiddenFill>
+            </a:ext>
+            <a:ext uri="{91240B29-F687-4F45-9708-019B960494DF}">
+              <a14:hiddenLine xmlns:a14="http://schemas.microsoft.com/office/drawing/2010/main" w="9525">
+                <a:solidFill>
+                  <a:schemeClr val="tx1"/>
+                </a:solidFill>
+                <a:miter lim="800000"/>
+                <a:headEnd/>
+                <a:tailEnd/>
+              </a14:hiddenLine>
+            </a:ext>
+            <a:ext uri="{AF507438-7753-43E0-B8FC-AC1667EBCBE1}">
+              <a14:hiddenEffects xmlns:a14="http://schemas.microsoft.com/office/drawing/2010/main">
+                <a:effectLst>
+                  <a:outerShdw dist="35921" dir="2700000" algn="ctr" rotWithShape="0">
+                    <a:schemeClr val="bg2"/>
+                  </a:outerShdw>
+                </a:effectLst>
+              </a14:hiddenEffects>
+            </a:ext>
+          </a:extLst>
         </p:spPr>
       </p:pic>
     </p:spTree>
     <p:extLst>
       <p:ext uri="{BB962C8B-B14F-4D97-AF65-F5344CB8AC3E}">
-        <p14:creationId xmlns:p14="http://schemas.microsoft.com/office/powerpoint/2010/main" val="2758574466"/>
+        <p14:creationId xmlns:p14="http://schemas.microsoft.com/office/powerpoint/2010/main" val="101058881"/>
       </p:ext>
     </p:extLst>
   </p:cSld>
